--- a/PVA second supplier initiative/PVA_Second_Source_Slides.pptx
+++ b/PVA second supplier initiative/PVA_Second_Source_Slides.pptx
@@ -3290,7 +3290,7 @@
                 </a:solidFill>
                 <a:latin typeface="Calibri"/>
               </a:rPr>
-              <a:t>Oscar Penny  |  2026-06-27  |  In Progress — front-runner identified (CJB); APV in competition</a:t>
+              <a:t>Oscar Penny  |  2026-06-27  |  In Progress — CJB &amp; APV engaged; this deck shows the COST of a second source across scenarios (nothing decided)</a:t>
             </a:r>
           </a:p>
         </p:txBody>
@@ -3409,7 +3409,7 @@
         </p:nvSpPr>
         <p:spPr>
           <a:xfrm>
-            <a:off x="731520" y="1463040"/>
+            <a:off x="731520" y="1280160"/>
             <a:ext cx="10698480" cy="1280160"/>
           </a:xfrm>
           <a:prstGeom prst="rect">
@@ -3429,13 +3429,13 @@
               </a:spcAft>
             </a:pPr>
             <a:r>
-              <a:rPr sz="3400" b="1" i="0">
+              <a:rPr sz="3200" b="1" i="0">
                 <a:solidFill>
                   <a:srgbClr val="FFFFFF"/>
                 </a:solidFill>
                 <a:latin typeface="Calibri"/>
               </a:rPr>
-              <a:t>Recommendation</a:t>
+              <a:t>What a Second Source Costs — Summary</a:t>
             </a:r>
           </a:p>
         </p:txBody>
@@ -3448,8 +3448,8 @@
         </p:nvSpPr>
         <p:spPr>
           <a:xfrm>
-            <a:off x="731520" y="3017520"/>
-            <a:ext cx="10698480" cy="3291840"/>
+            <a:off x="731520" y="2926080"/>
+            <a:ext cx="10698480" cy="3474720"/>
           </a:xfrm>
           <a:prstGeom prst="rect">
             <a:avLst/>
@@ -3464,65 +3464,65 @@
           <a:p>
             <a:pPr algn="l">
               <a:spcAft>
-                <a:spcPts val="1200"/>
-              </a:spcAft>
-            </a:pPr>
-            <a:r>
-              <a:rPr sz="1700" b="0" i="0">
+                <a:spcPts val="1400"/>
+              </a:spcAft>
+            </a:pPr>
+            <a:r>
+              <a:rPr sz="1600" b="0" i="0">
                 <a:solidFill>
                   <a:srgbClr val="FFFFFF"/>
                 </a:solidFill>
                 <a:latin typeface="Calibri"/>
               </a:rPr>
-              <a:t>•  Advance CJB as front-runner — hard gate cleared, ideal small-batch fit, fast lead time.</a:t>
+              <a:t>•  If SNP holds price: redundancy is modest — ~$5–13k/yr depending on split &amp; 2nd-source premium (≈$0 at parity).</a:t>
             </a:r>
           </a:p>
           <a:p>
             <a:pPr algn="l">
               <a:spcAft>
-                <a:spcPts val="1200"/>
-              </a:spcAft>
-            </a:pPr>
-            <a:r>
-              <a:rPr sz="1700" b="0" i="0">
+                <a:spcPts val="1400"/>
+              </a:spcAft>
+            </a:pPr>
+            <a:r>
+              <a:rPr sz="1600" b="0" i="0">
                 <a:solidFill>
                   <a:srgbClr val="FFFFFF"/>
                 </a:solidFill>
                 <a:latin typeface="Calibri"/>
               </a:rPr>
-              <a:t>•  Keep APV in active competition — capable, interested, and our pricing leverage.</a:t>
+              <a:t>•  If SNP raises price on the reduced volume: cost can roughly double — that surcharge, on the larger retained volume, is often the bigger driver.</a:t>
             </a:r>
           </a:p>
           <a:p>
             <a:pPr algn="l">
               <a:spcAft>
-                <a:spcPts val="1200"/>
-              </a:spcAft>
-            </a:pPr>
-            <a:r>
-              <a:rPr sz="1700" b="0" i="0">
+                <a:spcPts val="1400"/>
+              </a:spcAft>
+            </a:pPr>
+            <a:r>
+              <a:rPr sz="1600" b="0" i="0">
                 <a:solidFill>
                   <a:srgbClr val="FFFFFF"/>
                 </a:solidFill>
                 <a:latin typeface="Calibri"/>
               </a:rPr>
-              <a:t>•  Award the second source ~1 drum/week (~35%) at a ~$8.8k/yr redundancy premium.</a:t>
+              <a:t>•  Range across plausible scenarios: ~$2.5k to ~$30k/yr.</a:t>
             </a:r>
           </a:p>
           <a:p>
             <a:pPr algn="l">
               <a:spcAft>
-                <a:spcPts val="1200"/>
-              </a:spcAft>
-            </a:pPr>
-            <a:r>
-              <a:rPr sz="1700" b="0" i="0">
+                <a:spcPts val="1400"/>
+              </a:spcAft>
+            </a:pPr>
+            <a:r>
+              <a:rPr sz="1600" b="0" i="0">
                 <a:solidFill>
                   <a:srgbClr val="FFFFFF"/>
                 </a:solidFill>
                 <a:latin typeface="Calibri"/>
               </a:rPr>
-              <a:t>•  Unblock the two gating items: SNP CoA viscosity target, and the CJB NDA.</a:t>
+              <a:t>•  Nothing decided — CJB &amp; APV both viable; scenarios stay ready to update as quotes (and any SNP re-price) arrive.</a:t>
             </a:r>
           </a:p>
         </p:txBody>
@@ -4494,7 +4494,7 @@
                 </a:solidFill>
                 <a:latin typeface="Calibri"/>
               </a:rPr>
-              <a:t>Demand &amp; Economics</a:t>
+              <a:t>The Cost of Keeping a Second Source</a:t>
             </a:r>
           </a:p>
         </p:txBody>
@@ -4546,8 +4546,8 @@
         </p:nvSpPr>
         <p:spPr>
           <a:xfrm>
-            <a:off x="548640" y="1188720"/>
-            <a:ext cx="2651760" cy="1645920"/>
+            <a:off x="548640" y="1143000"/>
+            <a:ext cx="2651760" cy="1371600"/>
           </a:xfrm>
           <a:prstGeom prst="rect">
             <a:avLst/>
@@ -4590,8 +4590,8 @@
         </p:nvSpPr>
         <p:spPr>
           <a:xfrm>
-            <a:off x="640080" y="1325880"/>
-            <a:ext cx="2468879" cy="1371600"/>
+            <a:off x="640080" y="1280160"/>
+            <a:ext cx="2468879" cy="1097280"/>
           </a:xfrm>
           <a:prstGeom prst="rect">
             <a:avLst/>
@@ -4645,8 +4645,8 @@
         </p:nvSpPr>
         <p:spPr>
           <a:xfrm>
-            <a:off x="3383280" y="1188720"/>
-            <a:ext cx="2651760" cy="1645920"/>
+            <a:off x="3383280" y="1143000"/>
+            <a:ext cx="2651760" cy="1371600"/>
           </a:xfrm>
           <a:prstGeom prst="rect">
             <a:avLst/>
@@ -4689,8 +4689,8 @@
         </p:nvSpPr>
         <p:spPr>
           <a:xfrm>
-            <a:off x="3474720" y="1325880"/>
-            <a:ext cx="2468879" cy="1371600"/>
+            <a:off x="3474720" y="1280160"/>
+            <a:ext cx="2468879" cy="1097280"/>
           </a:xfrm>
           <a:prstGeom prst="rect">
             <a:avLst/>
@@ -4744,8 +4744,8 @@
         </p:nvSpPr>
         <p:spPr>
           <a:xfrm>
-            <a:off x="6217920" y="1188720"/>
-            <a:ext cx="2651760" cy="1645920"/>
+            <a:off x="6217920" y="1143000"/>
+            <a:ext cx="2651760" cy="1371600"/>
           </a:xfrm>
           <a:prstGeom prst="rect">
             <a:avLst/>
@@ -4788,8 +4788,8 @@
         </p:nvSpPr>
         <p:spPr>
           <a:xfrm>
-            <a:off x="6309359" y="1325880"/>
-            <a:ext cx="2468879" cy="1371600"/>
+            <a:off x="6309359" y="1280160"/>
+            <a:ext cx="2468879" cy="1097280"/>
           </a:xfrm>
           <a:prstGeom prst="rect">
             <a:avLst/>
@@ -4843,8 +4843,8 @@
         </p:nvSpPr>
         <p:spPr>
           <a:xfrm>
-            <a:off x="9052560" y="1188720"/>
-            <a:ext cx="2560320" cy="1645920"/>
+            <a:off x="9052560" y="1143000"/>
+            <a:ext cx="2560320" cy="1371600"/>
           </a:xfrm>
           <a:prstGeom prst="rect">
             <a:avLst/>
@@ -4887,8 +4887,8 @@
         </p:nvSpPr>
         <p:spPr>
           <a:xfrm>
-            <a:off x="9144000" y="1325880"/>
-            <a:ext cx="2377439" cy="1371600"/>
+            <a:off x="9144000" y="1280160"/>
+            <a:ext cx="2377439" cy="1097280"/>
           </a:xfrm>
           <a:prstGeom prst="rect">
             <a:avLst/>
@@ -4929,65 +4929,21 @@
                 </a:solidFill>
                 <a:latin typeface="Calibri"/>
               </a:rPr>
-              <a:t>SNP price ($337.50/drum)</a:t>
-            </a:r>
-          </a:p>
-        </p:txBody>
-      </p:sp>
-      <p:sp>
-        <p:nvSpPr>
-          <p:cNvPr id="13" name="Rectangle 12"/>
-          <p:cNvSpPr/>
-          <p:nvPr/>
-        </p:nvSpPr>
-        <p:spPr>
-          <a:xfrm>
-            <a:off x="548640" y="3108960"/>
-            <a:ext cx="11064240" cy="457200"/>
-          </a:xfrm>
-          <a:prstGeom prst="rect">
-            <a:avLst/>
-          </a:prstGeom>
-          <a:solidFill>
-            <a:srgbClr val="2E75B6"/>
-          </a:solidFill>
-          <a:ln>
-            <a:noFill/>
-          </a:ln>
-          <a:effectLst/>
-        </p:spPr>
-        <p:style>
-          <a:lnRef idx="1">
-            <a:schemeClr val="accent1"/>
-          </a:lnRef>
-          <a:fillRef idx="3">
-            <a:schemeClr val="accent1"/>
-          </a:fillRef>
-          <a:effectRef idx="2">
-            <a:schemeClr val="accent1"/>
-          </a:effectRef>
-          <a:fontRef idx="minor">
-            <a:schemeClr val="lt1"/>
-          </a:fontRef>
-        </p:style>
-        <p:txBody>
-          <a:bodyPr rtlCol="0" anchor="ctr"/>
-          <a:lstStyle/>
-          <a:p>
-            <a:pPr algn="ctr"/>
-          </a:p>
-        </p:txBody>
-      </p:sp>
-      <p:sp>
-        <p:nvSpPr>
-          <p:cNvPr id="14" name="TextBox 13"/>
+              <a:t>SNP $337.50/drum</a:t>
+            </a:r>
+          </a:p>
+        </p:txBody>
+      </p:sp>
+      <p:sp>
+        <p:nvSpPr>
+          <p:cNvPr id="13" name="TextBox 12"/>
           <p:cNvSpPr txBox="1"/>
           <p:nvPr/>
         </p:nvSpPr>
         <p:spPr>
           <a:xfrm>
-            <a:off x="731520" y="3163824"/>
-            <a:ext cx="10789920" cy="365760"/>
+            <a:off x="548640" y="2697480"/>
+            <a:ext cx="11064240" cy="365760"/>
           </a:xfrm>
           <a:prstGeom prst="rect">
             <a:avLst/>
@@ -5006,324 +4962,431 @@
               </a:spcAft>
             </a:pPr>
             <a:r>
-              <a:rPr sz="1500" b="1" i="0">
-                <a:solidFill>
-                  <a:srgbClr val="FFFFFF"/>
-                </a:solidFill>
-                <a:latin typeface="Calibri"/>
-              </a:rPr>
-              <a:t>DECIDED PLAN — 1 drum/week to the second source (~35% of volume)</a:t>
-            </a:r>
-          </a:p>
-        </p:txBody>
-      </p:sp>
-      <p:sp>
-        <p:nvSpPr>
-          <p:cNvPr id="15" name="Rectangle 14"/>
-          <p:cNvSpPr/>
-          <p:nvPr/>
-        </p:nvSpPr>
-        <p:spPr>
-          <a:xfrm>
-            <a:off x="548640" y="3749039"/>
-            <a:ext cx="3566160" cy="1554480"/>
-          </a:xfrm>
-          <a:prstGeom prst="rect">
-            <a:avLst/>
-          </a:prstGeom>
-          <a:solidFill>
-            <a:srgbClr val="EEF3FA"/>
-          </a:solidFill>
-          <a:ln>
-            <a:noFill/>
-          </a:ln>
-          <a:effectLst/>
-        </p:spPr>
-        <p:style>
-          <a:lnRef idx="1">
-            <a:schemeClr val="accent1"/>
-          </a:lnRef>
-          <a:fillRef idx="3">
-            <a:schemeClr val="accent1"/>
-          </a:fillRef>
-          <a:effectRef idx="2">
-            <a:schemeClr val="accent1"/>
-          </a:effectRef>
-          <a:fontRef idx="minor">
-            <a:schemeClr val="lt1"/>
-          </a:fontRef>
-        </p:style>
-        <p:txBody>
-          <a:bodyPr rtlCol="0" anchor="ctr"/>
-          <a:lstStyle/>
-          <a:p>
-            <a:pPr algn="ctr"/>
-          </a:p>
-        </p:txBody>
-      </p:sp>
-      <p:sp>
-        <p:nvSpPr>
-          <p:cNvPr id="16" name="TextBox 15"/>
+              <a:rPr sz="1300" b="1" i="0">
+                <a:solidFill>
+                  <a:srgbClr val="1F4E78"/>
+                </a:solidFill>
+                <a:latin typeface="Calibri"/>
+              </a:rPr>
+              <a:t>Annual PREMIUM over the all-SNP baseline (the cost of redundancy) — selected scenarios:</a:t>
+            </a:r>
+          </a:p>
+        </p:txBody>
+      </p:sp>
+      <p:graphicFrame>
+        <p:nvGraphicFramePr>
+          <p:cNvPr id="14" name="Table 13"/>
+          <p:cNvGraphicFramePr>
+            <a:graphicFrameLocks noGrp="1"/>
+          </p:cNvGraphicFramePr>
+          <p:nvPr/>
+        </p:nvGraphicFramePr>
+        <p:xfrm>
+          <a:off x="548640" y="3108960"/>
+          <a:ext cx="11064240" cy="1965960"/>
+        </p:xfrm>
+        <a:graphic>
+          <a:graphicData uri="http://schemas.openxmlformats.org/drawingml/2006/table">
+            <a:tbl>
+              <a:tblPr firstRow="1" bandRow="1">
+                <a:tableStyleId>{5C22544A-7EE6-4342-B048-85BDC9FD1C3A}</a:tableStyleId>
+              </a:tblPr>
+              <a:tblGrid>
+                <a:gridCol w="3383280"/>
+                <a:gridCol w="2560320"/>
+                <a:gridCol w="2560320"/>
+                <a:gridCol w="2560320"/>
+              </a:tblGrid>
+              <a:tr h="491490">
+                <a:tc>
+                  <a:txBody>
+                    <a:bodyPr/>
+                    <a:lstStyle/>
+                    <a:p>
+                      <a:pPr algn="l"/>
+                      <a:r>
+                        <a:rPr sz="1300" b="1">
+                          <a:solidFill>
+                            <a:srgbClr val="FFFFFF"/>
+                          </a:solidFill>
+                          <a:latin typeface="Calibri"/>
+                        </a:rPr>
+                        <a:t>Allocation to 2nd source</a:t>
+                      </a:r>
+                    </a:p>
+                  </a:txBody>
+                  <a:tcPr>
+                    <a:solidFill>
+                      <a:srgbClr val="1F4E78"/>
+                    </a:solidFill>
+                  </a:tcPr>
+                </a:tc>
+                <a:tc>
+                  <a:txBody>
+                    <a:bodyPr/>
+                    <a:lstStyle/>
+                    <a:p>
+                      <a:pPr algn="ctr"/>
+                      <a:r>
+                        <a:rPr sz="1300" b="1">
+                          <a:solidFill>
+                            <a:srgbClr val="FFFFFF"/>
+                          </a:solidFill>
+                          <a:latin typeface="Calibri"/>
+                        </a:rPr>
+                        <a:t>2nd +50% / SNP holds</a:t>
+                      </a:r>
+                    </a:p>
+                  </a:txBody>
+                  <a:tcPr>
+                    <a:solidFill>
+                      <a:srgbClr val="1F4E78"/>
+                    </a:solidFill>
+                  </a:tcPr>
+                </a:tc>
+                <a:tc>
+                  <a:txBody>
+                    <a:bodyPr/>
+                    <a:lstStyle/>
+                    <a:p>
+                      <a:pPr algn="ctr"/>
+                      <a:r>
+                        <a:rPr sz="1300" b="1">
+                          <a:solidFill>
+                            <a:srgbClr val="FFFFFF"/>
+                          </a:solidFill>
+                          <a:latin typeface="Calibri"/>
+                        </a:rPr>
+                        <a:t>2nd +50% / SNP +10%</a:t>
+                      </a:r>
+                    </a:p>
+                  </a:txBody>
+                  <a:tcPr>
+                    <a:solidFill>
+                      <a:srgbClr val="1F4E78"/>
+                    </a:solidFill>
+                  </a:tcPr>
+                </a:tc>
+                <a:tc>
+                  <a:txBody>
+                    <a:bodyPr/>
+                    <a:lstStyle/>
+                    <a:p>
+                      <a:pPr algn="ctr"/>
+                      <a:r>
+                        <a:rPr sz="1300" b="1">
+                          <a:solidFill>
+                            <a:srgbClr val="FFFFFF"/>
+                          </a:solidFill>
+                          <a:latin typeface="Calibri"/>
+                        </a:rPr>
+                        <a:t>2nd +100% / SNP +20%</a:t>
+                      </a:r>
+                    </a:p>
+                  </a:txBody>
+                  <a:tcPr>
+                    <a:solidFill>
+                      <a:srgbClr val="1F4E78"/>
+                    </a:solidFill>
+                  </a:tcPr>
+                </a:tc>
+              </a:tr>
+              <a:tr h="491490">
+                <a:tc>
+                  <a:txBody>
+                    <a:bodyPr/>
+                    <a:lstStyle/>
+                    <a:p>
+                      <a:pPr algn="l"/>
+                      <a:r>
+                        <a:rPr sz="1300" b="1">
+                          <a:solidFill>
+                            <a:srgbClr val="1F4E78"/>
+                          </a:solidFill>
+                          <a:latin typeface="Calibri"/>
+                        </a:rPr>
+                        <a:t>20%  (~0.6 drum/wk)</a:t>
+                      </a:r>
+                    </a:p>
+                  </a:txBody>
+                  <a:tcPr>
+                    <a:solidFill>
+                      <a:srgbClr val="FFFFFF"/>
+                    </a:solidFill>
+                  </a:tcPr>
+                </a:tc>
+                <a:tc>
+                  <a:txBody>
+                    <a:bodyPr/>
+                    <a:lstStyle/>
+                    <a:p>
+                      <a:pPr algn="ctr"/>
+                      <a:r>
+                        <a:rPr sz="1300">
+                          <a:solidFill>
+                            <a:srgbClr val="1F4E78"/>
+                          </a:solidFill>
+                          <a:latin typeface="Calibri"/>
+                        </a:rPr>
+                        <a:t>$5,070</a:t>
+                      </a:r>
+                    </a:p>
+                  </a:txBody>
+                  <a:tcPr>
+                    <a:solidFill>
+                      <a:srgbClr val="E2EFDA"/>
+                    </a:solidFill>
+                  </a:tcPr>
+                </a:tc>
+                <a:tc>
+                  <a:txBody>
+                    <a:bodyPr/>
+                    <a:lstStyle/>
+                    <a:p>
+                      <a:pPr algn="ctr"/>
+                      <a:r>
+                        <a:rPr sz="1300">
+                          <a:solidFill>
+                            <a:srgbClr val="1F4E78"/>
+                          </a:solidFill>
+                          <a:latin typeface="Calibri"/>
+                        </a:rPr>
+                        <a:t>$9,126</a:t>
+                      </a:r>
+                    </a:p>
+                  </a:txBody>
+                  <a:tcPr>
+                    <a:solidFill>
+                      <a:srgbClr val="FFF2CC"/>
+                    </a:solidFill>
+                  </a:tcPr>
+                </a:tc>
+                <a:tc>
+                  <a:txBody>
+                    <a:bodyPr/>
+                    <a:lstStyle/>
+                    <a:p>
+                      <a:pPr algn="ctr"/>
+                      <a:r>
+                        <a:rPr sz="1300">
+                          <a:solidFill>
+                            <a:srgbClr val="1F4E78"/>
+                          </a:solidFill>
+                          <a:latin typeface="Calibri"/>
+                        </a:rPr>
+                        <a:t>$18,252</a:t>
+                      </a:r>
+                    </a:p>
+                  </a:txBody>
+                  <a:tcPr>
+                    <a:solidFill>
+                      <a:srgbClr val="FCE4D6"/>
+                    </a:solidFill>
+                  </a:tcPr>
+                </a:tc>
+              </a:tr>
+              <a:tr h="491490">
+                <a:tc>
+                  <a:txBody>
+                    <a:bodyPr/>
+                    <a:lstStyle/>
+                    <a:p>
+                      <a:pPr algn="l"/>
+                      <a:r>
+                        <a:rPr sz="1300" b="1">
+                          <a:solidFill>
+                            <a:srgbClr val="1F4E78"/>
+                          </a:solidFill>
+                          <a:latin typeface="Calibri"/>
+                        </a:rPr>
+                        <a:t>35%  (~1 drum/wk)</a:t>
+                      </a:r>
+                    </a:p>
+                  </a:txBody>
+                  <a:tcPr>
+                    <a:solidFill>
+                      <a:srgbClr val="FFFFFF"/>
+                    </a:solidFill>
+                  </a:tcPr>
+                </a:tc>
+                <a:tc>
+                  <a:txBody>
+                    <a:bodyPr/>
+                    <a:lstStyle/>
+                    <a:p>
+                      <a:pPr algn="ctr"/>
+                      <a:r>
+                        <a:rPr sz="1300">
+                          <a:solidFill>
+                            <a:srgbClr val="1F4E78"/>
+                          </a:solidFill>
+                          <a:latin typeface="Calibri"/>
+                        </a:rPr>
+                        <a:t>$8,872</a:t>
+                      </a:r>
+                    </a:p>
+                  </a:txBody>
+                  <a:tcPr>
+                    <a:solidFill>
+                      <a:srgbClr val="E2EFDA"/>
+                    </a:solidFill>
+                  </a:tcPr>
+                </a:tc>
+                <a:tc>
+                  <a:txBody>
+                    <a:bodyPr/>
+                    <a:lstStyle/>
+                    <a:p>
+                      <a:pPr algn="ctr"/>
+                      <a:r>
+                        <a:rPr sz="1300">
+                          <a:solidFill>
+                            <a:srgbClr val="1F4E78"/>
+                          </a:solidFill>
+                          <a:latin typeface="Calibri"/>
+                        </a:rPr>
+                        <a:t>$12,168</a:t>
+                      </a:r>
+                    </a:p>
+                  </a:txBody>
+                  <a:tcPr>
+                    <a:solidFill>
+                      <a:srgbClr val="FFF2CC"/>
+                    </a:solidFill>
+                  </a:tcPr>
+                </a:tc>
+                <a:tc>
+                  <a:txBody>
+                    <a:bodyPr/>
+                    <a:lstStyle/>
+                    <a:p>
+                      <a:pPr algn="ctr"/>
+                      <a:r>
+                        <a:rPr sz="1300">
+                          <a:solidFill>
+                            <a:srgbClr val="1F4E78"/>
+                          </a:solidFill>
+                          <a:latin typeface="Calibri"/>
+                        </a:rPr>
+                        <a:t>$24,336</a:t>
+                      </a:r>
+                    </a:p>
+                  </a:txBody>
+                  <a:tcPr>
+                    <a:solidFill>
+                      <a:srgbClr val="FCE4D6"/>
+                    </a:solidFill>
+                  </a:tcPr>
+                </a:tc>
+              </a:tr>
+              <a:tr h="491490">
+                <a:tc>
+                  <a:txBody>
+                    <a:bodyPr/>
+                    <a:lstStyle/>
+                    <a:p>
+                      <a:pPr algn="l"/>
+                      <a:r>
+                        <a:rPr sz="1300" b="1">
+                          <a:solidFill>
+                            <a:srgbClr val="1F4E78"/>
+                          </a:solidFill>
+                          <a:latin typeface="Calibri"/>
+                        </a:rPr>
+                        <a:t>50%  (~1.4 drum/wk)</a:t>
+                      </a:r>
+                    </a:p>
+                  </a:txBody>
+                  <a:tcPr>
+                    <a:solidFill>
+                      <a:srgbClr val="FFFFFF"/>
+                    </a:solidFill>
+                  </a:tcPr>
+                </a:tc>
+                <a:tc>
+                  <a:txBody>
+                    <a:bodyPr/>
+                    <a:lstStyle/>
+                    <a:p>
+                      <a:pPr algn="ctr"/>
+                      <a:r>
+                        <a:rPr sz="1300">
+                          <a:solidFill>
+                            <a:srgbClr val="1F4E78"/>
+                          </a:solidFill>
+                          <a:latin typeface="Calibri"/>
+                        </a:rPr>
+                        <a:t>$12,675</a:t>
+                      </a:r>
+                    </a:p>
+                  </a:txBody>
+                  <a:tcPr>
+                    <a:solidFill>
+                      <a:srgbClr val="E2EFDA"/>
+                    </a:solidFill>
+                  </a:tcPr>
+                </a:tc>
+                <a:tc>
+                  <a:txBody>
+                    <a:bodyPr/>
+                    <a:lstStyle/>
+                    <a:p>
+                      <a:pPr algn="ctr"/>
+                      <a:r>
+                        <a:rPr sz="1300">
+                          <a:solidFill>
+                            <a:srgbClr val="1F4E78"/>
+                          </a:solidFill>
+                          <a:latin typeface="Calibri"/>
+                        </a:rPr>
+                        <a:t>$15,210</a:t>
+                      </a:r>
+                    </a:p>
+                  </a:txBody>
+                  <a:tcPr>
+                    <a:solidFill>
+                      <a:srgbClr val="FFF2CC"/>
+                    </a:solidFill>
+                  </a:tcPr>
+                </a:tc>
+                <a:tc>
+                  <a:txBody>
+                    <a:bodyPr/>
+                    <a:lstStyle/>
+                    <a:p>
+                      <a:pPr algn="ctr"/>
+                      <a:r>
+                        <a:rPr sz="1300">
+                          <a:solidFill>
+                            <a:srgbClr val="1F4E78"/>
+                          </a:solidFill>
+                          <a:latin typeface="Calibri"/>
+                        </a:rPr>
+                        <a:t>$30,420</a:t>
+                      </a:r>
+                    </a:p>
+                  </a:txBody>
+                  <a:tcPr>
+                    <a:solidFill>
+                      <a:srgbClr val="FCE4D6"/>
+                    </a:solidFill>
+                  </a:tcPr>
+                </a:tc>
+              </a:tr>
+            </a:tbl>
+          </a:graphicData>
+        </a:graphic>
+      </p:graphicFrame>
+      <p:sp>
+        <p:nvSpPr>
+          <p:cNvPr id="15" name="TextBox 14"/>
           <p:cNvSpPr txBox="1"/>
           <p:nvPr/>
         </p:nvSpPr>
         <p:spPr>
           <a:xfrm>
-            <a:off x="640080" y="3886200"/>
-            <a:ext cx="3383279" cy="1280160"/>
-          </a:xfrm>
-          <a:prstGeom prst="rect">
-            <a:avLst/>
-          </a:prstGeom>
-          <a:noFill/>
-        </p:spPr>
-        <p:txBody>
-          <a:bodyPr wrap="square" anchor="ctr">
-            <a:spAutoFit/>
-          </a:bodyPr>
-          <a:lstStyle/>
-          <a:p>
-            <a:pPr algn="ctr">
-              <a:spcAft>
-                <a:spcPts val="200"/>
-              </a:spcAft>
-            </a:pPr>
-            <a:r>
-              <a:rPr sz="2400" b="1" i="0">
-                <a:solidFill>
-                  <a:srgbClr val="376E37"/>
-                </a:solidFill>
-                <a:latin typeface="Calibri"/>
-              </a:rPr>
-              <a:t>52 drums/yr</a:t>
-            </a:r>
-          </a:p>
-          <a:p>
-            <a:pPr algn="ctr">
-              <a:spcAft>
-                <a:spcPts val="400"/>
-              </a:spcAft>
-            </a:pPr>
-            <a:r>
-              <a:rPr sz="1100" b="0" i="0">
-                <a:solidFill>
-                  <a:srgbClr val="595959"/>
-                </a:solidFill>
-                <a:latin typeface="Calibri"/>
-              </a:rPr>
-              <a:t>To 2nd source (34.6%) ≈ $26,325</a:t>
-            </a:r>
-          </a:p>
-        </p:txBody>
-      </p:sp>
-      <p:sp>
-        <p:nvSpPr>
-          <p:cNvPr id="17" name="Rectangle 16"/>
-          <p:cNvSpPr/>
-          <p:nvPr/>
-        </p:nvSpPr>
-        <p:spPr>
-          <a:xfrm>
-            <a:off x="4297680" y="3749039"/>
-            <a:ext cx="3566160" cy="1554480"/>
-          </a:xfrm>
-          <a:prstGeom prst="rect">
-            <a:avLst/>
-          </a:prstGeom>
-          <a:solidFill>
-            <a:srgbClr val="EEF3FA"/>
-          </a:solidFill>
-          <a:ln>
-            <a:noFill/>
-          </a:ln>
-          <a:effectLst/>
-        </p:spPr>
-        <p:style>
-          <a:lnRef idx="1">
-            <a:schemeClr val="accent1"/>
-          </a:lnRef>
-          <a:fillRef idx="3">
-            <a:schemeClr val="accent1"/>
-          </a:fillRef>
-          <a:effectRef idx="2">
-            <a:schemeClr val="accent1"/>
-          </a:effectRef>
-          <a:fontRef idx="minor">
-            <a:schemeClr val="lt1"/>
-          </a:fontRef>
-        </p:style>
-        <p:txBody>
-          <a:bodyPr rtlCol="0" anchor="ctr"/>
-          <a:lstStyle/>
-          <a:p>
-            <a:pPr algn="ctr"/>
-          </a:p>
-        </p:txBody>
-      </p:sp>
-      <p:sp>
-        <p:nvSpPr>
-          <p:cNvPr id="18" name="TextBox 17"/>
-          <p:cNvSpPr txBox="1"/>
-          <p:nvPr/>
-        </p:nvSpPr>
-        <p:spPr>
-          <a:xfrm>
-            <a:off x="4389120" y="3886200"/>
-            <a:ext cx="3383279" cy="1280160"/>
-          </a:xfrm>
-          <a:prstGeom prst="rect">
-            <a:avLst/>
-          </a:prstGeom>
-          <a:noFill/>
-        </p:spPr>
-        <p:txBody>
-          <a:bodyPr wrap="square" anchor="ctr">
-            <a:spAutoFit/>
-          </a:bodyPr>
-          <a:lstStyle/>
-          <a:p>
-            <a:pPr algn="ctr">
-              <a:spcAft>
-                <a:spcPts val="200"/>
-              </a:spcAft>
-            </a:pPr>
-            <a:r>
-              <a:rPr sz="2400" b="1" i="0">
-                <a:solidFill>
-                  <a:srgbClr val="1F4E78"/>
-                </a:solidFill>
-                <a:latin typeface="Calibri"/>
-              </a:rPr>
-              <a:t>~98 drums/yr</a:t>
-            </a:r>
-          </a:p>
-          <a:p>
-            <a:pPr algn="ctr">
-              <a:spcAft>
-                <a:spcPts val="400"/>
-              </a:spcAft>
-            </a:pPr>
-            <a:r>
-              <a:rPr sz="1100" b="0" i="0">
-                <a:solidFill>
-                  <a:srgbClr val="595959"/>
-                </a:solidFill>
-                <a:latin typeface="Calibri"/>
-              </a:rPr>
-              <a:t>SNP retained ≈ $33,150</a:t>
-            </a:r>
-          </a:p>
-        </p:txBody>
-      </p:sp>
-      <p:sp>
-        <p:nvSpPr>
-          <p:cNvPr id="19" name="Rectangle 18"/>
-          <p:cNvSpPr/>
-          <p:nvPr/>
-        </p:nvSpPr>
-        <p:spPr>
-          <a:xfrm>
-            <a:off x="8046720" y="3749039"/>
-            <a:ext cx="3566160" cy="1554480"/>
-          </a:xfrm>
-          <a:prstGeom prst="rect">
-            <a:avLst/>
-          </a:prstGeom>
-          <a:solidFill>
-            <a:srgbClr val="EEF3FA"/>
-          </a:solidFill>
-          <a:ln>
-            <a:noFill/>
-          </a:ln>
-          <a:effectLst/>
-        </p:spPr>
-        <p:style>
-          <a:lnRef idx="1">
-            <a:schemeClr val="accent1"/>
-          </a:lnRef>
-          <a:fillRef idx="3">
-            <a:schemeClr val="accent1"/>
-          </a:fillRef>
-          <a:effectRef idx="2">
-            <a:schemeClr val="accent1"/>
-          </a:effectRef>
-          <a:fontRef idx="minor">
-            <a:schemeClr val="lt1"/>
-          </a:fontRef>
-        </p:style>
-        <p:txBody>
-          <a:bodyPr rtlCol="0" anchor="ctr"/>
-          <a:lstStyle/>
-          <a:p>
-            <a:pPr algn="ctr"/>
-          </a:p>
-        </p:txBody>
-      </p:sp>
-      <p:sp>
-        <p:nvSpPr>
-          <p:cNvPr id="20" name="TextBox 19"/>
-          <p:cNvSpPr txBox="1"/>
-          <p:nvPr/>
-        </p:nvSpPr>
-        <p:spPr>
-          <a:xfrm>
-            <a:off x="8138160" y="3886200"/>
-            <a:ext cx="3383279" cy="1280160"/>
-          </a:xfrm>
-          <a:prstGeom prst="rect">
-            <a:avLst/>
-          </a:prstGeom>
-          <a:noFill/>
-        </p:spPr>
-        <p:txBody>
-          <a:bodyPr wrap="square" anchor="ctr">
-            <a:spAutoFit/>
-          </a:bodyPr>
-          <a:lstStyle/>
-          <a:p>
-            <a:pPr algn="ctr">
-              <a:spcAft>
-                <a:spcPts val="200"/>
-              </a:spcAft>
-            </a:pPr>
-            <a:r>
-              <a:rPr sz="2400" b="1" i="0">
-                <a:solidFill>
-                  <a:srgbClr val="9C7706"/>
-                </a:solidFill>
-                <a:latin typeface="Calibri"/>
-              </a:rPr>
-              <a:t>+$8,800/yr</a:t>
-            </a:r>
-          </a:p>
-          <a:p>
-            <a:pPr algn="ctr">
-              <a:spcAft>
-                <a:spcPts val="400"/>
-              </a:spcAft>
-            </a:pPr>
-            <a:r>
-              <a:rPr sz="1100" b="0" i="0">
-                <a:solidFill>
-                  <a:srgbClr val="595959"/>
-                </a:solidFill>
-                <a:latin typeface="Calibri"/>
-              </a:rPr>
-              <a:t>Redundancy premium (+17%)</a:t>
-            </a:r>
-          </a:p>
-        </p:txBody>
-      </p:sp>
-      <p:sp>
-        <p:nvSpPr>
-          <p:cNvPr id="21" name="TextBox 20"/>
-          <p:cNvSpPr txBox="1"/>
-          <p:nvPr/>
-        </p:nvSpPr>
-        <p:spPr>
-          <a:xfrm>
-            <a:off x="548640" y="5532120"/>
-            <a:ext cx="11064240" cy="914400"/>
+            <a:off x="548640" y="5257800"/>
+            <a:ext cx="11064240" cy="1188720"/>
           </a:xfrm>
           <a:prstGeom prst="rect">
             <a:avLst/>
@@ -5348,7 +5411,7 @@
                 </a:solidFill>
                 <a:latin typeface="Calibri"/>
               </a:rPr>
-              <a:t>The premium is the cost of insurance against single-source failure. A ~35% allocation (vs. 20–25%) keeps the 2nd source genuinely practiced given the short shelf life — trade-off: more volume pulled from SNP. (Price = +50% small-batch assumption until a real quote lands.)</a:t>
+              <a:t>At price parity with SNP holding, the cost is ~$0 (ideal, unlikely). KEY: an SNP price increase hits the LARGER retained volume — it can cost more than the 2nd-source premium itself. Range across scenarios ~$2.5k–$30k/yr. Nothing decided; full interactive matrix in the model.</a:t>
             </a:r>
           </a:p>
         </p:txBody>

--- a/PVA second supplier initiative/PVA_Second_Source_Slides.pptx
+++ b/PVA second supplier initiative/PVA_Second_Source_Slides.pptx
@@ -15,6 +15,8 @@
     <p:sldId id="263" r:id="rId14"/>
     <p:sldId id="264" r:id="rId15"/>
     <p:sldId id="265" r:id="rId16"/>
+    <p:sldId id="266" r:id="rId17"/>
+    <p:sldId id="267" r:id="rId18"/>
   </p:sldIdLst>
   <p:sldSz cx="12191695" cy="6858000" type="screen4x3"/>
   <p:notesSz cx="6858000" cy="9144000"/>
@@ -3304,6 +3306,1942 @@
 </file>
 
 <file path=ppt/slides/slide10.xml><?xml version="1.0" encoding="utf-8"?>
+<p:sld xmlns:a="http://schemas.openxmlformats.org/drawingml/2006/main" xmlns:p="http://schemas.openxmlformats.org/presentationml/2006/main" xmlns:r="http://schemas.openxmlformats.org/officeDocument/2006/relationships">
+  <p:cSld>
+    <p:spTree>
+      <p:nvGrpSpPr>
+        <p:cNvPr id="1" name=""/>
+        <p:cNvGrpSpPr/>
+        <p:nvPr/>
+      </p:nvGrpSpPr>
+      <p:grpSpPr/>
+      <p:sp>
+        <p:nvSpPr>
+          <p:cNvPr id="2" name="Rectangle 1"/>
+          <p:cNvSpPr/>
+          <p:nvPr/>
+        </p:nvSpPr>
+        <p:spPr>
+          <a:xfrm>
+            <a:off x="0" y="0"/>
+            <a:ext cx="12191695" cy="914400"/>
+          </a:xfrm>
+          <a:prstGeom prst="rect">
+            <a:avLst/>
+          </a:prstGeom>
+          <a:solidFill>
+            <a:srgbClr val="1F4E78"/>
+          </a:solidFill>
+          <a:ln>
+            <a:noFill/>
+          </a:ln>
+          <a:effectLst/>
+        </p:spPr>
+        <p:style>
+          <a:lnRef idx="1">
+            <a:schemeClr val="accent1"/>
+          </a:lnRef>
+          <a:fillRef idx="3">
+            <a:schemeClr val="accent1"/>
+          </a:fillRef>
+          <a:effectRef idx="2">
+            <a:schemeClr val="accent1"/>
+          </a:effectRef>
+          <a:fontRef idx="minor">
+            <a:schemeClr val="lt1"/>
+          </a:fontRef>
+        </p:style>
+        <p:txBody>
+          <a:bodyPr rtlCol="0" anchor="ctr"/>
+          <a:lstStyle/>
+          <a:p>
+            <a:pPr algn="ctr"/>
+          </a:p>
+        </p:txBody>
+      </p:sp>
+      <p:sp>
+        <p:nvSpPr>
+          <p:cNvPr id="3" name="TextBox 2"/>
+          <p:cNvSpPr txBox="1"/>
+          <p:nvPr/>
+        </p:nvSpPr>
+        <p:spPr>
+          <a:xfrm>
+            <a:off x="457200" y="109728"/>
+            <a:ext cx="10515600" cy="731520"/>
+          </a:xfrm>
+          <a:prstGeom prst="rect">
+            <a:avLst/>
+          </a:prstGeom>
+          <a:noFill/>
+        </p:spPr>
+        <p:txBody>
+          <a:bodyPr wrap="square">
+            <a:spAutoFit/>
+          </a:bodyPr>
+          <a:lstStyle/>
+          <a:p>
+            <a:pPr algn="l">
+              <a:spcAft>
+                <a:spcPts val="400"/>
+              </a:spcAft>
+            </a:pPr>
+            <a:r>
+              <a:rPr sz="2600" b="1" i="0">
+                <a:solidFill>
+                  <a:srgbClr val="FFFFFF"/>
+                </a:solidFill>
+                <a:latin typeface="Calibri"/>
+              </a:rPr>
+              <a:t>Quality &amp; Regulatory Framework</a:t>
+            </a:r>
+          </a:p>
+        </p:txBody>
+      </p:sp>
+      <p:sp>
+        <p:nvSpPr>
+          <p:cNvPr id="4" name="TextBox 3"/>
+          <p:cNvSpPr txBox="1"/>
+          <p:nvPr/>
+        </p:nvSpPr>
+        <p:spPr>
+          <a:xfrm>
+            <a:off x="11247120" y="109728"/>
+            <a:ext cx="822960" cy="731520"/>
+          </a:xfrm>
+          <a:prstGeom prst="rect">
+            <a:avLst/>
+          </a:prstGeom>
+          <a:noFill/>
+        </p:spPr>
+        <p:txBody>
+          <a:bodyPr wrap="none">
+            <a:spAutoFit/>
+          </a:bodyPr>
+          <a:lstStyle/>
+          <a:p>
+            <a:pPr algn="r">
+              <a:spcAft>
+                <a:spcPts val="400"/>
+              </a:spcAft>
+            </a:pPr>
+            <a:r>
+              <a:rPr sz="1200" b="0" i="0">
+                <a:solidFill>
+                  <a:srgbClr val="BDD7EE"/>
+                </a:solidFill>
+                <a:latin typeface="Calibri"/>
+              </a:rPr>
+              <a:t>9</a:t>
+            </a:r>
+          </a:p>
+        </p:txBody>
+      </p:sp>
+      <p:sp>
+        <p:nvSpPr>
+          <p:cNvPr id="5" name="TextBox 4"/>
+          <p:cNvSpPr txBox="1"/>
+          <p:nvPr/>
+        </p:nvSpPr>
+        <p:spPr>
+          <a:xfrm>
+            <a:off x="548640" y="1280160"/>
+            <a:ext cx="11064240" cy="2926080"/>
+          </a:xfrm>
+          <a:prstGeom prst="rect">
+            <a:avLst/>
+          </a:prstGeom>
+          <a:noFill/>
+        </p:spPr>
+        <p:txBody>
+          <a:bodyPr wrap="square">
+            <a:spAutoFit/>
+          </a:bodyPr>
+          <a:lstStyle/>
+          <a:p>
+            <a:pPr algn="l">
+              <a:spcAft>
+                <a:spcPts val="1200"/>
+              </a:spcAft>
+            </a:pPr>
+            <a:r>
+              <a:rPr b="1" sz="1500">
+                <a:solidFill>
+                  <a:srgbClr val="1F4E78"/>
+                </a:solidFill>
+                <a:latin typeface="Calibri"/>
+              </a:rPr>
+              <a:t>• FDA QMSR in force (2026-02-02) </a:t>
+            </a:r>
+            <a:r>
+              <a:rPr sz="1500">
+                <a:solidFill>
+                  <a:srgbClr val="595959"/>
+                </a:solidFill>
+                <a:latin typeface="Calibri"/>
+              </a:rPr>
+              <a:t>— incorporates ISO 13485:2016 by reference. Supplier controls follow ISO 13485 §7.4 (Purchasing), not the legacy 21 CFR 820.50.</a:t>
+            </a:r>
+          </a:p>
+          <a:p>
+            <a:pPr algn="l">
+              <a:spcAft>
+                <a:spcPts val="1200"/>
+              </a:spcAft>
+            </a:pPr>
+            <a:r>
+              <a:rPr b="1" sz="1500">
+                <a:solidFill>
+                  <a:srgbClr val="1F4E78"/>
+                </a:solidFill>
+                <a:latin typeface="Calibri"/>
+              </a:rPr>
+              <a:t>• Qualification </a:t>
+            </a:r>
+            <a:r>
+              <a:rPr sz="1500">
+                <a:solidFill>
+                  <a:srgbClr val="595959"/>
+                </a:solidFill>
+                <a:latin typeface="Calibri"/>
+              </a:rPr>
+              <a:t>— risk-proportionate supplier evaluation, monitoring, re-evaluation (§7.4.1); build on GHTF/SG3/N17 methodology with a Carter's 10 Cs scorecard.</a:t>
+            </a:r>
+          </a:p>
+          <a:p>
+            <a:pPr algn="l">
+              <a:spcAft>
+                <a:spcPts val="1200"/>
+              </a:spcAft>
+            </a:pPr>
+            <a:r>
+              <a:rPr b="1" sz="1500">
+                <a:solidFill>
+                  <a:srgbClr val="1F4E78"/>
+                </a:solidFill>
+                <a:latin typeface="Calibri"/>
+              </a:rPr>
+              <a:t>• Supplier Quality Agreement </a:t>
+            </a:r>
+            <a:r>
+              <a:rPr sz="1500">
+                <a:solidFill>
+                  <a:srgbClr val="595959"/>
+                </a:solidFill>
+                <a:latin typeface="Calibri"/>
+              </a:rPr>
+              <a:t>— specs/acceptance, advance change-notification, right-to-audit. Connects to CJB's NDA-on-process step.</a:t>
+            </a:r>
+          </a:p>
+          <a:p>
+            <a:pPr algn="l">
+              <a:spcAft>
+                <a:spcPts val="1200"/>
+              </a:spcAft>
+            </a:pPr>
+            <a:r>
+              <a:rPr b="1" sz="1500">
+                <a:solidFill>
+                  <a:srgbClr val="1F4E78"/>
+                </a:solidFill>
+                <a:latin typeface="Calibri"/>
+              </a:rPr>
+              <a:t>• Classification </a:t>
+            </a:r>
+            <a:r>
+              <a:rPr sz="1500">
+                <a:solidFill>
+                  <a:srgbClr val="595959"/>
+                </a:solidFill>
+                <a:latin typeface="Calibri"/>
+              </a:rPr>
+              <a:t>— confirm before invoking ICH Q7 (applies only if API / drug-GMP).</a:t>
+            </a:r>
+          </a:p>
+        </p:txBody>
+      </p:sp>
+    </p:spTree>
+  </p:cSld>
+  <p:clrMapOvr>
+    <a:masterClrMapping/>
+  </p:clrMapOvr>
+</p:sld>
+</file>
+
+<file path=ppt/slides/slide11.xml><?xml version="1.0" encoding="utf-8"?>
+<p:sld xmlns:a="http://schemas.openxmlformats.org/drawingml/2006/main" xmlns:p="http://schemas.openxmlformats.org/presentationml/2006/main" xmlns:r="http://schemas.openxmlformats.org/officeDocument/2006/relationships">
+  <p:cSld>
+    <p:spTree>
+      <p:nvGrpSpPr>
+        <p:cNvPr id="1" name=""/>
+        <p:cNvGrpSpPr/>
+        <p:nvPr/>
+      </p:nvGrpSpPr>
+      <p:grpSpPr/>
+      <p:sp>
+        <p:nvSpPr>
+          <p:cNvPr id="2" name="Rectangle 1"/>
+          <p:cNvSpPr/>
+          <p:nvPr/>
+        </p:nvSpPr>
+        <p:spPr>
+          <a:xfrm>
+            <a:off x="0" y="0"/>
+            <a:ext cx="12191695" cy="914400"/>
+          </a:xfrm>
+          <a:prstGeom prst="rect">
+            <a:avLst/>
+          </a:prstGeom>
+          <a:solidFill>
+            <a:srgbClr val="1F4E78"/>
+          </a:solidFill>
+          <a:ln>
+            <a:noFill/>
+          </a:ln>
+          <a:effectLst/>
+        </p:spPr>
+        <p:style>
+          <a:lnRef idx="1">
+            <a:schemeClr val="accent1"/>
+          </a:lnRef>
+          <a:fillRef idx="3">
+            <a:schemeClr val="accent1"/>
+          </a:fillRef>
+          <a:effectRef idx="2">
+            <a:schemeClr val="accent1"/>
+          </a:effectRef>
+          <a:fontRef idx="minor">
+            <a:schemeClr val="lt1"/>
+          </a:fontRef>
+        </p:style>
+        <p:txBody>
+          <a:bodyPr rtlCol="0" anchor="ctr"/>
+          <a:lstStyle/>
+          <a:p>
+            <a:pPr algn="ctr"/>
+          </a:p>
+        </p:txBody>
+      </p:sp>
+      <p:sp>
+        <p:nvSpPr>
+          <p:cNvPr id="3" name="TextBox 2"/>
+          <p:cNvSpPr txBox="1"/>
+          <p:nvPr/>
+        </p:nvSpPr>
+        <p:spPr>
+          <a:xfrm>
+            <a:off x="457200" y="109728"/>
+            <a:ext cx="10515600" cy="731520"/>
+          </a:xfrm>
+          <a:prstGeom prst="rect">
+            <a:avLst/>
+          </a:prstGeom>
+          <a:noFill/>
+        </p:spPr>
+        <p:txBody>
+          <a:bodyPr wrap="square">
+            <a:spAutoFit/>
+          </a:bodyPr>
+          <a:lstStyle/>
+          <a:p>
+            <a:pPr algn="l">
+              <a:spcAft>
+                <a:spcPts val="400"/>
+              </a:spcAft>
+            </a:pPr>
+            <a:r>
+              <a:rPr sz="2600" b="1" i="0">
+                <a:solidFill>
+                  <a:srgbClr val="FFFFFF"/>
+                </a:solidFill>
+                <a:latin typeface="Calibri"/>
+              </a:rPr>
+              <a:t>Open Items &amp; Next Steps</a:t>
+            </a:r>
+          </a:p>
+        </p:txBody>
+      </p:sp>
+      <p:sp>
+        <p:nvSpPr>
+          <p:cNvPr id="4" name="TextBox 3"/>
+          <p:cNvSpPr txBox="1"/>
+          <p:nvPr/>
+        </p:nvSpPr>
+        <p:spPr>
+          <a:xfrm>
+            <a:off x="11247120" y="109728"/>
+            <a:ext cx="822960" cy="731520"/>
+          </a:xfrm>
+          <a:prstGeom prst="rect">
+            <a:avLst/>
+          </a:prstGeom>
+          <a:noFill/>
+        </p:spPr>
+        <p:txBody>
+          <a:bodyPr wrap="none">
+            <a:spAutoFit/>
+          </a:bodyPr>
+          <a:lstStyle/>
+          <a:p>
+            <a:pPr algn="r">
+              <a:spcAft>
+                <a:spcPts val="400"/>
+              </a:spcAft>
+            </a:pPr>
+            <a:r>
+              <a:rPr sz="1200" b="0" i="0">
+                <a:solidFill>
+                  <a:srgbClr val="BDD7EE"/>
+                </a:solidFill>
+                <a:latin typeface="Calibri"/>
+              </a:rPr>
+              <a:t>10</a:t>
+            </a:r>
+          </a:p>
+        </p:txBody>
+      </p:sp>
+      <p:sp>
+        <p:nvSpPr>
+          <p:cNvPr id="5" name="Rectangle 4"/>
+          <p:cNvSpPr/>
+          <p:nvPr/>
+        </p:nvSpPr>
+        <p:spPr>
+          <a:xfrm>
+            <a:off x="548640" y="1371600"/>
+            <a:ext cx="640080" cy="640080"/>
+          </a:xfrm>
+          <a:prstGeom prst="rect">
+            <a:avLst/>
+          </a:prstGeom>
+          <a:solidFill>
+            <a:srgbClr val="1F4E78"/>
+          </a:solidFill>
+          <a:ln>
+            <a:noFill/>
+          </a:ln>
+          <a:effectLst/>
+        </p:spPr>
+        <p:style>
+          <a:lnRef idx="1">
+            <a:schemeClr val="accent1"/>
+          </a:lnRef>
+          <a:fillRef idx="3">
+            <a:schemeClr val="accent1"/>
+          </a:fillRef>
+          <a:effectRef idx="2">
+            <a:schemeClr val="accent1"/>
+          </a:effectRef>
+          <a:fontRef idx="minor">
+            <a:schemeClr val="lt1"/>
+          </a:fontRef>
+        </p:style>
+        <p:txBody>
+          <a:bodyPr rtlCol="0" anchor="ctr"/>
+          <a:lstStyle/>
+          <a:p>
+            <a:pPr algn="ctr"/>
+          </a:p>
+        </p:txBody>
+      </p:sp>
+      <p:sp>
+        <p:nvSpPr>
+          <p:cNvPr id="6" name="TextBox 5"/>
+          <p:cNvSpPr txBox="1"/>
+          <p:nvPr/>
+        </p:nvSpPr>
+        <p:spPr>
+          <a:xfrm>
+            <a:off x="548640" y="1481328"/>
+            <a:ext cx="640080" cy="457200"/>
+          </a:xfrm>
+          <a:prstGeom prst="rect">
+            <a:avLst/>
+          </a:prstGeom>
+          <a:noFill/>
+        </p:spPr>
+        <p:txBody>
+          <a:bodyPr wrap="none">
+            <a:spAutoFit/>
+          </a:bodyPr>
+          <a:lstStyle/>
+          <a:p>
+            <a:pPr algn="ctr">
+              <a:spcAft>
+                <a:spcPts val="400"/>
+              </a:spcAft>
+            </a:pPr>
+            <a:r>
+              <a:rPr sz="1800" b="1" i="0">
+                <a:solidFill>
+                  <a:srgbClr val="FFFFFF"/>
+                </a:solidFill>
+                <a:latin typeface="Calibri"/>
+              </a:rPr>
+              <a:t>1</a:t>
+            </a:r>
+          </a:p>
+        </p:txBody>
+      </p:sp>
+      <p:sp>
+        <p:nvSpPr>
+          <p:cNvPr id="7" name="Rectangle 6"/>
+          <p:cNvSpPr/>
+          <p:nvPr/>
+        </p:nvSpPr>
+        <p:spPr>
+          <a:xfrm>
+            <a:off x="1280160" y="1371600"/>
+            <a:ext cx="6949440" cy="640080"/>
+          </a:xfrm>
+          <a:prstGeom prst="rect">
+            <a:avLst/>
+          </a:prstGeom>
+          <a:solidFill>
+            <a:srgbClr val="EEF3FA"/>
+          </a:solidFill>
+          <a:ln>
+            <a:noFill/>
+          </a:ln>
+          <a:effectLst/>
+        </p:spPr>
+        <p:style>
+          <a:lnRef idx="1">
+            <a:schemeClr val="accent1"/>
+          </a:lnRef>
+          <a:fillRef idx="3">
+            <a:schemeClr val="accent1"/>
+          </a:fillRef>
+          <a:effectRef idx="2">
+            <a:schemeClr val="accent1"/>
+          </a:effectRef>
+          <a:fontRef idx="minor">
+            <a:schemeClr val="lt1"/>
+          </a:fontRef>
+        </p:style>
+        <p:txBody>
+          <a:bodyPr rtlCol="0" anchor="ctr"/>
+          <a:lstStyle/>
+          <a:p>
+            <a:pPr algn="ctr"/>
+          </a:p>
+        </p:txBody>
+      </p:sp>
+      <p:sp>
+        <p:nvSpPr>
+          <p:cNvPr id="8" name="TextBox 7"/>
+          <p:cNvSpPr txBox="1"/>
+          <p:nvPr/>
+        </p:nvSpPr>
+        <p:spPr>
+          <a:xfrm>
+            <a:off x="1417320" y="1435608"/>
+            <a:ext cx="6766560" cy="548640"/>
+          </a:xfrm>
+          <a:prstGeom prst="rect">
+            <a:avLst/>
+          </a:prstGeom>
+          <a:noFill/>
+        </p:spPr>
+        <p:txBody>
+          <a:bodyPr wrap="none" anchor="ctr">
+            <a:spAutoFit/>
+          </a:bodyPr>
+          <a:lstStyle/>
+          <a:p>
+            <a:pPr algn="l">
+              <a:spcAft>
+                <a:spcPts val="400"/>
+              </a:spcAft>
+            </a:pPr>
+            <a:r>
+              <a:rPr sz="1350" b="1" i="0">
+                <a:solidFill>
+                  <a:srgbClr val="1F4E78"/>
+                </a:solidFill>
+                <a:latin typeface="Calibri"/>
+              </a:rPr>
+              <a:t>Pull SNP CoA history → finalize viscosity &amp; pH targets</a:t>
+            </a:r>
+          </a:p>
+        </p:txBody>
+      </p:sp>
+      <p:sp>
+        <p:nvSpPr>
+          <p:cNvPr id="9" name="Rectangle 8"/>
+          <p:cNvSpPr/>
+          <p:nvPr/>
+        </p:nvSpPr>
+        <p:spPr>
+          <a:xfrm>
+            <a:off x="8321040" y="1371600"/>
+            <a:ext cx="3291840" cy="640080"/>
+          </a:xfrm>
+          <a:prstGeom prst="rect">
+            <a:avLst/>
+          </a:prstGeom>
+          <a:solidFill>
+            <a:srgbClr val="DDEBF7"/>
+          </a:solidFill>
+          <a:ln>
+            <a:noFill/>
+          </a:ln>
+          <a:effectLst/>
+        </p:spPr>
+        <p:style>
+          <a:lnRef idx="1">
+            <a:schemeClr val="accent1"/>
+          </a:lnRef>
+          <a:fillRef idx="3">
+            <a:schemeClr val="accent1"/>
+          </a:fillRef>
+          <a:effectRef idx="2">
+            <a:schemeClr val="accent1"/>
+          </a:effectRef>
+          <a:fontRef idx="minor">
+            <a:schemeClr val="lt1"/>
+          </a:fontRef>
+        </p:style>
+        <p:txBody>
+          <a:bodyPr rtlCol="0" anchor="ctr"/>
+          <a:lstStyle/>
+          <a:p>
+            <a:pPr algn="ctr"/>
+          </a:p>
+        </p:txBody>
+      </p:sp>
+      <p:sp>
+        <p:nvSpPr>
+          <p:cNvPr id="10" name="TextBox 9"/>
+          <p:cNvSpPr txBox="1"/>
+          <p:nvPr/>
+        </p:nvSpPr>
+        <p:spPr>
+          <a:xfrm>
+            <a:off x="8412480" y="1435608"/>
+            <a:ext cx="3200400" cy="548640"/>
+          </a:xfrm>
+          <a:prstGeom prst="rect">
+            <a:avLst/>
+          </a:prstGeom>
+          <a:noFill/>
+        </p:spPr>
+        <p:txBody>
+          <a:bodyPr wrap="none" anchor="ctr">
+            <a:spAutoFit/>
+          </a:bodyPr>
+          <a:lstStyle/>
+          <a:p>
+            <a:pPr algn="l">
+              <a:spcAft>
+                <a:spcPts val="400"/>
+              </a:spcAft>
+            </a:pPr>
+            <a:r>
+              <a:rPr sz="1150" b="0" i="0">
+                <a:solidFill>
+                  <a:srgbClr val="595959"/>
+                </a:solidFill>
+                <a:latin typeface="Calibri"/>
+              </a:rPr>
+              <a:t>Highest leverage — gates any firm quote</a:t>
+            </a:r>
+          </a:p>
+        </p:txBody>
+      </p:sp>
+      <p:sp>
+        <p:nvSpPr>
+          <p:cNvPr id="11" name="Rectangle 10"/>
+          <p:cNvSpPr/>
+          <p:nvPr/>
+        </p:nvSpPr>
+        <p:spPr>
+          <a:xfrm>
+            <a:off x="548640" y="2121408"/>
+            <a:ext cx="640080" cy="640080"/>
+          </a:xfrm>
+          <a:prstGeom prst="rect">
+            <a:avLst/>
+          </a:prstGeom>
+          <a:solidFill>
+            <a:srgbClr val="1F4E78"/>
+          </a:solidFill>
+          <a:ln>
+            <a:noFill/>
+          </a:ln>
+          <a:effectLst/>
+        </p:spPr>
+        <p:style>
+          <a:lnRef idx="1">
+            <a:schemeClr val="accent1"/>
+          </a:lnRef>
+          <a:fillRef idx="3">
+            <a:schemeClr val="accent1"/>
+          </a:fillRef>
+          <a:effectRef idx="2">
+            <a:schemeClr val="accent1"/>
+          </a:effectRef>
+          <a:fontRef idx="minor">
+            <a:schemeClr val="lt1"/>
+          </a:fontRef>
+        </p:style>
+        <p:txBody>
+          <a:bodyPr rtlCol="0" anchor="ctr"/>
+          <a:lstStyle/>
+          <a:p>
+            <a:pPr algn="ctr"/>
+          </a:p>
+        </p:txBody>
+      </p:sp>
+      <p:sp>
+        <p:nvSpPr>
+          <p:cNvPr id="12" name="TextBox 11"/>
+          <p:cNvSpPr txBox="1"/>
+          <p:nvPr/>
+        </p:nvSpPr>
+        <p:spPr>
+          <a:xfrm>
+            <a:off x="548640" y="2231136"/>
+            <a:ext cx="640080" cy="457200"/>
+          </a:xfrm>
+          <a:prstGeom prst="rect">
+            <a:avLst/>
+          </a:prstGeom>
+          <a:noFill/>
+        </p:spPr>
+        <p:txBody>
+          <a:bodyPr wrap="none">
+            <a:spAutoFit/>
+          </a:bodyPr>
+          <a:lstStyle/>
+          <a:p>
+            <a:pPr algn="ctr">
+              <a:spcAft>
+                <a:spcPts val="400"/>
+              </a:spcAft>
+            </a:pPr>
+            <a:r>
+              <a:rPr sz="1800" b="1" i="0">
+                <a:solidFill>
+                  <a:srgbClr val="FFFFFF"/>
+                </a:solidFill>
+                <a:latin typeface="Calibri"/>
+              </a:rPr>
+              <a:t>2</a:t>
+            </a:r>
+          </a:p>
+        </p:txBody>
+      </p:sp>
+      <p:sp>
+        <p:nvSpPr>
+          <p:cNvPr id="13" name="Rectangle 12"/>
+          <p:cNvSpPr/>
+          <p:nvPr/>
+        </p:nvSpPr>
+        <p:spPr>
+          <a:xfrm>
+            <a:off x="1280160" y="2121408"/>
+            <a:ext cx="6949440" cy="640080"/>
+          </a:xfrm>
+          <a:prstGeom prst="rect">
+            <a:avLst/>
+          </a:prstGeom>
+          <a:solidFill>
+            <a:srgbClr val="EEF3FA"/>
+          </a:solidFill>
+          <a:ln>
+            <a:noFill/>
+          </a:ln>
+          <a:effectLst/>
+        </p:spPr>
+        <p:style>
+          <a:lnRef idx="1">
+            <a:schemeClr val="accent1"/>
+          </a:lnRef>
+          <a:fillRef idx="3">
+            <a:schemeClr val="accent1"/>
+          </a:fillRef>
+          <a:effectRef idx="2">
+            <a:schemeClr val="accent1"/>
+          </a:effectRef>
+          <a:fontRef idx="minor">
+            <a:schemeClr val="lt1"/>
+          </a:fontRef>
+        </p:style>
+        <p:txBody>
+          <a:bodyPr rtlCol="0" anchor="ctr"/>
+          <a:lstStyle/>
+          <a:p>
+            <a:pPr algn="ctr"/>
+          </a:p>
+        </p:txBody>
+      </p:sp>
+      <p:sp>
+        <p:nvSpPr>
+          <p:cNvPr id="14" name="TextBox 13"/>
+          <p:cNvSpPr txBox="1"/>
+          <p:nvPr/>
+        </p:nvSpPr>
+        <p:spPr>
+          <a:xfrm>
+            <a:off x="1417320" y="2185415"/>
+            <a:ext cx="6766560" cy="548640"/>
+          </a:xfrm>
+          <a:prstGeom prst="rect">
+            <a:avLst/>
+          </a:prstGeom>
+          <a:noFill/>
+        </p:spPr>
+        <p:txBody>
+          <a:bodyPr wrap="none" anchor="ctr">
+            <a:spAutoFit/>
+          </a:bodyPr>
+          <a:lstStyle/>
+          <a:p>
+            <a:pPr algn="l">
+              <a:spcAft>
+                <a:spcPts val="400"/>
+              </a:spcAft>
+            </a:pPr>
+            <a:r>
+              <a:rPr sz="1350" b="1" i="0">
+                <a:solidFill>
+                  <a:srgbClr val="1F4E78"/>
+                </a:solidFill>
+                <a:latin typeface="Calibri"/>
+              </a:rPr>
+              <a:t>CJB NDA on process</a:t>
+            </a:r>
+          </a:p>
+        </p:txBody>
+      </p:sp>
+      <p:sp>
+        <p:nvSpPr>
+          <p:cNvPr id="15" name="Rectangle 14"/>
+          <p:cNvSpPr/>
+          <p:nvPr/>
+        </p:nvSpPr>
+        <p:spPr>
+          <a:xfrm>
+            <a:off x="8321040" y="2121408"/>
+            <a:ext cx="3291840" cy="640080"/>
+          </a:xfrm>
+          <a:prstGeom prst="rect">
+            <a:avLst/>
+          </a:prstGeom>
+          <a:solidFill>
+            <a:srgbClr val="DDEBF7"/>
+          </a:solidFill>
+          <a:ln>
+            <a:noFill/>
+          </a:ln>
+          <a:effectLst/>
+        </p:spPr>
+        <p:style>
+          <a:lnRef idx="1">
+            <a:schemeClr val="accent1"/>
+          </a:lnRef>
+          <a:fillRef idx="3">
+            <a:schemeClr val="accent1"/>
+          </a:fillRef>
+          <a:effectRef idx="2">
+            <a:schemeClr val="accent1"/>
+          </a:effectRef>
+          <a:fontRef idx="minor">
+            <a:schemeClr val="lt1"/>
+          </a:fontRef>
+        </p:style>
+        <p:txBody>
+          <a:bodyPr rtlCol="0" anchor="ctr"/>
+          <a:lstStyle/>
+          <a:p>
+            <a:pPr algn="ctr"/>
+          </a:p>
+        </p:txBody>
+      </p:sp>
+      <p:sp>
+        <p:nvSpPr>
+          <p:cNvPr id="16" name="TextBox 15"/>
+          <p:cNvSpPr txBox="1"/>
+          <p:nvPr/>
+        </p:nvSpPr>
+        <p:spPr>
+          <a:xfrm>
+            <a:off x="8412480" y="2185415"/>
+            <a:ext cx="3200400" cy="548640"/>
+          </a:xfrm>
+          <a:prstGeom prst="rect">
+            <a:avLst/>
+          </a:prstGeom>
+          <a:noFill/>
+        </p:spPr>
+        <p:txBody>
+          <a:bodyPr wrap="none" anchor="ctr">
+            <a:spAutoFit/>
+          </a:bodyPr>
+          <a:lstStyle/>
+          <a:p>
+            <a:pPr algn="l">
+              <a:spcAft>
+                <a:spcPts val="400"/>
+              </a:spcAft>
+            </a:pPr>
+            <a:r>
+              <a:rPr sz="1150" b="0" i="0">
+                <a:solidFill>
+                  <a:srgbClr val="595959"/>
+                </a:solidFill>
+                <a:latin typeface="Calibri"/>
+              </a:rPr>
+              <a:t>In work — McC</a:t>
+            </a:r>
+          </a:p>
+        </p:txBody>
+      </p:sp>
+      <p:sp>
+        <p:nvSpPr>
+          <p:cNvPr id="17" name="Rectangle 16"/>
+          <p:cNvSpPr/>
+          <p:nvPr/>
+        </p:nvSpPr>
+        <p:spPr>
+          <a:xfrm>
+            <a:off x="548640" y="2871215"/>
+            <a:ext cx="640080" cy="640080"/>
+          </a:xfrm>
+          <a:prstGeom prst="rect">
+            <a:avLst/>
+          </a:prstGeom>
+          <a:solidFill>
+            <a:srgbClr val="1F4E78"/>
+          </a:solidFill>
+          <a:ln>
+            <a:noFill/>
+          </a:ln>
+          <a:effectLst/>
+        </p:spPr>
+        <p:style>
+          <a:lnRef idx="1">
+            <a:schemeClr val="accent1"/>
+          </a:lnRef>
+          <a:fillRef idx="3">
+            <a:schemeClr val="accent1"/>
+          </a:fillRef>
+          <a:effectRef idx="2">
+            <a:schemeClr val="accent1"/>
+          </a:effectRef>
+          <a:fontRef idx="minor">
+            <a:schemeClr val="lt1"/>
+          </a:fontRef>
+        </p:style>
+        <p:txBody>
+          <a:bodyPr rtlCol="0" anchor="ctr"/>
+          <a:lstStyle/>
+          <a:p>
+            <a:pPr algn="ctr"/>
+          </a:p>
+        </p:txBody>
+      </p:sp>
+      <p:sp>
+        <p:nvSpPr>
+          <p:cNvPr id="18" name="TextBox 17"/>
+          <p:cNvSpPr txBox="1"/>
+          <p:nvPr/>
+        </p:nvSpPr>
+        <p:spPr>
+          <a:xfrm>
+            <a:off x="548640" y="2980944"/>
+            <a:ext cx="640080" cy="457200"/>
+          </a:xfrm>
+          <a:prstGeom prst="rect">
+            <a:avLst/>
+          </a:prstGeom>
+          <a:noFill/>
+        </p:spPr>
+        <p:txBody>
+          <a:bodyPr wrap="none">
+            <a:spAutoFit/>
+          </a:bodyPr>
+          <a:lstStyle/>
+          <a:p>
+            <a:pPr algn="ctr">
+              <a:spcAft>
+                <a:spcPts val="400"/>
+              </a:spcAft>
+            </a:pPr>
+            <a:r>
+              <a:rPr sz="1800" b="1" i="0">
+                <a:solidFill>
+                  <a:srgbClr val="FFFFFF"/>
+                </a:solidFill>
+                <a:latin typeface="Calibri"/>
+              </a:rPr>
+              <a:t>3</a:t>
+            </a:r>
+          </a:p>
+        </p:txBody>
+      </p:sp>
+      <p:sp>
+        <p:nvSpPr>
+          <p:cNvPr id="19" name="Rectangle 18"/>
+          <p:cNvSpPr/>
+          <p:nvPr/>
+        </p:nvSpPr>
+        <p:spPr>
+          <a:xfrm>
+            <a:off x="1280160" y="2871215"/>
+            <a:ext cx="6949440" cy="640080"/>
+          </a:xfrm>
+          <a:prstGeom prst="rect">
+            <a:avLst/>
+          </a:prstGeom>
+          <a:solidFill>
+            <a:srgbClr val="EEF3FA"/>
+          </a:solidFill>
+          <a:ln>
+            <a:noFill/>
+          </a:ln>
+          <a:effectLst/>
+        </p:spPr>
+        <p:style>
+          <a:lnRef idx="1">
+            <a:schemeClr val="accent1"/>
+          </a:lnRef>
+          <a:fillRef idx="3">
+            <a:schemeClr val="accent1"/>
+          </a:fillRef>
+          <a:effectRef idx="2">
+            <a:schemeClr val="accent1"/>
+          </a:effectRef>
+          <a:fontRef idx="minor">
+            <a:schemeClr val="lt1"/>
+          </a:fontRef>
+        </p:style>
+        <p:txBody>
+          <a:bodyPr rtlCol="0" anchor="ctr"/>
+          <a:lstStyle/>
+          <a:p>
+            <a:pPr algn="ctr"/>
+          </a:p>
+        </p:txBody>
+      </p:sp>
+      <p:sp>
+        <p:nvSpPr>
+          <p:cNvPr id="20" name="TextBox 19"/>
+          <p:cNvSpPr txBox="1"/>
+          <p:nvPr/>
+        </p:nvSpPr>
+        <p:spPr>
+          <a:xfrm>
+            <a:off x="1417320" y="2935223"/>
+            <a:ext cx="6766560" cy="548640"/>
+          </a:xfrm>
+          <a:prstGeom prst="rect">
+            <a:avLst/>
+          </a:prstGeom>
+          <a:noFill/>
+        </p:spPr>
+        <p:txBody>
+          <a:bodyPr wrap="none" anchor="ctr">
+            <a:spAutoFit/>
+          </a:bodyPr>
+          <a:lstStyle/>
+          <a:p>
+            <a:pPr algn="l">
+              <a:spcAft>
+                <a:spcPts val="400"/>
+              </a:spcAft>
+            </a:pPr>
+            <a:r>
+              <a:rPr sz="1350" b="1" i="0">
+                <a:solidFill>
+                  <a:srgbClr val="1F4E78"/>
+                </a:solidFill>
+                <a:latin typeface="Calibri"/>
+              </a:rPr>
+              <a:t>Send CJB full spec + RFQ (Option A &amp; B, per-drum)</a:t>
+            </a:r>
+          </a:p>
+        </p:txBody>
+      </p:sp>
+      <p:sp>
+        <p:nvSpPr>
+          <p:cNvPr id="21" name="Rectangle 20"/>
+          <p:cNvSpPr/>
+          <p:nvPr/>
+        </p:nvSpPr>
+        <p:spPr>
+          <a:xfrm>
+            <a:off x="8321040" y="2871215"/>
+            <a:ext cx="3291840" cy="640080"/>
+          </a:xfrm>
+          <a:prstGeom prst="rect">
+            <a:avLst/>
+          </a:prstGeom>
+          <a:solidFill>
+            <a:srgbClr val="DDEBF7"/>
+          </a:solidFill>
+          <a:ln>
+            <a:noFill/>
+          </a:ln>
+          <a:effectLst/>
+        </p:spPr>
+        <p:style>
+          <a:lnRef idx="1">
+            <a:schemeClr val="accent1"/>
+          </a:lnRef>
+          <a:fillRef idx="3">
+            <a:schemeClr val="accent1"/>
+          </a:fillRef>
+          <a:effectRef idx="2">
+            <a:schemeClr val="accent1"/>
+          </a:effectRef>
+          <a:fontRef idx="minor">
+            <a:schemeClr val="lt1"/>
+          </a:fontRef>
+        </p:style>
+        <p:txBody>
+          <a:bodyPr rtlCol="0" anchor="ctr"/>
+          <a:lstStyle/>
+          <a:p>
+            <a:pPr algn="ctr"/>
+          </a:p>
+        </p:txBody>
+      </p:sp>
+      <p:sp>
+        <p:nvSpPr>
+          <p:cNvPr id="22" name="TextBox 21"/>
+          <p:cNvSpPr txBox="1"/>
+          <p:nvPr/>
+        </p:nvSpPr>
+        <p:spPr>
+          <a:xfrm>
+            <a:off x="8412480" y="2935223"/>
+            <a:ext cx="3200400" cy="548640"/>
+          </a:xfrm>
+          <a:prstGeom prst="rect">
+            <a:avLst/>
+          </a:prstGeom>
+          <a:noFill/>
+        </p:spPr>
+        <p:txBody>
+          <a:bodyPr wrap="none" anchor="ctr">
+            <a:spAutoFit/>
+          </a:bodyPr>
+          <a:lstStyle/>
+          <a:p>
+            <a:pPr algn="l">
+              <a:spcAft>
+                <a:spcPts val="400"/>
+              </a:spcAft>
+            </a:pPr>
+            <a:r>
+              <a:rPr sz="1150" b="0" i="0">
+                <a:solidFill>
+                  <a:srgbClr val="595959"/>
+                </a:solidFill>
+                <a:latin typeface="Calibri"/>
+              </a:rPr>
+              <a:t>After NDA</a:t>
+            </a:r>
+          </a:p>
+        </p:txBody>
+      </p:sp>
+      <p:sp>
+        <p:nvSpPr>
+          <p:cNvPr id="23" name="Rectangle 22"/>
+          <p:cNvSpPr/>
+          <p:nvPr/>
+        </p:nvSpPr>
+        <p:spPr>
+          <a:xfrm>
+            <a:off x="548640" y="3621023"/>
+            <a:ext cx="640080" cy="640080"/>
+          </a:xfrm>
+          <a:prstGeom prst="rect">
+            <a:avLst/>
+          </a:prstGeom>
+          <a:solidFill>
+            <a:srgbClr val="1F4E78"/>
+          </a:solidFill>
+          <a:ln>
+            <a:noFill/>
+          </a:ln>
+          <a:effectLst/>
+        </p:spPr>
+        <p:style>
+          <a:lnRef idx="1">
+            <a:schemeClr val="accent1"/>
+          </a:lnRef>
+          <a:fillRef idx="3">
+            <a:schemeClr val="accent1"/>
+          </a:fillRef>
+          <a:effectRef idx="2">
+            <a:schemeClr val="accent1"/>
+          </a:effectRef>
+          <a:fontRef idx="minor">
+            <a:schemeClr val="lt1"/>
+          </a:fontRef>
+        </p:style>
+        <p:txBody>
+          <a:bodyPr rtlCol="0" anchor="ctr"/>
+          <a:lstStyle/>
+          <a:p>
+            <a:pPr algn="ctr"/>
+          </a:p>
+        </p:txBody>
+      </p:sp>
+      <p:sp>
+        <p:nvSpPr>
+          <p:cNvPr id="24" name="TextBox 23"/>
+          <p:cNvSpPr txBox="1"/>
+          <p:nvPr/>
+        </p:nvSpPr>
+        <p:spPr>
+          <a:xfrm>
+            <a:off x="548640" y="3730751"/>
+            <a:ext cx="640080" cy="457200"/>
+          </a:xfrm>
+          <a:prstGeom prst="rect">
+            <a:avLst/>
+          </a:prstGeom>
+          <a:noFill/>
+        </p:spPr>
+        <p:txBody>
+          <a:bodyPr wrap="none">
+            <a:spAutoFit/>
+          </a:bodyPr>
+          <a:lstStyle/>
+          <a:p>
+            <a:pPr algn="ctr">
+              <a:spcAft>
+                <a:spcPts val="400"/>
+              </a:spcAft>
+            </a:pPr>
+            <a:r>
+              <a:rPr sz="1800" b="1" i="0">
+                <a:solidFill>
+                  <a:srgbClr val="FFFFFF"/>
+                </a:solidFill>
+                <a:latin typeface="Calibri"/>
+              </a:rPr>
+              <a:t>4</a:t>
+            </a:r>
+          </a:p>
+        </p:txBody>
+      </p:sp>
+      <p:sp>
+        <p:nvSpPr>
+          <p:cNvPr id="25" name="Rectangle 24"/>
+          <p:cNvSpPr/>
+          <p:nvPr/>
+        </p:nvSpPr>
+        <p:spPr>
+          <a:xfrm>
+            <a:off x="1280160" y="3621023"/>
+            <a:ext cx="6949440" cy="640080"/>
+          </a:xfrm>
+          <a:prstGeom prst="rect">
+            <a:avLst/>
+          </a:prstGeom>
+          <a:solidFill>
+            <a:srgbClr val="EEF3FA"/>
+          </a:solidFill>
+          <a:ln>
+            <a:noFill/>
+          </a:ln>
+          <a:effectLst/>
+        </p:spPr>
+        <p:style>
+          <a:lnRef idx="1">
+            <a:schemeClr val="accent1"/>
+          </a:lnRef>
+          <a:fillRef idx="3">
+            <a:schemeClr val="accent1"/>
+          </a:fillRef>
+          <a:effectRef idx="2">
+            <a:schemeClr val="accent1"/>
+          </a:effectRef>
+          <a:fontRef idx="minor">
+            <a:schemeClr val="lt1"/>
+          </a:fontRef>
+        </p:style>
+        <p:txBody>
+          <a:bodyPr rtlCol="0" anchor="ctr"/>
+          <a:lstStyle/>
+          <a:p>
+            <a:pPr algn="ctr"/>
+          </a:p>
+        </p:txBody>
+      </p:sp>
+      <p:sp>
+        <p:nvSpPr>
+          <p:cNvPr id="26" name="TextBox 25"/>
+          <p:cNvSpPr txBox="1"/>
+          <p:nvPr/>
+        </p:nvSpPr>
+        <p:spPr>
+          <a:xfrm>
+            <a:off x="1417320" y="3685031"/>
+            <a:ext cx="6766560" cy="548640"/>
+          </a:xfrm>
+          <a:prstGeom prst="rect">
+            <a:avLst/>
+          </a:prstGeom>
+          <a:noFill/>
+        </p:spPr>
+        <p:txBody>
+          <a:bodyPr wrap="none" anchor="ctr">
+            <a:spAutoFit/>
+          </a:bodyPr>
+          <a:lstStyle/>
+          <a:p>
+            <a:pPr algn="l">
+              <a:spcAft>
+                <a:spcPts val="400"/>
+              </a:spcAft>
+            </a:pPr>
+            <a:r>
+              <a:rPr sz="1350" b="1" i="0">
+                <a:solidFill>
+                  <a:srgbClr val="1F4E78"/>
+                </a:solidFill>
+                <a:latin typeface="Calibri"/>
+              </a:rPr>
+              <a:t>Re-confirm APV 90–95 °C; send pricing benchmark</a:t>
+            </a:r>
+          </a:p>
+        </p:txBody>
+      </p:sp>
+      <p:sp>
+        <p:nvSpPr>
+          <p:cNvPr id="27" name="Rectangle 26"/>
+          <p:cNvSpPr/>
+          <p:nvPr/>
+        </p:nvSpPr>
+        <p:spPr>
+          <a:xfrm>
+            <a:off x="8321040" y="3621023"/>
+            <a:ext cx="3291840" cy="640080"/>
+          </a:xfrm>
+          <a:prstGeom prst="rect">
+            <a:avLst/>
+          </a:prstGeom>
+          <a:solidFill>
+            <a:srgbClr val="DDEBF7"/>
+          </a:solidFill>
+          <a:ln>
+            <a:noFill/>
+          </a:ln>
+          <a:effectLst/>
+        </p:spPr>
+        <p:style>
+          <a:lnRef idx="1">
+            <a:schemeClr val="accent1"/>
+          </a:lnRef>
+          <a:fillRef idx="3">
+            <a:schemeClr val="accent1"/>
+          </a:fillRef>
+          <a:effectRef idx="2">
+            <a:schemeClr val="accent1"/>
+          </a:effectRef>
+          <a:fontRef idx="minor">
+            <a:schemeClr val="lt1"/>
+          </a:fontRef>
+        </p:style>
+        <p:txBody>
+          <a:bodyPr rtlCol="0" anchor="ctr"/>
+          <a:lstStyle/>
+          <a:p>
+            <a:pPr algn="ctr"/>
+          </a:p>
+        </p:txBody>
+      </p:sp>
+      <p:sp>
+        <p:nvSpPr>
+          <p:cNvPr id="28" name="TextBox 27"/>
+          <p:cNvSpPr txBox="1"/>
+          <p:nvPr/>
+        </p:nvSpPr>
+        <p:spPr>
+          <a:xfrm>
+            <a:off x="8412480" y="3685031"/>
+            <a:ext cx="3200400" cy="548640"/>
+          </a:xfrm>
+          <a:prstGeom prst="rect">
+            <a:avLst/>
+          </a:prstGeom>
+          <a:noFill/>
+        </p:spPr>
+        <p:txBody>
+          <a:bodyPr wrap="none" anchor="ctr">
+            <a:spAutoFit/>
+          </a:bodyPr>
+          <a:lstStyle/>
+          <a:p>
+            <a:pPr algn="l">
+              <a:spcAft>
+                <a:spcPts val="400"/>
+              </a:spcAft>
+            </a:pPr>
+            <a:r>
+              <a:rPr sz="1150" b="0" i="0">
+                <a:solidFill>
+                  <a:srgbClr val="595959"/>
+                </a:solidFill>
+                <a:latin typeface="Calibri"/>
+              </a:rPr>
+              <a:t>Open</a:t>
+            </a:r>
+          </a:p>
+        </p:txBody>
+      </p:sp>
+      <p:sp>
+        <p:nvSpPr>
+          <p:cNvPr id="29" name="Rectangle 28"/>
+          <p:cNvSpPr/>
+          <p:nvPr/>
+        </p:nvSpPr>
+        <p:spPr>
+          <a:xfrm>
+            <a:off x="548640" y="4370831"/>
+            <a:ext cx="640080" cy="640080"/>
+          </a:xfrm>
+          <a:prstGeom prst="rect">
+            <a:avLst/>
+          </a:prstGeom>
+          <a:solidFill>
+            <a:srgbClr val="1F4E78"/>
+          </a:solidFill>
+          <a:ln>
+            <a:noFill/>
+          </a:ln>
+          <a:effectLst/>
+        </p:spPr>
+        <p:style>
+          <a:lnRef idx="1">
+            <a:schemeClr val="accent1"/>
+          </a:lnRef>
+          <a:fillRef idx="3">
+            <a:schemeClr val="accent1"/>
+          </a:fillRef>
+          <a:effectRef idx="2">
+            <a:schemeClr val="accent1"/>
+          </a:effectRef>
+          <a:fontRef idx="minor">
+            <a:schemeClr val="lt1"/>
+          </a:fontRef>
+        </p:style>
+        <p:txBody>
+          <a:bodyPr rtlCol="0" anchor="ctr"/>
+          <a:lstStyle/>
+          <a:p>
+            <a:pPr algn="ctr"/>
+          </a:p>
+        </p:txBody>
+      </p:sp>
+      <p:sp>
+        <p:nvSpPr>
+          <p:cNvPr id="30" name="TextBox 29"/>
+          <p:cNvSpPr txBox="1"/>
+          <p:nvPr/>
+        </p:nvSpPr>
+        <p:spPr>
+          <a:xfrm>
+            <a:off x="548640" y="4480559"/>
+            <a:ext cx="640080" cy="457200"/>
+          </a:xfrm>
+          <a:prstGeom prst="rect">
+            <a:avLst/>
+          </a:prstGeom>
+          <a:noFill/>
+        </p:spPr>
+        <p:txBody>
+          <a:bodyPr wrap="none">
+            <a:spAutoFit/>
+          </a:bodyPr>
+          <a:lstStyle/>
+          <a:p>
+            <a:pPr algn="ctr">
+              <a:spcAft>
+                <a:spcPts val="400"/>
+              </a:spcAft>
+            </a:pPr>
+            <a:r>
+              <a:rPr sz="1800" b="1" i="0">
+                <a:solidFill>
+                  <a:srgbClr val="FFFFFF"/>
+                </a:solidFill>
+                <a:latin typeface="Calibri"/>
+              </a:rPr>
+              <a:t>5</a:t>
+            </a:r>
+          </a:p>
+        </p:txBody>
+      </p:sp>
+      <p:sp>
+        <p:nvSpPr>
+          <p:cNvPr id="31" name="Rectangle 30"/>
+          <p:cNvSpPr/>
+          <p:nvPr/>
+        </p:nvSpPr>
+        <p:spPr>
+          <a:xfrm>
+            <a:off x="1280160" y="4370831"/>
+            <a:ext cx="6949440" cy="640080"/>
+          </a:xfrm>
+          <a:prstGeom prst="rect">
+            <a:avLst/>
+          </a:prstGeom>
+          <a:solidFill>
+            <a:srgbClr val="EEF3FA"/>
+          </a:solidFill>
+          <a:ln>
+            <a:noFill/>
+          </a:ln>
+          <a:effectLst/>
+        </p:spPr>
+        <p:style>
+          <a:lnRef idx="1">
+            <a:schemeClr val="accent1"/>
+          </a:lnRef>
+          <a:fillRef idx="3">
+            <a:schemeClr val="accent1"/>
+          </a:fillRef>
+          <a:effectRef idx="2">
+            <a:schemeClr val="accent1"/>
+          </a:effectRef>
+          <a:fontRef idx="minor">
+            <a:schemeClr val="lt1"/>
+          </a:fontRef>
+        </p:style>
+        <p:txBody>
+          <a:bodyPr rtlCol="0" anchor="ctr"/>
+          <a:lstStyle/>
+          <a:p>
+            <a:pPr algn="ctr"/>
+          </a:p>
+        </p:txBody>
+      </p:sp>
+      <p:sp>
+        <p:nvSpPr>
+          <p:cNvPr id="32" name="TextBox 31"/>
+          <p:cNvSpPr txBox="1"/>
+          <p:nvPr/>
+        </p:nvSpPr>
+        <p:spPr>
+          <a:xfrm>
+            <a:off x="1417320" y="4434840"/>
+            <a:ext cx="6766560" cy="548640"/>
+          </a:xfrm>
+          <a:prstGeom prst="rect">
+            <a:avLst/>
+          </a:prstGeom>
+          <a:noFill/>
+        </p:spPr>
+        <p:txBody>
+          <a:bodyPr wrap="none" anchor="ctr">
+            <a:spAutoFit/>
+          </a:bodyPr>
+          <a:lstStyle/>
+          <a:p>
+            <a:pPr algn="l">
+              <a:spcAft>
+                <a:spcPts val="400"/>
+              </a:spcAft>
+            </a:pPr>
+            <a:r>
+              <a:rPr sz="1350" b="1" i="0">
+                <a:solidFill>
+                  <a:srgbClr val="1F4E78"/>
+                </a:solidFill>
+                <a:latin typeface="Calibri"/>
+              </a:rPr>
+              <a:t>Execute Supplier Quality Agreement with selected source</a:t>
+            </a:r>
+          </a:p>
+        </p:txBody>
+      </p:sp>
+      <p:sp>
+        <p:nvSpPr>
+          <p:cNvPr id="33" name="Rectangle 32"/>
+          <p:cNvSpPr/>
+          <p:nvPr/>
+        </p:nvSpPr>
+        <p:spPr>
+          <a:xfrm>
+            <a:off x="8321040" y="4370831"/>
+            <a:ext cx="3291840" cy="640080"/>
+          </a:xfrm>
+          <a:prstGeom prst="rect">
+            <a:avLst/>
+          </a:prstGeom>
+          <a:solidFill>
+            <a:srgbClr val="DDEBF7"/>
+          </a:solidFill>
+          <a:ln>
+            <a:noFill/>
+          </a:ln>
+          <a:effectLst/>
+        </p:spPr>
+        <p:style>
+          <a:lnRef idx="1">
+            <a:schemeClr val="accent1"/>
+          </a:lnRef>
+          <a:fillRef idx="3">
+            <a:schemeClr val="accent1"/>
+          </a:fillRef>
+          <a:effectRef idx="2">
+            <a:schemeClr val="accent1"/>
+          </a:effectRef>
+          <a:fontRef idx="minor">
+            <a:schemeClr val="lt1"/>
+          </a:fontRef>
+        </p:style>
+        <p:txBody>
+          <a:bodyPr rtlCol="0" anchor="ctr"/>
+          <a:lstStyle/>
+          <a:p>
+            <a:pPr algn="ctr"/>
+          </a:p>
+        </p:txBody>
+      </p:sp>
+      <p:sp>
+        <p:nvSpPr>
+          <p:cNvPr id="34" name="TextBox 33"/>
+          <p:cNvSpPr txBox="1"/>
+          <p:nvPr/>
+        </p:nvSpPr>
+        <p:spPr>
+          <a:xfrm>
+            <a:off x="8412480" y="4434840"/>
+            <a:ext cx="3200400" cy="548640"/>
+          </a:xfrm>
+          <a:prstGeom prst="rect">
+            <a:avLst/>
+          </a:prstGeom>
+          <a:noFill/>
+        </p:spPr>
+        <p:txBody>
+          <a:bodyPr wrap="none" anchor="ctr">
+            <a:spAutoFit/>
+          </a:bodyPr>
+          <a:lstStyle/>
+          <a:p>
+            <a:pPr algn="l">
+              <a:spcAft>
+                <a:spcPts val="400"/>
+              </a:spcAft>
+            </a:pPr>
+            <a:r>
+              <a:rPr sz="1150" b="0" i="0">
+                <a:solidFill>
+                  <a:srgbClr val="595959"/>
+                </a:solidFill>
+                <a:latin typeface="Calibri"/>
+              </a:rPr>
+              <a:t>After award</a:t>
+            </a:r>
+          </a:p>
+        </p:txBody>
+      </p:sp>
+      <p:sp>
+        <p:nvSpPr>
+          <p:cNvPr id="35" name="Rectangle 34"/>
+          <p:cNvSpPr/>
+          <p:nvPr/>
+        </p:nvSpPr>
+        <p:spPr>
+          <a:xfrm>
+            <a:off x="548640" y="5120640"/>
+            <a:ext cx="640080" cy="640080"/>
+          </a:xfrm>
+          <a:prstGeom prst="rect">
+            <a:avLst/>
+          </a:prstGeom>
+          <a:solidFill>
+            <a:srgbClr val="1F4E78"/>
+          </a:solidFill>
+          <a:ln>
+            <a:noFill/>
+          </a:ln>
+          <a:effectLst/>
+        </p:spPr>
+        <p:style>
+          <a:lnRef idx="1">
+            <a:schemeClr val="accent1"/>
+          </a:lnRef>
+          <a:fillRef idx="3">
+            <a:schemeClr val="accent1"/>
+          </a:fillRef>
+          <a:effectRef idx="2">
+            <a:schemeClr val="accent1"/>
+          </a:effectRef>
+          <a:fontRef idx="minor">
+            <a:schemeClr val="lt1"/>
+          </a:fontRef>
+        </p:style>
+        <p:txBody>
+          <a:bodyPr rtlCol="0" anchor="ctr"/>
+          <a:lstStyle/>
+          <a:p>
+            <a:pPr algn="ctr"/>
+          </a:p>
+        </p:txBody>
+      </p:sp>
+      <p:sp>
+        <p:nvSpPr>
+          <p:cNvPr id="36" name="TextBox 35"/>
+          <p:cNvSpPr txBox="1"/>
+          <p:nvPr/>
+        </p:nvSpPr>
+        <p:spPr>
+          <a:xfrm>
+            <a:off x="548640" y="5230368"/>
+            <a:ext cx="640080" cy="457200"/>
+          </a:xfrm>
+          <a:prstGeom prst="rect">
+            <a:avLst/>
+          </a:prstGeom>
+          <a:noFill/>
+        </p:spPr>
+        <p:txBody>
+          <a:bodyPr wrap="none">
+            <a:spAutoFit/>
+          </a:bodyPr>
+          <a:lstStyle/>
+          <a:p>
+            <a:pPr algn="ctr">
+              <a:spcAft>
+                <a:spcPts val="400"/>
+              </a:spcAft>
+            </a:pPr>
+            <a:r>
+              <a:rPr sz="1800" b="1" i="0">
+                <a:solidFill>
+                  <a:srgbClr val="FFFFFF"/>
+                </a:solidFill>
+                <a:latin typeface="Calibri"/>
+              </a:rPr>
+              <a:t>6</a:t>
+            </a:r>
+          </a:p>
+        </p:txBody>
+      </p:sp>
+      <p:sp>
+        <p:nvSpPr>
+          <p:cNvPr id="37" name="Rectangle 36"/>
+          <p:cNvSpPr/>
+          <p:nvPr/>
+        </p:nvSpPr>
+        <p:spPr>
+          <a:xfrm>
+            <a:off x="1280160" y="5120640"/>
+            <a:ext cx="6949440" cy="640080"/>
+          </a:xfrm>
+          <a:prstGeom prst="rect">
+            <a:avLst/>
+          </a:prstGeom>
+          <a:solidFill>
+            <a:srgbClr val="EEF3FA"/>
+          </a:solidFill>
+          <a:ln>
+            <a:noFill/>
+          </a:ln>
+          <a:effectLst/>
+        </p:spPr>
+        <p:style>
+          <a:lnRef idx="1">
+            <a:schemeClr val="accent1"/>
+          </a:lnRef>
+          <a:fillRef idx="3">
+            <a:schemeClr val="accent1"/>
+          </a:fillRef>
+          <a:effectRef idx="2">
+            <a:schemeClr val="accent1"/>
+          </a:effectRef>
+          <a:fontRef idx="minor">
+            <a:schemeClr val="lt1"/>
+          </a:fontRef>
+        </p:style>
+        <p:txBody>
+          <a:bodyPr rtlCol="0" anchor="ctr"/>
+          <a:lstStyle/>
+          <a:p>
+            <a:pPr algn="ctr"/>
+          </a:p>
+        </p:txBody>
+      </p:sp>
+      <p:sp>
+        <p:nvSpPr>
+          <p:cNvPr id="38" name="TextBox 37"/>
+          <p:cNvSpPr txBox="1"/>
+          <p:nvPr/>
+        </p:nvSpPr>
+        <p:spPr>
+          <a:xfrm>
+            <a:off x="1417320" y="5184648"/>
+            <a:ext cx="6766560" cy="548640"/>
+          </a:xfrm>
+          <a:prstGeom prst="rect">
+            <a:avLst/>
+          </a:prstGeom>
+          <a:noFill/>
+        </p:spPr>
+        <p:txBody>
+          <a:bodyPr wrap="none" anchor="ctr">
+            <a:spAutoFit/>
+          </a:bodyPr>
+          <a:lstStyle/>
+          <a:p>
+            <a:pPr algn="l">
+              <a:spcAft>
+                <a:spcPts val="400"/>
+              </a:spcAft>
+            </a:pPr>
+            <a:r>
+              <a:rPr sz="1350" b="1" i="0">
+                <a:solidFill>
+                  <a:srgbClr val="1F4E78"/>
+                </a:solidFill>
+                <a:latin typeface="Calibri"/>
+              </a:rPr>
+              <a:t>Keep Piedmont / Columbus in reserve</a:t>
+            </a:r>
+          </a:p>
+        </p:txBody>
+      </p:sp>
+      <p:sp>
+        <p:nvSpPr>
+          <p:cNvPr id="39" name="Rectangle 38"/>
+          <p:cNvSpPr/>
+          <p:nvPr/>
+        </p:nvSpPr>
+        <p:spPr>
+          <a:xfrm>
+            <a:off x="8321040" y="5120640"/>
+            <a:ext cx="3291840" cy="640080"/>
+          </a:xfrm>
+          <a:prstGeom prst="rect">
+            <a:avLst/>
+          </a:prstGeom>
+          <a:solidFill>
+            <a:srgbClr val="DDEBF7"/>
+          </a:solidFill>
+          <a:ln>
+            <a:noFill/>
+          </a:ln>
+          <a:effectLst/>
+        </p:spPr>
+        <p:style>
+          <a:lnRef idx="1">
+            <a:schemeClr val="accent1"/>
+          </a:lnRef>
+          <a:fillRef idx="3">
+            <a:schemeClr val="accent1"/>
+          </a:fillRef>
+          <a:effectRef idx="2">
+            <a:schemeClr val="accent1"/>
+          </a:effectRef>
+          <a:fontRef idx="minor">
+            <a:schemeClr val="lt1"/>
+          </a:fontRef>
+        </p:style>
+        <p:txBody>
+          <a:bodyPr rtlCol="0" anchor="ctr"/>
+          <a:lstStyle/>
+          <a:p>
+            <a:pPr algn="ctr"/>
+          </a:p>
+        </p:txBody>
+      </p:sp>
+      <p:sp>
+        <p:nvSpPr>
+          <p:cNvPr id="40" name="TextBox 39"/>
+          <p:cNvSpPr txBox="1"/>
+          <p:nvPr/>
+        </p:nvSpPr>
+        <p:spPr>
+          <a:xfrm>
+            <a:off x="8412480" y="5184648"/>
+            <a:ext cx="3200400" cy="548640"/>
+          </a:xfrm>
+          <a:prstGeom prst="rect">
+            <a:avLst/>
+          </a:prstGeom>
+          <a:noFill/>
+        </p:spPr>
+        <p:txBody>
+          <a:bodyPr wrap="none" anchor="ctr">
+            <a:spAutoFit/>
+          </a:bodyPr>
+          <a:lstStyle/>
+          <a:p>
+            <a:pPr algn="l">
+              <a:spcAft>
+                <a:spcPts val="400"/>
+              </a:spcAft>
+            </a:pPr>
+            <a:r>
+              <a:rPr sz="1150" b="0" i="0">
+                <a:solidFill>
+                  <a:srgbClr val="595959"/>
+                </a:solidFill>
+                <a:latin typeface="Calibri"/>
+              </a:rPr>
+              <a:t>Standby</a:t>
+            </a:r>
+          </a:p>
+        </p:txBody>
+      </p:sp>
+      <p:sp>
+        <p:nvSpPr>
+          <p:cNvPr id="41" name="TextBox 40"/>
+          <p:cNvSpPr txBox="1"/>
+          <p:nvPr/>
+        </p:nvSpPr>
+        <p:spPr>
+          <a:xfrm>
+            <a:off x="548640" y="6355080"/>
+            <a:ext cx="10972800" cy="365760"/>
+          </a:xfrm>
+          <a:prstGeom prst="rect">
+            <a:avLst/>
+          </a:prstGeom>
+          <a:noFill/>
+        </p:spPr>
+        <p:txBody>
+          <a:bodyPr wrap="none">
+            <a:spAutoFit/>
+          </a:bodyPr>
+          <a:lstStyle/>
+          <a:p>
+            <a:pPr algn="l">
+              <a:spcAft>
+                <a:spcPts val="400"/>
+              </a:spcAft>
+            </a:pPr>
+            <a:r>
+              <a:rPr sz="1100" b="0" i="1">
+                <a:solidFill>
+                  <a:srgbClr val="595959"/>
+                </a:solidFill>
+                <a:latin typeface="Calibri"/>
+              </a:rPr>
+              <a:t>Detail in PVA_Second_Source_Report.docx and PVA_Second_Source_Pricing_Model.xlsx</a:t>
+            </a:r>
+          </a:p>
+        </p:txBody>
+      </p:sp>
+    </p:spTree>
+  </p:cSld>
+  <p:clrMapOvr>
+    <a:masterClrMapping/>
+  </p:clrMapOvr>
+</p:sld>
+</file>
+
+<file path=ppt/slides/slide12.xml><?xml version="1.0" encoding="utf-8"?>
 <p:sld xmlns:a="http://schemas.openxmlformats.org/drawingml/2006/main" xmlns:p="http://schemas.openxmlformats.org/presentationml/2006/main" xmlns:r="http://schemas.openxmlformats.org/officeDocument/2006/relationships">
   <p:cSld>
     <p:spTree>
@@ -5512,7 +7450,7 @@
                 </a:solidFill>
                 <a:latin typeface="Calibri"/>
               </a:rPr>
-              <a:t>Supplier Screening — US Field to Shortlist</a:t>
+              <a:t>Pricing Strategy — What to Propose to APV</a:t>
             </a:r>
           </a:p>
         </p:txBody>
@@ -5564,8 +7502,8 @@
         </p:nvSpPr>
         <p:spPr>
           <a:xfrm>
-            <a:off x="548640" y="1097280"/>
-            <a:ext cx="11064240" cy="457200"/>
+            <a:off x="548640" y="1143000"/>
+            <a:ext cx="5760720" cy="2377440"/>
           </a:xfrm>
           <a:prstGeom prst="rect">
             <a:avLst/>
@@ -5573,24 +7511,83 @@
           <a:noFill/>
         </p:spPr>
         <p:txBody>
-          <a:bodyPr wrap="none">
+          <a:bodyPr wrap="square">
             <a:spAutoFit/>
           </a:bodyPr>
           <a:lstStyle/>
           <a:p>
             <a:pPr algn="l">
               <a:spcAft>
-                <a:spcPts val="400"/>
-              </a:spcAft>
-            </a:pPr>
-            <a:r>
-              <a:rPr sz="1400" b="0" i="1">
+                <a:spcPts val="900"/>
+              </a:spcAft>
+            </a:pPr>
+            <a:r>
+              <a:rPr b="1" sz="1300">
+                <a:solidFill>
+                  <a:srgbClr val="1F4E78"/>
+                </a:solidFill>
+                <a:latin typeface="Calibri"/>
+              </a:rPr>
+              <a:t>• Benchmark </a:t>
+            </a:r>
+            <a:r>
+              <a:rPr sz="1300">
                 <a:solidFill>
                   <a:srgbClr val="595959"/>
                 </a:solidFill>
                 <a:latin typeface="Calibri"/>
               </a:rPr>
-              <a:t>Two filters: (1) can hold the 90–95 °C cook  →  (2) right-sized for ~1 drum/wk under 18-day shelf life</a:t>
+              <a:t>— SNP (incumbent) = $0.75/lb = $337.50/drum.</a:t>
+            </a:r>
+          </a:p>
+          <a:p>
+            <a:pPr algn="l">
+              <a:spcAft>
+                <a:spcPts val="900"/>
+              </a:spcAft>
+            </a:pPr>
+            <a:r>
+              <a:rPr b="1" sz="1300">
+                <a:solidFill>
+                  <a:srgbClr val="1F4E78"/>
+                </a:solidFill>
+                <a:latin typeface="Calibri"/>
+              </a:rPr>
+              <a:t>• A premium is fair </a:t>
+            </a:r>
+            <a:r>
+              <a:rPr sz="1300">
+                <a:solidFill>
+                  <a:srgbClr val="595959"/>
+                </a:solidFill>
+                <a:latin typeface="Calibri"/>
+              </a:rPr>
+              <a:t>— APV is a mid-size coatings house; a single 55-gal drum is a small batch. Their cost floor alone is ~$0.80–1.15/lb.</a:t>
+            </a:r>
+          </a:p>
+          <a:p>
+            <a:pPr algn="l">
+              <a:spcAft>
+                <a:spcPts val="900"/>
+              </a:spcAft>
+            </a:pPr>
+            <a:r>
+              <a:rPr b="1" sz="1300">
+                <a:solidFill>
+                  <a:srgbClr val="1F4E78"/>
+                </a:solidFill>
+                <a:latin typeface="Calibri"/>
+              </a:rPr>
+              <a:t>• Don't expect parity </a:t>
+            </a:r>
+            <a:r>
+              <a:rPr sz="1300">
+                <a:solidFill>
+                  <a:srgbClr val="595959"/>
+                </a:solidFill>
+                <a:latin typeface="Calibri"/>
+              </a:rPr>
+              <a:t>— SNP is cheap because PVA is its core. Price APV to a realistic small-batch premium.</a:t>
             </a:r>
           </a:p>
         </p:txBody>
@@ -5603,8 +7600,8 @@
         </p:nvSpPr>
         <p:spPr>
           <a:xfrm>
-            <a:off x="548640" y="1783080"/>
-            <a:ext cx="6583680" cy="566928"/>
+            <a:off x="6492240" y="1143000"/>
+            <a:ext cx="5120640" cy="2377440"/>
           </a:xfrm>
           <a:prstGeom prst="rect">
             <a:avLst/>
@@ -5647,1458 +7644,8 @@
         </p:nvSpPr>
         <p:spPr>
           <a:xfrm>
-            <a:off x="685800" y="1837943"/>
-            <a:ext cx="6400800" cy="457200"/>
-          </a:xfrm>
-          <a:prstGeom prst="rect">
-            <a:avLst/>
-          </a:prstGeom>
-          <a:noFill/>
-        </p:spPr>
-        <p:txBody>
-          <a:bodyPr wrap="none" anchor="ctr">
-            <a:spAutoFit/>
-          </a:bodyPr>
-          <a:lstStyle/>
-          <a:p>
-            <a:pPr algn="l">
-              <a:spcAft>
-                <a:spcPts val="400"/>
-              </a:spcAft>
-            </a:pPr>
-            <a:r>
-              <a:rPr sz="1250" b="1" i="0">
-                <a:solidFill>
-                  <a:srgbClr val="1F4E78"/>
-                </a:solidFill>
-                <a:latin typeface="Calibri"/>
-              </a:rPr>
-              <a:t>CJB Applied Technologies — Valdosta, GA</a:t>
-            </a:r>
-          </a:p>
-        </p:txBody>
-      </p:sp>
-      <p:sp>
-        <p:nvSpPr>
-          <p:cNvPr id="8" name="Rectangle 7"/>
-          <p:cNvSpPr/>
-          <p:nvPr/>
-        </p:nvSpPr>
-        <p:spPr>
-          <a:xfrm>
-            <a:off x="7223760" y="1783080"/>
-            <a:ext cx="3291840" cy="566928"/>
-          </a:xfrm>
-          <a:prstGeom prst="rect">
-            <a:avLst/>
-          </a:prstGeom>
-          <a:solidFill>
-            <a:srgbClr val="EEF3FA"/>
-          </a:solidFill>
-          <a:ln>
-            <a:noFill/>
-          </a:ln>
-          <a:effectLst/>
-        </p:spPr>
-        <p:style>
-          <a:lnRef idx="1">
-            <a:schemeClr val="accent1"/>
-          </a:lnRef>
-          <a:fillRef idx="3">
-            <a:schemeClr val="accent1"/>
-          </a:fillRef>
-          <a:effectRef idx="2">
-            <a:schemeClr val="accent1"/>
-          </a:effectRef>
-          <a:fontRef idx="minor">
-            <a:schemeClr val="lt1"/>
-          </a:fontRef>
-        </p:style>
-        <p:txBody>
-          <a:bodyPr rtlCol="0" anchor="ctr"/>
-          <a:lstStyle/>
-          <a:p>
-            <a:pPr algn="ctr"/>
-          </a:p>
-        </p:txBody>
-      </p:sp>
-      <p:sp>
-        <p:nvSpPr>
-          <p:cNvPr id="9" name="TextBox 8"/>
-          <p:cNvSpPr txBox="1"/>
-          <p:nvPr/>
-        </p:nvSpPr>
-        <p:spPr>
-          <a:xfrm>
-            <a:off x="7315200" y="1837943"/>
-            <a:ext cx="3200400" cy="457200"/>
-          </a:xfrm>
-          <a:prstGeom prst="rect">
-            <a:avLst/>
-          </a:prstGeom>
-          <a:noFill/>
-        </p:spPr>
-        <p:txBody>
-          <a:bodyPr wrap="none" anchor="ctr">
-            <a:spAutoFit/>
-          </a:bodyPr>
-          <a:lstStyle/>
-          <a:p>
-            <a:pPr algn="l">
-              <a:spcAft>
-                <a:spcPts val="400"/>
-              </a:spcAft>
-            </a:pPr>
-            <a:r>
-              <a:rPr sz="1100" b="0" i="0">
-                <a:solidFill>
-                  <a:srgbClr val="595959"/>
-                </a:solidFill>
-                <a:latin typeface="Calibri"/>
-              </a:rPr>
-              <a:t>Front-runner (interviewed 06/26)</a:t>
-            </a:r>
-          </a:p>
-        </p:txBody>
-      </p:sp>
-      <p:sp>
-        <p:nvSpPr>
-          <p:cNvPr id="10" name="Rectangle 9"/>
-          <p:cNvSpPr/>
-          <p:nvPr/>
-        </p:nvSpPr>
-        <p:spPr>
-          <a:xfrm>
-            <a:off x="10607040" y="1783080"/>
-            <a:ext cx="1005840" cy="566928"/>
-          </a:xfrm>
-          <a:prstGeom prst="rect">
-            <a:avLst/>
-          </a:prstGeom>
-          <a:solidFill>
-            <a:srgbClr val="376E37"/>
-          </a:solidFill>
-          <a:ln>
-            <a:noFill/>
-          </a:ln>
-          <a:effectLst/>
-        </p:spPr>
-        <p:style>
-          <a:lnRef idx="1">
-            <a:schemeClr val="accent1"/>
-          </a:lnRef>
-          <a:fillRef idx="3">
-            <a:schemeClr val="accent1"/>
-          </a:fillRef>
-          <a:effectRef idx="2">
-            <a:schemeClr val="accent1"/>
-          </a:effectRef>
-          <a:fontRef idx="minor">
-            <a:schemeClr val="lt1"/>
-          </a:fontRef>
-        </p:style>
-        <p:txBody>
-          <a:bodyPr rtlCol="0" anchor="ctr"/>
-          <a:lstStyle/>
-          <a:p>
-            <a:pPr algn="ctr"/>
-          </a:p>
-        </p:txBody>
-      </p:sp>
-      <p:sp>
-        <p:nvSpPr>
-          <p:cNvPr id="11" name="TextBox 10"/>
-          <p:cNvSpPr txBox="1"/>
-          <p:nvPr/>
-        </p:nvSpPr>
-        <p:spPr>
-          <a:xfrm>
-            <a:off x="10607040" y="1837943"/>
-            <a:ext cx="1005840" cy="457200"/>
-          </a:xfrm>
-          <a:prstGeom prst="rect">
-            <a:avLst/>
-          </a:prstGeom>
-          <a:noFill/>
-        </p:spPr>
-        <p:txBody>
-          <a:bodyPr wrap="none" anchor="ctr">
-            <a:spAutoFit/>
-          </a:bodyPr>
-          <a:lstStyle/>
-          <a:p>
-            <a:pPr algn="ctr">
-              <a:spcAft>
-                <a:spcPts val="400"/>
-              </a:spcAft>
-            </a:pPr>
-            <a:r>
-              <a:rPr sz="1100" b="1" i="0">
-                <a:solidFill>
-                  <a:srgbClr val="FFFFFF"/>
-                </a:solidFill>
-                <a:latin typeface="Calibri"/>
-              </a:rPr>
-              <a:t>YES</a:t>
-            </a:r>
-          </a:p>
-        </p:txBody>
-      </p:sp>
-      <p:sp>
-        <p:nvSpPr>
-          <p:cNvPr id="12" name="Rectangle 11"/>
-          <p:cNvSpPr/>
-          <p:nvPr/>
-        </p:nvSpPr>
-        <p:spPr>
-          <a:xfrm>
-            <a:off x="548640" y="2441448"/>
-            <a:ext cx="6583680" cy="566928"/>
-          </a:xfrm>
-          <a:prstGeom prst="rect">
-            <a:avLst/>
-          </a:prstGeom>
-          <a:solidFill>
-            <a:srgbClr val="EEF3FA"/>
-          </a:solidFill>
-          <a:ln>
-            <a:noFill/>
-          </a:ln>
-          <a:effectLst/>
-        </p:spPr>
-        <p:style>
-          <a:lnRef idx="1">
-            <a:schemeClr val="accent1"/>
-          </a:lnRef>
-          <a:fillRef idx="3">
-            <a:schemeClr val="accent1"/>
-          </a:fillRef>
-          <a:effectRef idx="2">
-            <a:schemeClr val="accent1"/>
-          </a:effectRef>
-          <a:fontRef idx="minor">
-            <a:schemeClr val="lt1"/>
-          </a:fontRef>
-        </p:style>
-        <p:txBody>
-          <a:bodyPr rtlCol="0" anchor="ctr"/>
-          <a:lstStyle/>
-          <a:p>
-            <a:pPr algn="ctr"/>
-          </a:p>
-        </p:txBody>
-      </p:sp>
-      <p:sp>
-        <p:nvSpPr>
-          <p:cNvPr id="13" name="TextBox 12"/>
-          <p:cNvSpPr txBox="1"/>
-          <p:nvPr/>
-        </p:nvSpPr>
-        <p:spPr>
-          <a:xfrm>
-            <a:off x="685800" y="2496312"/>
-            <a:ext cx="6400800" cy="457200"/>
-          </a:xfrm>
-          <a:prstGeom prst="rect">
-            <a:avLst/>
-          </a:prstGeom>
-          <a:noFill/>
-        </p:spPr>
-        <p:txBody>
-          <a:bodyPr wrap="none" anchor="ctr">
-            <a:spAutoFit/>
-          </a:bodyPr>
-          <a:lstStyle/>
-          <a:p>
-            <a:pPr algn="l">
-              <a:spcAft>
-                <a:spcPts val="400"/>
-              </a:spcAft>
-            </a:pPr>
-            <a:r>
-              <a:rPr sz="1250" b="1" i="0">
-                <a:solidFill>
-                  <a:srgbClr val="1F4E78"/>
-                </a:solidFill>
-                <a:latin typeface="Calibri"/>
-              </a:rPr>
-              <a:t>APV Engineered Coatings — Akron, OH</a:t>
-            </a:r>
-          </a:p>
-        </p:txBody>
-      </p:sp>
-      <p:sp>
-        <p:nvSpPr>
-          <p:cNvPr id="14" name="Rectangle 13"/>
-          <p:cNvSpPr/>
-          <p:nvPr/>
-        </p:nvSpPr>
-        <p:spPr>
-          <a:xfrm>
-            <a:off x="7223760" y="2441448"/>
-            <a:ext cx="3291840" cy="566928"/>
-          </a:xfrm>
-          <a:prstGeom prst="rect">
-            <a:avLst/>
-          </a:prstGeom>
-          <a:solidFill>
-            <a:srgbClr val="EEF3FA"/>
-          </a:solidFill>
-          <a:ln>
-            <a:noFill/>
-          </a:ln>
-          <a:effectLst/>
-        </p:spPr>
-        <p:style>
-          <a:lnRef idx="1">
-            <a:schemeClr val="accent1"/>
-          </a:lnRef>
-          <a:fillRef idx="3">
-            <a:schemeClr val="accent1"/>
-          </a:fillRef>
-          <a:effectRef idx="2">
-            <a:schemeClr val="accent1"/>
-          </a:effectRef>
-          <a:fontRef idx="minor">
-            <a:schemeClr val="lt1"/>
-          </a:fontRef>
-        </p:style>
-        <p:txBody>
-          <a:bodyPr rtlCol="0" anchor="ctr"/>
-          <a:lstStyle/>
-          <a:p>
-            <a:pPr algn="ctr"/>
-          </a:p>
-        </p:txBody>
-      </p:sp>
-      <p:sp>
-        <p:nvSpPr>
-          <p:cNvPr id="15" name="TextBox 14"/>
-          <p:cNvSpPr txBox="1"/>
-          <p:nvPr/>
-        </p:nvSpPr>
-        <p:spPr>
-          <a:xfrm>
-            <a:off x="7315200" y="2496312"/>
-            <a:ext cx="3200400" cy="457200"/>
-          </a:xfrm>
-          <a:prstGeom prst="rect">
-            <a:avLst/>
-          </a:prstGeom>
-          <a:noFill/>
-        </p:spPr>
-        <p:txBody>
-          <a:bodyPr wrap="none" anchor="ctr">
-            <a:spAutoFit/>
-          </a:bodyPr>
-          <a:lstStyle/>
-          <a:p>
-            <a:pPr algn="l">
-              <a:spcAft>
-                <a:spcPts val="400"/>
-              </a:spcAft>
-            </a:pPr>
-            <a:r>
-              <a:rPr sz="1100" b="0" i="0">
-                <a:solidFill>
-                  <a:srgbClr val="595959"/>
-                </a:solidFill>
-                <a:latin typeface="Calibri"/>
-              </a:rPr>
-              <a:t>Engaged — pricing requested</a:t>
-            </a:r>
-          </a:p>
-        </p:txBody>
-      </p:sp>
-      <p:sp>
-        <p:nvSpPr>
-          <p:cNvPr id="16" name="Rectangle 15"/>
-          <p:cNvSpPr/>
-          <p:nvPr/>
-        </p:nvSpPr>
-        <p:spPr>
-          <a:xfrm>
-            <a:off x="10607040" y="2441448"/>
-            <a:ext cx="1005840" cy="566928"/>
-          </a:xfrm>
-          <a:prstGeom prst="rect">
-            <a:avLst/>
-          </a:prstGeom>
-          <a:solidFill>
-            <a:srgbClr val="9C7706"/>
-          </a:solidFill>
-          <a:ln>
-            <a:noFill/>
-          </a:ln>
-          <a:effectLst/>
-        </p:spPr>
-        <p:style>
-          <a:lnRef idx="1">
-            <a:schemeClr val="accent1"/>
-          </a:lnRef>
-          <a:fillRef idx="3">
-            <a:schemeClr val="accent1"/>
-          </a:fillRef>
-          <a:effectRef idx="2">
-            <a:schemeClr val="accent1"/>
-          </a:effectRef>
-          <a:fontRef idx="minor">
-            <a:schemeClr val="lt1"/>
-          </a:fontRef>
-        </p:style>
-        <p:txBody>
-          <a:bodyPr rtlCol="0" anchor="ctr"/>
-          <a:lstStyle/>
-          <a:p>
-            <a:pPr algn="ctr"/>
-          </a:p>
-        </p:txBody>
-      </p:sp>
-      <p:sp>
-        <p:nvSpPr>
-          <p:cNvPr id="17" name="TextBox 16"/>
-          <p:cNvSpPr txBox="1"/>
-          <p:nvPr/>
-        </p:nvSpPr>
-        <p:spPr>
-          <a:xfrm>
-            <a:off x="10607040" y="2496312"/>
-            <a:ext cx="1005840" cy="457200"/>
-          </a:xfrm>
-          <a:prstGeom prst="rect">
-            <a:avLst/>
-          </a:prstGeom>
-          <a:noFill/>
-        </p:spPr>
-        <p:txBody>
-          <a:bodyPr wrap="none" anchor="ctr">
-            <a:spAutoFit/>
-          </a:bodyPr>
-          <a:lstStyle/>
-          <a:p>
-            <a:pPr algn="ctr">
-              <a:spcAft>
-                <a:spcPts val="400"/>
-              </a:spcAft>
-            </a:pPr>
-            <a:r>
-              <a:rPr sz="1100" b="1" i="0">
-                <a:solidFill>
-                  <a:srgbClr val="FFFFFF"/>
-                </a:solidFill>
-                <a:latin typeface="Calibri"/>
-              </a:rPr>
-              <a:t>Re-confirm</a:t>
-            </a:r>
-          </a:p>
-        </p:txBody>
-      </p:sp>
-      <p:sp>
-        <p:nvSpPr>
-          <p:cNvPr id="18" name="Rectangle 17"/>
-          <p:cNvSpPr/>
-          <p:nvPr/>
-        </p:nvSpPr>
-        <p:spPr>
-          <a:xfrm>
-            <a:off x="548640" y="3099815"/>
-            <a:ext cx="6583680" cy="566928"/>
-          </a:xfrm>
-          <a:prstGeom prst="rect">
-            <a:avLst/>
-          </a:prstGeom>
-          <a:solidFill>
-            <a:srgbClr val="EEF3FA"/>
-          </a:solidFill>
-          <a:ln>
-            <a:noFill/>
-          </a:ln>
-          <a:effectLst/>
-        </p:spPr>
-        <p:style>
-          <a:lnRef idx="1">
-            <a:schemeClr val="accent1"/>
-          </a:lnRef>
-          <a:fillRef idx="3">
-            <a:schemeClr val="accent1"/>
-          </a:fillRef>
-          <a:effectRef idx="2">
-            <a:schemeClr val="accent1"/>
-          </a:effectRef>
-          <a:fontRef idx="minor">
-            <a:schemeClr val="lt1"/>
-          </a:fontRef>
-        </p:style>
-        <p:txBody>
-          <a:bodyPr rtlCol="0" anchor="ctr"/>
-          <a:lstStyle/>
-          <a:p>
-            <a:pPr algn="ctr"/>
-          </a:p>
-        </p:txBody>
-      </p:sp>
-      <p:sp>
-        <p:nvSpPr>
-          <p:cNvPr id="19" name="TextBox 18"/>
-          <p:cNvSpPr txBox="1"/>
-          <p:nvPr/>
-        </p:nvSpPr>
-        <p:spPr>
-          <a:xfrm>
-            <a:off x="685800" y="3154679"/>
-            <a:ext cx="6400800" cy="457200"/>
-          </a:xfrm>
-          <a:prstGeom prst="rect">
-            <a:avLst/>
-          </a:prstGeom>
-          <a:noFill/>
-        </p:spPr>
-        <p:txBody>
-          <a:bodyPr wrap="none" anchor="ctr">
-            <a:spAutoFit/>
-          </a:bodyPr>
-          <a:lstStyle/>
-          <a:p>
-            <a:pPr algn="l">
-              <a:spcAft>
-                <a:spcPts val="400"/>
-              </a:spcAft>
-            </a:pPr>
-            <a:r>
-              <a:rPr sz="1250" b="1" i="0">
-                <a:solidFill>
-                  <a:srgbClr val="1F4E78"/>
-                </a:solidFill>
-                <a:latin typeface="Calibri"/>
-              </a:rPr>
-              <a:t>Piedmont Chemical / Columbus (CCI)</a:t>
-            </a:r>
-          </a:p>
-        </p:txBody>
-      </p:sp>
-      <p:sp>
-        <p:nvSpPr>
-          <p:cNvPr id="20" name="Rectangle 19"/>
-          <p:cNvSpPr/>
-          <p:nvPr/>
-        </p:nvSpPr>
-        <p:spPr>
-          <a:xfrm>
-            <a:off x="7223760" y="3099815"/>
-            <a:ext cx="3291840" cy="566928"/>
-          </a:xfrm>
-          <a:prstGeom prst="rect">
-            <a:avLst/>
-          </a:prstGeom>
-          <a:solidFill>
-            <a:srgbClr val="EEF3FA"/>
-          </a:solidFill>
-          <a:ln>
-            <a:noFill/>
-          </a:ln>
-          <a:effectLst/>
-        </p:spPr>
-        <p:style>
-          <a:lnRef idx="1">
-            <a:schemeClr val="accent1"/>
-          </a:lnRef>
-          <a:fillRef idx="3">
-            <a:schemeClr val="accent1"/>
-          </a:fillRef>
-          <a:effectRef idx="2">
-            <a:schemeClr val="accent1"/>
-          </a:effectRef>
-          <a:fontRef idx="minor">
-            <a:schemeClr val="lt1"/>
-          </a:fontRef>
-        </p:style>
-        <p:txBody>
-          <a:bodyPr rtlCol="0" anchor="ctr"/>
-          <a:lstStyle/>
-          <a:p>
-            <a:pPr algn="ctr"/>
-          </a:p>
-        </p:txBody>
-      </p:sp>
-      <p:sp>
-        <p:nvSpPr>
-          <p:cNvPr id="21" name="TextBox 20"/>
-          <p:cNvSpPr txBox="1"/>
-          <p:nvPr/>
-        </p:nvSpPr>
-        <p:spPr>
-          <a:xfrm>
-            <a:off x="7315200" y="3154679"/>
-            <a:ext cx="3200400" cy="457200"/>
-          </a:xfrm>
-          <a:prstGeom prst="rect">
-            <a:avLst/>
-          </a:prstGeom>
-          <a:noFill/>
-        </p:spPr>
-        <p:txBody>
-          <a:bodyPr wrap="none" anchor="ctr">
-            <a:spAutoFit/>
-          </a:bodyPr>
-          <a:lstStyle/>
-          <a:p>
-            <a:pPr algn="l">
-              <a:spcAft>
-                <a:spcPts val="400"/>
-              </a:spcAft>
-            </a:pPr>
-            <a:r>
-              <a:rPr sz="1100" b="0" i="0">
-                <a:solidFill>
-                  <a:srgbClr val="595959"/>
-                </a:solidFill>
-                <a:latin typeface="Calibri"/>
-              </a:rPr>
-              <a:t>Held in reserve</a:t>
-            </a:r>
-          </a:p>
-        </p:txBody>
-      </p:sp>
-      <p:sp>
-        <p:nvSpPr>
-          <p:cNvPr id="22" name="Rectangle 21"/>
-          <p:cNvSpPr/>
-          <p:nvPr/>
-        </p:nvSpPr>
-        <p:spPr>
-          <a:xfrm>
-            <a:off x="10607040" y="3099815"/>
-            <a:ext cx="1005840" cy="566928"/>
-          </a:xfrm>
-          <a:prstGeom prst="rect">
-            <a:avLst/>
-          </a:prstGeom>
-          <a:solidFill>
-            <a:srgbClr val="1F4E78"/>
-          </a:solidFill>
-          <a:ln>
-            <a:noFill/>
-          </a:ln>
-          <a:effectLst/>
-        </p:spPr>
-        <p:style>
-          <a:lnRef idx="1">
-            <a:schemeClr val="accent1"/>
-          </a:lnRef>
-          <a:fillRef idx="3">
-            <a:schemeClr val="accent1"/>
-          </a:fillRef>
-          <a:effectRef idx="2">
-            <a:schemeClr val="accent1"/>
-          </a:effectRef>
-          <a:fontRef idx="minor">
-            <a:schemeClr val="lt1"/>
-          </a:fontRef>
-        </p:style>
-        <p:txBody>
-          <a:bodyPr rtlCol="0" anchor="ctr"/>
-          <a:lstStyle/>
-          <a:p>
-            <a:pPr algn="ctr"/>
-          </a:p>
-        </p:txBody>
-      </p:sp>
-      <p:sp>
-        <p:nvSpPr>
-          <p:cNvPr id="23" name="TextBox 22"/>
-          <p:cNvSpPr txBox="1"/>
-          <p:nvPr/>
-        </p:nvSpPr>
-        <p:spPr>
-          <a:xfrm>
-            <a:off x="10607040" y="3154679"/>
-            <a:ext cx="1005840" cy="457200"/>
-          </a:xfrm>
-          <a:prstGeom prst="rect">
-            <a:avLst/>
-          </a:prstGeom>
-          <a:noFill/>
-        </p:spPr>
-        <p:txBody>
-          <a:bodyPr wrap="none" anchor="ctr">
-            <a:spAutoFit/>
-          </a:bodyPr>
-          <a:lstStyle/>
-          <a:p>
-            <a:pPr algn="ctr">
-              <a:spcAft>
-                <a:spcPts val="400"/>
-              </a:spcAft>
-            </a:pPr>
-            <a:r>
-              <a:rPr sz="1100" b="1" i="0">
-                <a:solidFill>
-                  <a:srgbClr val="FFFFFF"/>
-                </a:solidFill>
-                <a:latin typeface="Calibri"/>
-              </a:rPr>
-              <a:t>Yes / confirm</a:t>
-            </a:r>
-          </a:p>
-        </p:txBody>
-      </p:sp>
-      <p:sp>
-        <p:nvSpPr>
-          <p:cNvPr id="24" name="Rectangle 23"/>
-          <p:cNvSpPr/>
-          <p:nvPr/>
-        </p:nvSpPr>
-        <p:spPr>
-          <a:xfrm>
-            <a:off x="548640" y="3758183"/>
-            <a:ext cx="6583680" cy="566928"/>
-          </a:xfrm>
-          <a:prstGeom prst="rect">
-            <a:avLst/>
-          </a:prstGeom>
-          <a:solidFill>
-            <a:srgbClr val="EEF3FA"/>
-          </a:solidFill>
-          <a:ln>
-            <a:noFill/>
-          </a:ln>
-          <a:effectLst/>
-        </p:spPr>
-        <p:style>
-          <a:lnRef idx="1">
-            <a:schemeClr val="accent1"/>
-          </a:lnRef>
-          <a:fillRef idx="3">
-            <a:schemeClr val="accent1"/>
-          </a:fillRef>
-          <a:effectRef idx="2">
-            <a:schemeClr val="accent1"/>
-          </a:effectRef>
-          <a:fontRef idx="minor">
-            <a:schemeClr val="lt1"/>
-          </a:fontRef>
-        </p:style>
-        <p:txBody>
-          <a:bodyPr rtlCol="0" anchor="ctr"/>
-          <a:lstStyle/>
-          <a:p>
-            <a:pPr algn="ctr"/>
-          </a:p>
-        </p:txBody>
-      </p:sp>
-      <p:sp>
-        <p:nvSpPr>
-          <p:cNvPr id="25" name="TextBox 24"/>
-          <p:cNvSpPr txBox="1"/>
-          <p:nvPr/>
-        </p:nvSpPr>
-        <p:spPr>
-          <a:xfrm>
-            <a:off x="685800" y="3813047"/>
-            <a:ext cx="6400800" cy="457200"/>
-          </a:xfrm>
-          <a:prstGeom prst="rect">
-            <a:avLst/>
-          </a:prstGeom>
-          <a:noFill/>
-        </p:spPr>
-        <p:txBody>
-          <a:bodyPr wrap="none" anchor="ctr">
-            <a:spAutoFit/>
-          </a:bodyPr>
-          <a:lstStyle/>
-          <a:p>
-            <a:pPr algn="l">
-              <a:spcAft>
-                <a:spcPts val="400"/>
-              </a:spcAft>
-            </a:pPr>
-            <a:r>
-              <a:rPr sz="1250" b="1" i="0">
-                <a:solidFill>
-                  <a:srgbClr val="1F4E78"/>
-                </a:solidFill>
-                <a:latin typeface="Calibri"/>
-              </a:rPr>
-              <a:t>CORECHEM — Knoxville, TN</a:t>
-            </a:r>
-          </a:p>
-        </p:txBody>
-      </p:sp>
-      <p:sp>
-        <p:nvSpPr>
-          <p:cNvPr id="26" name="Rectangle 25"/>
-          <p:cNvSpPr/>
-          <p:nvPr/>
-        </p:nvSpPr>
-        <p:spPr>
-          <a:xfrm>
-            <a:off x="7223760" y="3758183"/>
-            <a:ext cx="3291840" cy="566928"/>
-          </a:xfrm>
-          <a:prstGeom prst="rect">
-            <a:avLst/>
-          </a:prstGeom>
-          <a:solidFill>
-            <a:srgbClr val="EEF3FA"/>
-          </a:solidFill>
-          <a:ln>
-            <a:noFill/>
-          </a:ln>
-          <a:effectLst/>
-        </p:spPr>
-        <p:style>
-          <a:lnRef idx="1">
-            <a:schemeClr val="accent1"/>
-          </a:lnRef>
-          <a:fillRef idx="3">
-            <a:schemeClr val="accent1"/>
-          </a:fillRef>
-          <a:effectRef idx="2">
-            <a:schemeClr val="accent1"/>
-          </a:effectRef>
-          <a:fontRef idx="minor">
-            <a:schemeClr val="lt1"/>
-          </a:fontRef>
-        </p:style>
-        <p:txBody>
-          <a:bodyPr rtlCol="0" anchor="ctr"/>
-          <a:lstStyle/>
-          <a:p>
-            <a:pPr algn="ctr"/>
-          </a:p>
-        </p:txBody>
-      </p:sp>
-      <p:sp>
-        <p:nvSpPr>
-          <p:cNvPr id="27" name="TextBox 26"/>
-          <p:cNvSpPr txBox="1"/>
-          <p:nvPr/>
-        </p:nvSpPr>
-        <p:spPr>
-          <a:xfrm>
-            <a:off x="7315200" y="3813047"/>
-            <a:ext cx="3200400" cy="457200"/>
-          </a:xfrm>
-          <a:prstGeom prst="rect">
-            <a:avLst/>
-          </a:prstGeom>
-          <a:noFill/>
-        </p:spPr>
-        <p:txBody>
-          <a:bodyPr wrap="none" anchor="ctr">
-            <a:spAutoFit/>
-          </a:bodyPr>
-          <a:lstStyle/>
-          <a:p>
-            <a:pPr algn="l">
-              <a:spcAft>
-                <a:spcPts val="400"/>
-              </a:spcAft>
-            </a:pPr>
-            <a:r>
-              <a:rPr sz="1100" b="0" i="0">
-                <a:solidFill>
-                  <a:srgbClr val="595959"/>
-                </a:solidFill>
-                <a:latin typeface="Calibri"/>
-              </a:rPr>
-              <a:t>Reserve — 250-gal min vs shelf life</a:t>
-            </a:r>
-          </a:p>
-        </p:txBody>
-      </p:sp>
-      <p:sp>
-        <p:nvSpPr>
-          <p:cNvPr id="28" name="Rectangle 27"/>
-          <p:cNvSpPr/>
-          <p:nvPr/>
-        </p:nvSpPr>
-        <p:spPr>
-          <a:xfrm>
-            <a:off x="10607040" y="3758183"/>
-            <a:ext cx="1005840" cy="566928"/>
-          </a:xfrm>
-          <a:prstGeom prst="rect">
-            <a:avLst/>
-          </a:prstGeom>
-          <a:solidFill>
-            <a:srgbClr val="9C7706"/>
-          </a:solidFill>
-          <a:ln>
-            <a:noFill/>
-          </a:ln>
-          <a:effectLst/>
-        </p:spPr>
-        <p:style>
-          <a:lnRef idx="1">
-            <a:schemeClr val="accent1"/>
-          </a:lnRef>
-          <a:fillRef idx="3">
-            <a:schemeClr val="accent1"/>
-          </a:fillRef>
-          <a:effectRef idx="2">
-            <a:schemeClr val="accent1"/>
-          </a:effectRef>
-          <a:fontRef idx="minor">
-            <a:schemeClr val="lt1"/>
-          </a:fontRef>
-        </p:style>
-        <p:txBody>
-          <a:bodyPr rtlCol="0" anchor="ctr"/>
-          <a:lstStyle/>
-          <a:p>
-            <a:pPr algn="ctr"/>
-          </a:p>
-        </p:txBody>
-      </p:sp>
-      <p:sp>
-        <p:nvSpPr>
-          <p:cNvPr id="29" name="TextBox 28"/>
-          <p:cNvSpPr txBox="1"/>
-          <p:nvPr/>
-        </p:nvSpPr>
-        <p:spPr>
-          <a:xfrm>
-            <a:off x="10607040" y="3813047"/>
-            <a:ext cx="1005840" cy="457200"/>
-          </a:xfrm>
-          <a:prstGeom prst="rect">
-            <a:avLst/>
-          </a:prstGeom>
-          <a:noFill/>
-        </p:spPr>
-        <p:txBody>
-          <a:bodyPr wrap="none" anchor="ctr">
-            <a:spAutoFit/>
-          </a:bodyPr>
-          <a:lstStyle/>
-          <a:p>
-            <a:pPr algn="ctr">
-              <a:spcAft>
-                <a:spcPts val="400"/>
-              </a:spcAft>
-            </a:pPr>
-            <a:r>
-              <a:rPr sz="1100" b="1" i="0">
-                <a:solidFill>
-                  <a:srgbClr val="FFFFFF"/>
-                </a:solidFill>
-                <a:latin typeface="Calibri"/>
-              </a:rPr>
-              <a:t>Confirm</a:t>
-            </a:r>
-          </a:p>
-        </p:txBody>
-      </p:sp>
-      <p:sp>
-        <p:nvSpPr>
-          <p:cNvPr id="30" name="Rectangle 29"/>
-          <p:cNvSpPr/>
-          <p:nvPr/>
-        </p:nvSpPr>
-        <p:spPr>
-          <a:xfrm>
-            <a:off x="548640" y="4416551"/>
-            <a:ext cx="6583680" cy="566928"/>
-          </a:xfrm>
-          <a:prstGeom prst="rect">
-            <a:avLst/>
-          </a:prstGeom>
-          <a:solidFill>
-            <a:srgbClr val="EEF3FA"/>
-          </a:solidFill>
-          <a:ln>
-            <a:noFill/>
-          </a:ln>
-          <a:effectLst/>
-        </p:spPr>
-        <p:style>
-          <a:lnRef idx="1">
-            <a:schemeClr val="accent1"/>
-          </a:lnRef>
-          <a:fillRef idx="3">
-            <a:schemeClr val="accent1"/>
-          </a:fillRef>
-          <a:effectRef idx="2">
-            <a:schemeClr val="accent1"/>
-          </a:effectRef>
-          <a:fontRef idx="minor">
-            <a:schemeClr val="lt1"/>
-          </a:fontRef>
-        </p:style>
-        <p:txBody>
-          <a:bodyPr rtlCol="0" anchor="ctr"/>
-          <a:lstStyle/>
-          <a:p>
-            <a:pPr algn="ctr"/>
-          </a:p>
-        </p:txBody>
-      </p:sp>
-      <p:sp>
-        <p:nvSpPr>
-          <p:cNvPr id="31" name="TextBox 30"/>
-          <p:cNvSpPr txBox="1"/>
-          <p:nvPr/>
-        </p:nvSpPr>
-        <p:spPr>
-          <a:xfrm>
-            <a:off x="685800" y="4471415"/>
-            <a:ext cx="6400800" cy="457200"/>
-          </a:xfrm>
-          <a:prstGeom prst="rect">
-            <a:avLst/>
-          </a:prstGeom>
-          <a:noFill/>
-        </p:spPr>
-        <p:txBody>
-          <a:bodyPr wrap="none" anchor="ctr">
-            <a:spAutoFit/>
-          </a:bodyPr>
-          <a:lstStyle/>
-          <a:p>
-            <a:pPr algn="l">
-              <a:spcAft>
-                <a:spcPts val="400"/>
-              </a:spcAft>
-            </a:pPr>
-            <a:r>
-              <a:rPr sz="1250" b="1" i="0">
-                <a:solidFill>
-                  <a:srgbClr val="1F4E78"/>
-                </a:solidFill>
-                <a:latin typeface="Calibri"/>
-              </a:rPr>
-              <a:t>ArroChem — Mt. Holly, NC</a:t>
-            </a:r>
-          </a:p>
-        </p:txBody>
-      </p:sp>
-      <p:sp>
-        <p:nvSpPr>
-          <p:cNvPr id="32" name="Rectangle 31"/>
-          <p:cNvSpPr/>
-          <p:nvPr/>
-        </p:nvSpPr>
-        <p:spPr>
-          <a:xfrm>
-            <a:off x="7223760" y="4416551"/>
-            <a:ext cx="3291840" cy="566928"/>
-          </a:xfrm>
-          <a:prstGeom prst="rect">
-            <a:avLst/>
-          </a:prstGeom>
-          <a:solidFill>
-            <a:srgbClr val="EEF3FA"/>
-          </a:solidFill>
-          <a:ln>
-            <a:noFill/>
-          </a:ln>
-          <a:effectLst/>
-        </p:spPr>
-        <p:style>
-          <a:lnRef idx="1">
-            <a:schemeClr val="accent1"/>
-          </a:lnRef>
-          <a:fillRef idx="3">
-            <a:schemeClr val="accent1"/>
-          </a:fillRef>
-          <a:effectRef idx="2">
-            <a:schemeClr val="accent1"/>
-          </a:effectRef>
-          <a:fontRef idx="minor">
-            <a:schemeClr val="lt1"/>
-          </a:fontRef>
-        </p:style>
-        <p:txBody>
-          <a:bodyPr rtlCol="0" anchor="ctr"/>
-          <a:lstStyle/>
-          <a:p>
-            <a:pPr algn="ctr"/>
-          </a:p>
-        </p:txBody>
-      </p:sp>
-      <p:sp>
-        <p:nvSpPr>
-          <p:cNvPr id="33" name="TextBox 32"/>
-          <p:cNvSpPr txBox="1"/>
-          <p:nvPr/>
-        </p:nvSpPr>
-        <p:spPr>
-          <a:xfrm>
-            <a:off x="7315200" y="4471415"/>
-            <a:ext cx="3200400" cy="457200"/>
-          </a:xfrm>
-          <a:prstGeom prst="rect">
-            <a:avLst/>
-          </a:prstGeom>
-          <a:noFill/>
-        </p:spPr>
-        <p:txBody>
-          <a:bodyPr wrap="none" anchor="ctr">
-            <a:spAutoFit/>
-          </a:bodyPr>
-          <a:lstStyle/>
-          <a:p>
-            <a:pPr algn="l">
-              <a:spcAft>
-                <a:spcPts val="400"/>
-              </a:spcAft>
-            </a:pPr>
-            <a:r>
-              <a:rPr sz="1100" b="0" i="0">
-                <a:solidFill>
-                  <a:srgbClr val="595959"/>
-                </a:solidFill>
-                <a:latin typeface="Calibri"/>
-              </a:rPr>
-              <a:t>ELIMINATED — 85 °C ceiling</a:t>
-            </a:r>
-          </a:p>
-        </p:txBody>
-      </p:sp>
-      <p:sp>
-        <p:nvSpPr>
-          <p:cNvPr id="34" name="Rectangle 33"/>
-          <p:cNvSpPr/>
-          <p:nvPr/>
-        </p:nvSpPr>
-        <p:spPr>
-          <a:xfrm>
-            <a:off x="10607040" y="4416551"/>
-            <a:ext cx="1005840" cy="566928"/>
-          </a:xfrm>
-          <a:prstGeom prst="rect">
-            <a:avLst/>
-          </a:prstGeom>
-          <a:solidFill>
-            <a:srgbClr val="C00000"/>
-          </a:solidFill>
-          <a:ln>
-            <a:noFill/>
-          </a:ln>
-          <a:effectLst/>
-        </p:spPr>
-        <p:style>
-          <a:lnRef idx="1">
-            <a:schemeClr val="accent1"/>
-          </a:lnRef>
-          <a:fillRef idx="3">
-            <a:schemeClr val="accent1"/>
-          </a:fillRef>
-          <a:effectRef idx="2">
-            <a:schemeClr val="accent1"/>
-          </a:effectRef>
-          <a:fontRef idx="minor">
-            <a:schemeClr val="lt1"/>
-          </a:fontRef>
-        </p:style>
-        <p:txBody>
-          <a:bodyPr rtlCol="0" anchor="ctr"/>
-          <a:lstStyle/>
-          <a:p>
-            <a:pPr algn="ctr"/>
-          </a:p>
-        </p:txBody>
-      </p:sp>
-      <p:sp>
-        <p:nvSpPr>
-          <p:cNvPr id="35" name="TextBox 34"/>
-          <p:cNvSpPr txBox="1"/>
-          <p:nvPr/>
-        </p:nvSpPr>
-        <p:spPr>
-          <a:xfrm>
-            <a:off x="10607040" y="4471415"/>
-            <a:ext cx="1005840" cy="457200"/>
-          </a:xfrm>
-          <a:prstGeom prst="rect">
-            <a:avLst/>
-          </a:prstGeom>
-          <a:noFill/>
-        </p:spPr>
-        <p:txBody>
-          <a:bodyPr wrap="none" anchor="ctr">
-            <a:spAutoFit/>
-          </a:bodyPr>
-          <a:lstStyle/>
-          <a:p>
-            <a:pPr algn="ctr">
-              <a:spcAft>
-                <a:spcPts val="400"/>
-              </a:spcAft>
-            </a:pPr>
-            <a:r>
-              <a:rPr sz="1100" b="1" i="0">
-                <a:solidFill>
-                  <a:srgbClr val="FFFFFF"/>
-                </a:solidFill>
-                <a:latin typeface="Calibri"/>
-              </a:rPr>
-              <a:t>NO</a:t>
-            </a:r>
-          </a:p>
-        </p:txBody>
-      </p:sp>
-      <p:sp>
-        <p:nvSpPr>
-          <p:cNvPr id="36" name="Rectangle 35"/>
-          <p:cNvSpPr/>
-          <p:nvPr/>
-        </p:nvSpPr>
-        <p:spPr>
-          <a:xfrm>
-            <a:off x="548640" y="5074919"/>
-            <a:ext cx="6583680" cy="566928"/>
-          </a:xfrm>
-          <a:prstGeom prst="rect">
-            <a:avLst/>
-          </a:prstGeom>
-          <a:solidFill>
-            <a:srgbClr val="EEF3FA"/>
-          </a:solidFill>
-          <a:ln>
-            <a:noFill/>
-          </a:ln>
-          <a:effectLst/>
-        </p:spPr>
-        <p:style>
-          <a:lnRef idx="1">
-            <a:schemeClr val="accent1"/>
-          </a:lnRef>
-          <a:fillRef idx="3">
-            <a:schemeClr val="accent1"/>
-          </a:fillRef>
-          <a:effectRef idx="2">
-            <a:schemeClr val="accent1"/>
-          </a:effectRef>
-          <a:fontRef idx="minor">
-            <a:schemeClr val="lt1"/>
-          </a:fontRef>
-        </p:style>
-        <p:txBody>
-          <a:bodyPr rtlCol="0" anchor="ctr"/>
-          <a:lstStyle/>
-          <a:p>
-            <a:pPr algn="ctr"/>
-          </a:p>
-        </p:txBody>
-      </p:sp>
-      <p:sp>
-        <p:nvSpPr>
-          <p:cNvPr id="37" name="TextBox 36"/>
-          <p:cNvSpPr txBox="1"/>
-          <p:nvPr/>
-        </p:nvSpPr>
-        <p:spPr>
-          <a:xfrm>
-            <a:off x="685800" y="5129783"/>
-            <a:ext cx="6400800" cy="457200"/>
-          </a:xfrm>
-          <a:prstGeom prst="rect">
-            <a:avLst/>
-          </a:prstGeom>
-          <a:noFill/>
-        </p:spPr>
-        <p:txBody>
-          <a:bodyPr wrap="none" anchor="ctr">
-            <a:spAutoFit/>
-          </a:bodyPr>
-          <a:lstStyle/>
-          <a:p>
-            <a:pPr algn="l">
-              <a:spcAft>
-                <a:spcPts val="400"/>
-              </a:spcAft>
-            </a:pPr>
-            <a:r>
-              <a:rPr sz="1250" b="1" i="0">
-                <a:solidFill>
-                  <a:srgbClr val="1F4E78"/>
-                </a:solidFill>
-                <a:latin typeface="Calibri"/>
-              </a:rPr>
-              <a:t>ILC Dover — Frederica, DE</a:t>
-            </a:r>
-          </a:p>
-        </p:txBody>
-      </p:sp>
-      <p:sp>
-        <p:nvSpPr>
-          <p:cNvPr id="38" name="Rectangle 37"/>
-          <p:cNvSpPr/>
-          <p:nvPr/>
-        </p:nvSpPr>
-        <p:spPr>
-          <a:xfrm>
-            <a:off x="7223760" y="5074919"/>
-            <a:ext cx="3291840" cy="566928"/>
-          </a:xfrm>
-          <a:prstGeom prst="rect">
-            <a:avLst/>
-          </a:prstGeom>
-          <a:solidFill>
-            <a:srgbClr val="EEF3FA"/>
-          </a:solidFill>
-          <a:ln>
-            <a:noFill/>
-          </a:ln>
-          <a:effectLst/>
-        </p:spPr>
-        <p:style>
-          <a:lnRef idx="1">
-            <a:schemeClr val="accent1"/>
-          </a:lnRef>
-          <a:fillRef idx="3">
-            <a:schemeClr val="accent1"/>
-          </a:fillRef>
-          <a:effectRef idx="2">
-            <a:schemeClr val="accent1"/>
-          </a:effectRef>
-          <a:fontRef idx="minor">
-            <a:schemeClr val="lt1"/>
-          </a:fontRef>
-        </p:style>
-        <p:txBody>
-          <a:bodyPr rtlCol="0" anchor="ctr"/>
-          <a:lstStyle/>
-          <a:p>
-            <a:pPr algn="ctr"/>
-          </a:p>
-        </p:txBody>
-      </p:sp>
-      <p:sp>
-        <p:nvSpPr>
-          <p:cNvPr id="39" name="TextBox 38"/>
-          <p:cNvSpPr txBox="1"/>
-          <p:nvPr/>
-        </p:nvSpPr>
-        <p:spPr>
-          <a:xfrm>
-            <a:off x="7315200" y="5129783"/>
-            <a:ext cx="3200400" cy="457200"/>
-          </a:xfrm>
-          <a:prstGeom prst="rect">
-            <a:avLst/>
-          </a:prstGeom>
-          <a:noFill/>
-        </p:spPr>
-        <p:txBody>
-          <a:bodyPr wrap="none" anchor="ctr">
-            <a:spAutoFit/>
-          </a:bodyPr>
-          <a:lstStyle/>
-          <a:p>
-            <a:pPr algn="l">
-              <a:spcAft>
-                <a:spcPts val="400"/>
-              </a:spcAft>
-            </a:pPr>
-            <a:r>
-              <a:rPr sz="1100" b="0" i="0">
-                <a:solidFill>
-                  <a:srgbClr val="595959"/>
-                </a:solidFill>
-                <a:latin typeface="Calibri"/>
-              </a:rPr>
-              <a:t>ELIMINATED — wrong category</a:t>
-            </a:r>
-          </a:p>
-        </p:txBody>
-      </p:sp>
-      <p:sp>
-        <p:nvSpPr>
-          <p:cNvPr id="40" name="Rectangle 39"/>
-          <p:cNvSpPr/>
-          <p:nvPr/>
-        </p:nvSpPr>
-        <p:spPr>
-          <a:xfrm>
-            <a:off x="10607040" y="5074919"/>
-            <a:ext cx="1005840" cy="566928"/>
-          </a:xfrm>
-          <a:prstGeom prst="rect">
-            <a:avLst/>
-          </a:prstGeom>
-          <a:solidFill>
-            <a:srgbClr val="C00000"/>
-          </a:solidFill>
-          <a:ln>
-            <a:noFill/>
-          </a:ln>
-          <a:effectLst/>
-        </p:spPr>
-        <p:style>
-          <a:lnRef idx="1">
-            <a:schemeClr val="accent1"/>
-          </a:lnRef>
-          <a:fillRef idx="3">
-            <a:schemeClr val="accent1"/>
-          </a:fillRef>
-          <a:effectRef idx="2">
-            <a:schemeClr val="accent1"/>
-          </a:effectRef>
-          <a:fontRef idx="minor">
-            <a:schemeClr val="lt1"/>
-          </a:fontRef>
-        </p:style>
-        <p:txBody>
-          <a:bodyPr rtlCol="0" anchor="ctr"/>
-          <a:lstStyle/>
-          <a:p>
-            <a:pPr algn="ctr"/>
-          </a:p>
-        </p:txBody>
-      </p:sp>
-      <p:sp>
-        <p:nvSpPr>
-          <p:cNvPr id="41" name="TextBox 40"/>
-          <p:cNvSpPr txBox="1"/>
-          <p:nvPr/>
-        </p:nvSpPr>
-        <p:spPr>
-          <a:xfrm>
-            <a:off x="10607040" y="5129783"/>
-            <a:ext cx="1005840" cy="457200"/>
-          </a:xfrm>
-          <a:prstGeom prst="rect">
-            <a:avLst/>
-          </a:prstGeom>
-          <a:noFill/>
-        </p:spPr>
-        <p:txBody>
-          <a:bodyPr wrap="none" anchor="ctr">
-            <a:spAutoFit/>
-          </a:bodyPr>
-          <a:lstStyle/>
-          <a:p>
-            <a:pPr algn="ctr">
-              <a:spcAft>
-                <a:spcPts val="400"/>
-              </a:spcAft>
-            </a:pPr>
-            <a:r>
-              <a:rPr sz="1100" b="1" i="0">
-                <a:solidFill>
-                  <a:srgbClr val="FFFFFF"/>
-                </a:solidFill>
-                <a:latin typeface="Calibri"/>
-              </a:rPr>
-              <a:t>NO</a:t>
-            </a:r>
-          </a:p>
-        </p:txBody>
-      </p:sp>
-      <p:sp>
-        <p:nvSpPr>
-          <p:cNvPr id="42" name="TextBox 41"/>
-          <p:cNvSpPr txBox="1"/>
-          <p:nvPr/>
-        </p:nvSpPr>
-        <p:spPr>
-          <a:xfrm>
-            <a:off x="548640" y="5943600"/>
-            <a:ext cx="11064240" cy="731520"/>
+            <a:off x="6720840" y="1298448"/>
+            <a:ext cx="4663440" cy="2103120"/>
           </a:xfrm>
           <a:prstGeom prst="rect">
             <a:avLst/>
@@ -7113,21 +7660,606 @@
           <a:p>
             <a:pPr algn="l">
               <a:spcAft>
+                <a:spcPts val="500"/>
+              </a:spcAft>
+            </a:pPr>
+            <a:r>
+              <a:rPr sz="1400" b="1" i="0">
+                <a:solidFill>
+                  <a:srgbClr val="1F4E78"/>
+                </a:solidFill>
+                <a:latin typeface="Calibri"/>
+              </a:rPr>
+              <a:t>Frame for business retention</a:t>
+            </a:r>
+          </a:p>
+          <a:p>
+            <a:pPr algn="l">
+              <a:spcAft>
+                <a:spcPts val="800"/>
+              </a:spcAft>
+            </a:pPr>
+            <a:r>
+              <a:rPr sz="1200" b="0" i="0">
+                <a:solidFill>
+                  <a:srgbClr val="595959"/>
+                </a:solidFill>
+                <a:latin typeface="Calibri"/>
+              </a:rPr>
+              <a:t>•  Present as a recurring rotation, not a one-off</a:t>
+            </a:r>
+          </a:p>
+          <a:p>
+            <a:pPr algn="l">
+              <a:spcAft>
+                <a:spcPts val="800"/>
+              </a:spcAft>
+            </a:pPr>
+            <a:r>
+              <a:rPr sz="1200" b="0" i="0">
+                <a:solidFill>
+                  <a:srgbClr val="595959"/>
+                </a:solidFill>
+                <a:latin typeface="Calibri"/>
+              </a:rPr>
+              <a:t>•  ~1 drum/wk = ~52 drums/yr ≈ 23,400 lb ≈ ~$23–26k/yr</a:t>
+            </a:r>
+          </a:p>
+          <a:p>
+            <a:pPr algn="l">
+              <a:spcAft>
+                <a:spcPts val="800"/>
+              </a:spcAft>
+            </a:pPr>
+            <a:r>
+              <a:rPr sz="1200" b="0" i="0">
+                <a:solidFill>
+                  <a:srgbClr val="595959"/>
+                </a:solidFill>
+                <a:latin typeface="Calibri"/>
+              </a:rPr>
+              <a:t>•  Lever: batch 2 drums/run (110 gal) = their batch sweet spot → holds price down</a:t>
+            </a:r>
+          </a:p>
+        </p:txBody>
+      </p:sp>
+      <p:sp>
+        <p:nvSpPr>
+          <p:cNvPr id="8" name="TextBox 7"/>
+          <p:cNvSpPr txBox="1"/>
+          <p:nvPr/>
+        </p:nvSpPr>
+        <p:spPr>
+          <a:xfrm>
+            <a:off x="548640" y="3657600"/>
+            <a:ext cx="11064240" cy="320040"/>
+          </a:xfrm>
+          <a:prstGeom prst="rect">
+            <a:avLst/>
+          </a:prstGeom>
+          <a:noFill/>
+        </p:spPr>
+        <p:txBody>
+          <a:bodyPr wrap="none">
+            <a:spAutoFit/>
+          </a:bodyPr>
+          <a:lstStyle/>
+          <a:p>
+            <a:pPr algn="l">
+              <a:spcAft>
                 <a:spcPts val="400"/>
               </a:spcAft>
             </a:pPr>
             <a:r>
-              <a:rPr sz="1100" b="0" i="1">
-                <a:solidFill>
-                  <a:srgbClr val="595959"/>
-                </a:solidFill>
-                <a:latin typeface="Calibri"/>
-              </a:rPr>
-              <a:t>Dropped (too large / MOQ): Goulston, 3V Sigma, Royal (220-gal MOQ), Columbia. Resin producers (Sekisui/Kuraray) won't sell direct at this volume.</a:t>
-            </a:r>
-          </a:p>
-        </p:txBody>
-      </p:sp>
+              <a:rPr sz="1300" b="1" i="0">
+                <a:solidFill>
+                  <a:srgbClr val="1F4E78"/>
+                </a:solidFill>
+                <a:latin typeface="Calibri"/>
+              </a:rPr>
+              <a:t>The proposal — anchor low, settle in band, hold a walk-away:</a:t>
+            </a:r>
+          </a:p>
+        </p:txBody>
+      </p:sp>
+      <p:graphicFrame>
+        <p:nvGraphicFramePr>
+          <p:cNvPr id="9" name="Table 8"/>
+          <p:cNvGraphicFramePr>
+            <a:graphicFrameLocks noGrp="1"/>
+          </p:cNvGraphicFramePr>
+          <p:nvPr/>
+        </p:nvGraphicFramePr>
+        <p:xfrm>
+          <a:off x="548640" y="4069080"/>
+          <a:ext cx="11064240" cy="2194560"/>
+        </p:xfrm>
+        <a:graphic>
+          <a:graphicData uri="http://schemas.openxmlformats.org/drawingml/2006/table">
+            <a:tbl>
+              <a:tblPr firstRow="1" bandRow="1">
+                <a:tableStyleId>{5C22544A-7EE6-4342-B048-85BDC9FD1C3A}</a:tableStyleId>
+              </a:tblPr>
+              <a:tblGrid>
+                <a:gridCol w="1554480"/>
+                <a:gridCol w="1463040"/>
+                <a:gridCol w="1188720"/>
+                <a:gridCol w="6858000"/>
+              </a:tblGrid>
+              <a:tr h="438912">
+                <a:tc>
+                  <a:txBody>
+                    <a:bodyPr/>
+                    <a:lstStyle/>
+                    <a:p>
+                      <a:pPr algn="ctr"/>
+                      <a:r>
+                        <a:rPr sz="1250" b="1">
+                          <a:solidFill>
+                            <a:srgbClr val="FFFFFF"/>
+                          </a:solidFill>
+                          <a:latin typeface="Calibri"/>
+                        </a:rPr>
+                        <a:t>$ / lb</a:t>
+                      </a:r>
+                    </a:p>
+                  </a:txBody>
+                  <a:tcPr>
+                    <a:solidFill>
+                      <a:srgbClr val="1F4E78"/>
+                    </a:solidFill>
+                  </a:tcPr>
+                </a:tc>
+                <a:tc>
+                  <a:txBody>
+                    <a:bodyPr/>
+                    <a:lstStyle/>
+                    <a:p>
+                      <a:pPr algn="ctr"/>
+                      <a:r>
+                        <a:rPr sz="1250" b="1">
+                          <a:solidFill>
+                            <a:srgbClr val="FFFFFF"/>
+                          </a:solidFill>
+                          <a:latin typeface="Calibri"/>
+                        </a:rPr>
+                        <a:t>$ / drum</a:t>
+                      </a:r>
+                    </a:p>
+                  </a:txBody>
+                  <a:tcPr>
+                    <a:solidFill>
+                      <a:srgbClr val="1F4E78"/>
+                    </a:solidFill>
+                  </a:tcPr>
+                </a:tc>
+                <a:tc>
+                  <a:txBody>
+                    <a:bodyPr/>
+                    <a:lstStyle/>
+                    <a:p>
+                      <a:pPr algn="ctr"/>
+                      <a:r>
+                        <a:rPr sz="1250" b="1">
+                          <a:solidFill>
+                            <a:srgbClr val="FFFFFF"/>
+                          </a:solidFill>
+                          <a:latin typeface="Calibri"/>
+                        </a:rPr>
+                        <a:t>vs SNP</a:t>
+                      </a:r>
+                    </a:p>
+                  </a:txBody>
+                  <a:tcPr>
+                    <a:solidFill>
+                      <a:srgbClr val="1F4E78"/>
+                    </a:solidFill>
+                  </a:tcPr>
+                </a:tc>
+                <a:tc>
+                  <a:txBody>
+                    <a:bodyPr/>
+                    <a:lstStyle/>
+                    <a:p>
+                      <a:pPr algn="l"/>
+                      <a:r>
+                        <a:rPr sz="1250" b="1">
+                          <a:solidFill>
+                            <a:srgbClr val="FFFFFF"/>
+                          </a:solidFill>
+                          <a:latin typeface="Calibri"/>
+                        </a:rPr>
+                        <a:t>Role</a:t>
+                      </a:r>
+                    </a:p>
+                  </a:txBody>
+                  <a:tcPr>
+                    <a:solidFill>
+                      <a:srgbClr val="1F4E78"/>
+                    </a:solidFill>
+                  </a:tcPr>
+                </a:tc>
+              </a:tr>
+              <a:tr h="438912">
+                <a:tc>
+                  <a:txBody>
+                    <a:bodyPr/>
+                    <a:lstStyle/>
+                    <a:p>
+                      <a:pPr algn="ctr"/>
+                      <a:r>
+                        <a:rPr sz="1250">
+                          <a:solidFill>
+                            <a:srgbClr val="1F4E78"/>
+                          </a:solidFill>
+                          <a:latin typeface="Calibri"/>
+                        </a:rPr>
+                        <a:t>$0.75</a:t>
+                      </a:r>
+                    </a:p>
+                  </a:txBody>
+                  <a:tcPr>
+                    <a:solidFill>
+                      <a:srgbClr val="FFFFFF"/>
+                    </a:solidFill>
+                  </a:tcPr>
+                </a:tc>
+                <a:tc>
+                  <a:txBody>
+                    <a:bodyPr/>
+                    <a:lstStyle/>
+                    <a:p>
+                      <a:pPr algn="ctr"/>
+                      <a:r>
+                        <a:rPr sz="1250">
+                          <a:solidFill>
+                            <a:srgbClr val="1F4E78"/>
+                          </a:solidFill>
+                          <a:latin typeface="Calibri"/>
+                        </a:rPr>
+                        <a:t>$338</a:t>
+                      </a:r>
+                    </a:p>
+                  </a:txBody>
+                  <a:tcPr>
+                    <a:solidFill>
+                      <a:srgbClr val="FFFFFF"/>
+                    </a:solidFill>
+                  </a:tcPr>
+                </a:tc>
+                <a:tc>
+                  <a:txBody>
+                    <a:bodyPr/>
+                    <a:lstStyle/>
+                    <a:p>
+                      <a:pPr algn="ctr"/>
+                      <a:r>
+                        <a:rPr sz="1250">
+                          <a:solidFill>
+                            <a:srgbClr val="1F4E78"/>
+                          </a:solidFill>
+                          <a:latin typeface="Calibri"/>
+                        </a:rPr>
+                        <a:t>—</a:t>
+                      </a:r>
+                    </a:p>
+                  </a:txBody>
+                  <a:tcPr>
+                    <a:solidFill>
+                      <a:srgbClr val="FFFFFF"/>
+                    </a:solidFill>
+                  </a:tcPr>
+                </a:tc>
+                <a:tc>
+                  <a:txBody>
+                    <a:bodyPr/>
+                    <a:lstStyle/>
+                    <a:p>
+                      <a:pPr algn="l"/>
+                      <a:r>
+                        <a:rPr sz="1250">
+                          <a:solidFill>
+                            <a:srgbClr val="1F4E78"/>
+                          </a:solidFill>
+                          <a:latin typeface="Calibri"/>
+                        </a:rPr>
+                        <a:t>SNP benchmark (state it)</a:t>
+                      </a:r>
+                    </a:p>
+                  </a:txBody>
+                  <a:tcPr>
+                    <a:solidFill>
+                      <a:srgbClr val="FFFFFF"/>
+                    </a:solidFill>
+                  </a:tcPr>
+                </a:tc>
+              </a:tr>
+              <a:tr h="438912">
+                <a:tc>
+                  <a:txBody>
+                    <a:bodyPr/>
+                    <a:lstStyle/>
+                    <a:p>
+                      <a:pPr algn="ctr"/>
+                      <a:r>
+                        <a:rPr sz="1250" b="1">
+                          <a:solidFill>
+                            <a:srgbClr val="1F4E78"/>
+                          </a:solidFill>
+                          <a:latin typeface="Calibri"/>
+                        </a:rPr>
+                        <a:t>$1.00</a:t>
+                      </a:r>
+                    </a:p>
+                  </a:txBody>
+                  <a:tcPr>
+                    <a:solidFill>
+                      <a:srgbClr val="E2EFDA"/>
+                    </a:solidFill>
+                  </a:tcPr>
+                </a:tc>
+                <a:tc>
+                  <a:txBody>
+                    <a:bodyPr/>
+                    <a:lstStyle/>
+                    <a:p>
+                      <a:pPr algn="ctr"/>
+                      <a:r>
+                        <a:rPr sz="1250" b="1">
+                          <a:solidFill>
+                            <a:srgbClr val="1F4E78"/>
+                          </a:solidFill>
+                          <a:latin typeface="Calibri"/>
+                        </a:rPr>
+                        <a:t>$450</a:t>
+                      </a:r>
+                    </a:p>
+                  </a:txBody>
+                  <a:tcPr>
+                    <a:solidFill>
+                      <a:srgbClr val="E2EFDA"/>
+                    </a:solidFill>
+                  </a:tcPr>
+                </a:tc>
+                <a:tc>
+                  <a:txBody>
+                    <a:bodyPr/>
+                    <a:lstStyle/>
+                    <a:p>
+                      <a:pPr algn="ctr"/>
+                      <a:r>
+                        <a:rPr sz="1250" b="1">
+                          <a:solidFill>
+                            <a:srgbClr val="1F4E78"/>
+                          </a:solidFill>
+                          <a:latin typeface="Calibri"/>
+                        </a:rPr>
+                        <a:t>+33%</a:t>
+                      </a:r>
+                    </a:p>
+                  </a:txBody>
+                  <a:tcPr>
+                    <a:solidFill>
+                      <a:srgbClr val="E2EFDA"/>
+                    </a:solidFill>
+                  </a:tcPr>
+                </a:tc>
+                <a:tc>
+                  <a:txBody>
+                    <a:bodyPr/>
+                    <a:lstStyle/>
+                    <a:p>
+                      <a:pPr algn="l"/>
+                      <a:r>
+                        <a:rPr sz="1250" b="1">
+                          <a:solidFill>
+                            <a:srgbClr val="1F4E78"/>
+                          </a:solidFill>
+                          <a:latin typeface="Calibri"/>
+                        </a:rPr>
+                        <a:t>OPENING ANCHOR — Option A (base)</a:t>
+                      </a:r>
+                    </a:p>
+                  </a:txBody>
+                  <a:tcPr>
+                    <a:solidFill>
+                      <a:srgbClr val="E2EFDA"/>
+                    </a:solidFill>
+                  </a:tcPr>
+                </a:tc>
+              </a:tr>
+              <a:tr h="438912">
+                <a:tc>
+                  <a:txBody>
+                    <a:bodyPr/>
+                    <a:lstStyle/>
+                    <a:p>
+                      <a:pPr algn="ctr"/>
+                      <a:r>
+                        <a:rPr sz="1250">
+                          <a:solidFill>
+                            <a:srgbClr val="1F4E78"/>
+                          </a:solidFill>
+                          <a:latin typeface="Calibri"/>
+                        </a:rPr>
+                        <a:t>$1.10–1.25</a:t>
+                      </a:r>
+                    </a:p>
+                  </a:txBody>
+                  <a:tcPr>
+                    <a:solidFill>
+                      <a:srgbClr val="FFFFFF"/>
+                    </a:solidFill>
+                  </a:tcPr>
+                </a:tc>
+                <a:tc>
+                  <a:txBody>
+                    <a:bodyPr/>
+                    <a:lstStyle/>
+                    <a:p>
+                      <a:pPr algn="ctr"/>
+                      <a:r>
+                        <a:rPr sz="1250">
+                          <a:solidFill>
+                            <a:srgbClr val="1F4E78"/>
+                          </a:solidFill>
+                          <a:latin typeface="Calibri"/>
+                        </a:rPr>
+                        <a:t>$495–560</a:t>
+                      </a:r>
+                    </a:p>
+                  </a:txBody>
+                  <a:tcPr>
+                    <a:solidFill>
+                      <a:srgbClr val="FFFFFF"/>
+                    </a:solidFill>
+                  </a:tcPr>
+                </a:tc>
+                <a:tc>
+                  <a:txBody>
+                    <a:bodyPr/>
+                    <a:lstStyle/>
+                    <a:p>
+                      <a:pPr algn="ctr"/>
+                      <a:r>
+                        <a:rPr sz="1250">
+                          <a:solidFill>
+                            <a:srgbClr val="1F4E78"/>
+                          </a:solidFill>
+                          <a:latin typeface="Calibri"/>
+                        </a:rPr>
+                        <a:t>+47–67%</a:t>
+                      </a:r>
+                    </a:p>
+                  </a:txBody>
+                  <a:tcPr>
+                    <a:solidFill>
+                      <a:srgbClr val="FFFFFF"/>
+                    </a:solidFill>
+                  </a:tcPr>
+                </a:tc>
+                <a:tc>
+                  <a:txBody>
+                    <a:bodyPr/>
+                    <a:lstStyle/>
+                    <a:p>
+                      <a:pPr algn="l"/>
+                      <a:r>
+                        <a:rPr sz="1250">
+                          <a:solidFill>
+                            <a:srgbClr val="1F4E78"/>
+                          </a:solidFill>
+                          <a:latin typeface="Calibri"/>
+                        </a:rPr>
+                        <a:t>Settle band — Option B (compounded) at top</a:t>
+                      </a:r>
+                    </a:p>
+                  </a:txBody>
+                  <a:tcPr>
+                    <a:solidFill>
+                      <a:srgbClr val="FFFFFF"/>
+                    </a:solidFill>
+                  </a:tcPr>
+                </a:tc>
+              </a:tr>
+              <a:tr h="438912">
+                <a:tc>
+                  <a:txBody>
+                    <a:bodyPr/>
+                    <a:lstStyle/>
+                    <a:p>
+                      <a:pPr algn="ctr"/>
+                      <a:r>
+                        <a:rPr sz="1250">
+                          <a:solidFill>
+                            <a:srgbClr val="1F4E78"/>
+                          </a:solidFill>
+                          <a:latin typeface="Calibri"/>
+                        </a:rPr>
+                        <a:t>$1.50</a:t>
+                      </a:r>
+                    </a:p>
+                  </a:txBody>
+                  <a:tcPr>
+                    <a:solidFill>
+                      <a:srgbClr val="FFFFFF"/>
+                    </a:solidFill>
+                  </a:tcPr>
+                </a:tc>
+                <a:tc>
+                  <a:txBody>
+                    <a:bodyPr/>
+                    <a:lstStyle/>
+                    <a:p>
+                      <a:pPr algn="ctr"/>
+                      <a:r>
+                        <a:rPr sz="1250">
+                          <a:solidFill>
+                            <a:srgbClr val="1F4E78"/>
+                          </a:solidFill>
+                          <a:latin typeface="Calibri"/>
+                        </a:rPr>
+                        <a:t>$675</a:t>
+                      </a:r>
+                    </a:p>
+                  </a:txBody>
+                  <a:tcPr>
+                    <a:solidFill>
+                      <a:srgbClr val="FFFFFF"/>
+                    </a:solidFill>
+                  </a:tcPr>
+                </a:tc>
+                <a:tc>
+                  <a:txBody>
+                    <a:bodyPr/>
+                    <a:lstStyle/>
+                    <a:p>
+                      <a:pPr algn="ctr"/>
+                      <a:r>
+                        <a:rPr sz="1250">
+                          <a:solidFill>
+                            <a:srgbClr val="1F4E78"/>
+                          </a:solidFill>
+                          <a:latin typeface="Calibri"/>
+                        </a:rPr>
+                        <a:t>+100%</a:t>
+                      </a:r>
+                    </a:p>
+                  </a:txBody>
+                  <a:tcPr>
+                    <a:solidFill>
+                      <a:srgbClr val="FFFFFF"/>
+                    </a:solidFill>
+                  </a:tcPr>
+                </a:tc>
+                <a:tc>
+                  <a:txBody>
+                    <a:bodyPr/>
+                    <a:lstStyle/>
+                    <a:p>
+                      <a:pPr algn="l"/>
+                      <a:r>
+                        <a:rPr sz="1250">
+                          <a:solidFill>
+                            <a:srgbClr val="1F4E78"/>
+                          </a:solidFill>
+                          <a:latin typeface="Calibri"/>
+                        </a:rPr>
+                        <a:t>Walk-away ceiling</a:t>
+                      </a:r>
+                    </a:p>
+                  </a:txBody>
+                  <a:tcPr>
+                    <a:solidFill>
+                      <a:srgbClr val="FFFFFF"/>
+                    </a:solidFill>
+                  </a:tcPr>
+                </a:tc>
+              </a:tr>
+            </a:tbl>
+          </a:graphicData>
+        </a:graphic>
+      </p:graphicFrame>
     </p:spTree>
   </p:cSld>
   <p:clrMapOvr>
@@ -7224,7 +8356,7 @@
                 </a:solidFill>
                 <a:latin typeface="Calibri"/>
               </a:rPr>
-              <a:t>Why We Are Advancing APV and CJB</a:t>
+              <a:t>Order Cadence — Driven by the 18-Day Shelf Life</a:t>
             </a:r>
           </a:p>
         </p:txBody>
@@ -7276,8 +8408,8 @@
         </p:nvSpPr>
         <p:spPr>
           <a:xfrm>
-            <a:off x="548640" y="1051560"/>
-            <a:ext cx="11064240" cy="548640"/>
+            <a:off x="548640" y="1143000"/>
+            <a:ext cx="11064240" cy="1554480"/>
           </a:xfrm>
           <a:prstGeom prst="rect">
             <a:avLst/>
@@ -7292,17 +8424,51 @@
           <a:p>
             <a:pPr algn="l">
               <a:spcAft>
-                <a:spcPts val="400"/>
-              </a:spcAft>
-            </a:pPr>
-            <a:r>
-              <a:rPr sz="1500" b="1" i="0">
+                <a:spcPts val="1000"/>
+              </a:spcAft>
+            </a:pPr>
+            <a:r>
+              <a:rPr b="1" sz="1500">
                 <a:solidFill>
                   <a:srgbClr val="1F4E78"/>
                 </a:solidFill>
                 <a:latin typeface="Calibri"/>
               </a:rPr>
-              <a:t>They are the only two that clear ALL three conditions that matter for this account:</a:t>
+              <a:t>• Made fresh, no stockpiling </a:t>
+            </a:r>
+            <a:r>
+              <a:rPr sz="1500">
+                <a:solidFill>
+                  <a:srgbClr val="595959"/>
+                </a:solidFill>
+                <a:latin typeface="Calibri"/>
+              </a:rPr>
+              <a:t>— 18-day shelf life (~2.5 weeks). You can hold at most ~2 drums of 2nd-source supply before the oldest ages out.</a:t>
+            </a:r>
+          </a:p>
+          <a:p>
+            <a:pPr algn="l">
+              <a:spcAft>
+                <a:spcPts val="1000"/>
+              </a:spcAft>
+            </a:pPr>
+            <a:r>
+              <a:rPr b="1" sz="1500">
+                <a:solidFill>
+                  <a:srgbClr val="1F4E78"/>
+                </a:solidFill>
+                <a:latin typeface="Calibri"/>
+              </a:rPr>
+              <a:t>• Same split </a:t>
+            </a:r>
+            <a:r>
+              <a:rPr sz="1500">
+                <a:solidFill>
+                  <a:srgbClr val="595959"/>
+                </a:solidFill>
+                <a:latin typeface="Calibri"/>
+              </a:rPr>
+              <a:t>— ~1 drum/week to the 2nd source (~35% of total), unchanged.</a:t>
             </a:r>
           </a:p>
         </p:txBody>
@@ -7315,305 +8481,8 @@
         </p:nvSpPr>
         <p:spPr>
           <a:xfrm>
-            <a:off x="548640" y="1691640"/>
-            <a:ext cx="3566160" cy="1143000"/>
-          </a:xfrm>
-          <a:prstGeom prst="rect">
-            <a:avLst/>
-          </a:prstGeom>
-          <a:solidFill>
-            <a:srgbClr val="EEF3FA"/>
-          </a:solidFill>
-          <a:ln>
-            <a:noFill/>
-          </a:ln>
-          <a:effectLst/>
-        </p:spPr>
-        <p:style>
-          <a:lnRef idx="1">
-            <a:schemeClr val="accent1"/>
-          </a:lnRef>
-          <a:fillRef idx="3">
-            <a:schemeClr val="accent1"/>
-          </a:fillRef>
-          <a:effectRef idx="2">
-            <a:schemeClr val="accent1"/>
-          </a:effectRef>
-          <a:fontRef idx="minor">
-            <a:schemeClr val="lt1"/>
-          </a:fontRef>
-        </p:style>
-        <p:txBody>
-          <a:bodyPr rtlCol="0" anchor="ctr"/>
-          <a:lstStyle/>
-          <a:p>
-            <a:pPr algn="ctr"/>
-          </a:p>
-        </p:txBody>
-      </p:sp>
-      <p:sp>
-        <p:nvSpPr>
-          <p:cNvPr id="7" name="TextBox 6"/>
-          <p:cNvSpPr txBox="1"/>
-          <p:nvPr/>
-        </p:nvSpPr>
-        <p:spPr>
-          <a:xfrm>
-            <a:off x="640080" y="1828800"/>
-            <a:ext cx="3383279" cy="868680"/>
-          </a:xfrm>
-          <a:prstGeom prst="rect">
-            <a:avLst/>
-          </a:prstGeom>
-          <a:noFill/>
-        </p:spPr>
-        <p:txBody>
-          <a:bodyPr wrap="square" anchor="ctr">
-            <a:spAutoFit/>
-          </a:bodyPr>
-          <a:lstStyle/>
-          <a:p>
-            <a:pPr algn="ctr">
-              <a:spcAft>
-                <a:spcPts val="200"/>
-              </a:spcAft>
-            </a:pPr>
-            <a:r>
-              <a:rPr sz="2400" b="1" i="0">
-                <a:solidFill>
-                  <a:srgbClr val="1F4E78"/>
-                </a:solidFill>
-                <a:latin typeface="Calibri"/>
-              </a:rPr>
-              <a:t>Capability</a:t>
-            </a:r>
-          </a:p>
-          <a:p>
-            <a:pPr algn="ctr">
-              <a:spcAft>
-                <a:spcPts val="400"/>
-              </a:spcAft>
-            </a:pPr>
-            <a:r>
-              <a:rPr sz="1100" b="0" i="0">
-                <a:solidFill>
-                  <a:srgbClr val="595959"/>
-                </a:solidFill>
-                <a:latin typeface="Calibri"/>
-              </a:rPr>
-              <a:t>Can hold the 90–95 °C cook (the disqualifier for others)</a:t>
-            </a:r>
-          </a:p>
-        </p:txBody>
-      </p:sp>
-      <p:sp>
-        <p:nvSpPr>
-          <p:cNvPr id="8" name="Rectangle 7"/>
-          <p:cNvSpPr/>
-          <p:nvPr/>
-        </p:nvSpPr>
-        <p:spPr>
-          <a:xfrm>
-            <a:off x="4297680" y="1691640"/>
-            <a:ext cx="3566160" cy="1143000"/>
-          </a:xfrm>
-          <a:prstGeom prst="rect">
-            <a:avLst/>
-          </a:prstGeom>
-          <a:solidFill>
-            <a:srgbClr val="EEF3FA"/>
-          </a:solidFill>
-          <a:ln>
-            <a:noFill/>
-          </a:ln>
-          <a:effectLst/>
-        </p:spPr>
-        <p:style>
-          <a:lnRef idx="1">
-            <a:schemeClr val="accent1"/>
-          </a:lnRef>
-          <a:fillRef idx="3">
-            <a:schemeClr val="accent1"/>
-          </a:fillRef>
-          <a:effectRef idx="2">
-            <a:schemeClr val="accent1"/>
-          </a:effectRef>
-          <a:fontRef idx="minor">
-            <a:schemeClr val="lt1"/>
-          </a:fontRef>
-        </p:style>
-        <p:txBody>
-          <a:bodyPr rtlCol="0" anchor="ctr"/>
-          <a:lstStyle/>
-          <a:p>
-            <a:pPr algn="ctr"/>
-          </a:p>
-        </p:txBody>
-      </p:sp>
-      <p:sp>
-        <p:nvSpPr>
-          <p:cNvPr id="9" name="TextBox 8"/>
-          <p:cNvSpPr txBox="1"/>
-          <p:nvPr/>
-        </p:nvSpPr>
-        <p:spPr>
-          <a:xfrm>
-            <a:off x="4389120" y="1828800"/>
-            <a:ext cx="3383279" cy="868680"/>
-          </a:xfrm>
-          <a:prstGeom prst="rect">
-            <a:avLst/>
-          </a:prstGeom>
-          <a:noFill/>
-        </p:spPr>
-        <p:txBody>
-          <a:bodyPr wrap="square" anchor="ctr">
-            <a:spAutoFit/>
-          </a:bodyPr>
-          <a:lstStyle/>
-          <a:p>
-            <a:pPr algn="ctr">
-              <a:spcAft>
-                <a:spcPts val="200"/>
-              </a:spcAft>
-            </a:pPr>
-            <a:r>
-              <a:rPr sz="2400" b="1" i="0">
-                <a:solidFill>
-                  <a:srgbClr val="1F4E78"/>
-                </a:solidFill>
-                <a:latin typeface="Calibri"/>
-              </a:rPr>
-              <a:t>Batch fit</a:t>
-            </a:r>
-          </a:p>
-          <a:p>
-            <a:pPr algn="ctr">
-              <a:spcAft>
-                <a:spcPts val="400"/>
-              </a:spcAft>
-            </a:pPr>
-            <a:r>
-              <a:rPr sz="1100" b="0" i="0">
-                <a:solidFill>
-                  <a:srgbClr val="595959"/>
-                </a:solidFill>
-                <a:latin typeface="Calibri"/>
-              </a:rPr>
-              <a:t>Small batches — right-sized for ~1 drum/wk</a:t>
-            </a:r>
-          </a:p>
-        </p:txBody>
-      </p:sp>
-      <p:sp>
-        <p:nvSpPr>
-          <p:cNvPr id="10" name="Rectangle 9"/>
-          <p:cNvSpPr/>
-          <p:nvPr/>
-        </p:nvSpPr>
-        <p:spPr>
-          <a:xfrm>
-            <a:off x="8046720" y="1691640"/>
-            <a:ext cx="3566160" cy="1143000"/>
-          </a:xfrm>
-          <a:prstGeom prst="rect">
-            <a:avLst/>
-          </a:prstGeom>
-          <a:solidFill>
-            <a:srgbClr val="EEF3FA"/>
-          </a:solidFill>
-          <a:ln>
-            <a:noFill/>
-          </a:ln>
-          <a:effectLst/>
-        </p:spPr>
-        <p:style>
-          <a:lnRef idx="1">
-            <a:schemeClr val="accent1"/>
-          </a:lnRef>
-          <a:fillRef idx="3">
-            <a:schemeClr val="accent1"/>
-          </a:fillRef>
-          <a:effectRef idx="2">
-            <a:schemeClr val="accent1"/>
-          </a:effectRef>
-          <a:fontRef idx="minor">
-            <a:schemeClr val="lt1"/>
-          </a:fontRef>
-        </p:style>
-        <p:txBody>
-          <a:bodyPr rtlCol="0" anchor="ctr"/>
-          <a:lstStyle/>
-          <a:p>
-            <a:pPr algn="ctr"/>
-          </a:p>
-        </p:txBody>
-      </p:sp>
-      <p:sp>
-        <p:nvSpPr>
-          <p:cNvPr id="11" name="TextBox 10"/>
-          <p:cNvSpPr txBox="1"/>
-          <p:nvPr/>
-        </p:nvSpPr>
-        <p:spPr>
-          <a:xfrm>
-            <a:off x="8138160" y="1828800"/>
-            <a:ext cx="3383279" cy="868680"/>
-          </a:xfrm>
-          <a:prstGeom prst="rect">
-            <a:avLst/>
-          </a:prstGeom>
-          <a:noFill/>
-        </p:spPr>
-        <p:txBody>
-          <a:bodyPr wrap="square" anchor="ctr">
-            <a:spAutoFit/>
-          </a:bodyPr>
-          <a:lstStyle/>
-          <a:p>
-            <a:pPr algn="ctr">
-              <a:spcAft>
-                <a:spcPts val="200"/>
-              </a:spcAft>
-            </a:pPr>
-            <a:r>
-              <a:rPr sz="2400" b="1" i="0">
-                <a:solidFill>
-                  <a:srgbClr val="1F4E78"/>
-                </a:solidFill>
-                <a:latin typeface="Calibri"/>
-              </a:rPr>
-              <a:t>Willingness</a:t>
-            </a:r>
-          </a:p>
-          <a:p>
-            <a:pPr algn="ctr">
-              <a:spcAft>
-                <a:spcPts val="400"/>
-              </a:spcAft>
-            </a:pPr>
-            <a:r>
-              <a:rPr sz="1100" b="0" i="0">
-                <a:solidFill>
-                  <a:srgbClr val="595959"/>
-                </a:solidFill>
-                <a:latin typeface="Calibri"/>
-              </a:rPr>
-              <a:t>Genuinely want a low-volume account others decline</a:t>
-            </a:r>
-          </a:p>
-        </p:txBody>
-      </p:sp>
-      <p:sp>
-        <p:nvSpPr>
-          <p:cNvPr id="12" name="Rectangle 11"/>
-          <p:cNvSpPr/>
-          <p:nvPr/>
-        </p:nvSpPr>
-        <p:spPr>
-          <a:xfrm>
-            <a:off x="548640" y="3108960"/>
-            <a:ext cx="5440680" cy="3291840"/>
+            <a:off x="548640" y="2788920"/>
+            <a:ext cx="3566160" cy="3154680"/>
           </a:xfrm>
           <a:prstGeom prst="rect">
             <a:avLst/>
@@ -7650,14 +8519,14 @@
       </p:sp>
       <p:sp>
         <p:nvSpPr>
-          <p:cNvPr id="13" name="TextBox 12"/>
+          <p:cNvPr id="7" name="TextBox 6"/>
           <p:cNvSpPr txBox="1"/>
           <p:nvPr/>
         </p:nvSpPr>
         <p:spPr>
           <a:xfrm>
-            <a:off x="731520" y="3246120"/>
-            <a:ext cx="5120640" cy="3108960"/>
+            <a:off x="749808" y="2971800"/>
+            <a:ext cx="3200400" cy="2880360"/>
           </a:xfrm>
           <a:prstGeom prst="rect">
             <a:avLst/>
@@ -7672,17 +8541,17 @@
           <a:p>
             <a:pPr algn="l">
               <a:spcAft>
-                <a:spcPts val="500"/>
-              </a:spcAft>
-            </a:pPr>
-            <a:r>
-              <a:rPr sz="1600" b="1" i="0">
+                <a:spcPts val="600"/>
+              </a:spcAft>
+            </a:pPr>
+            <a:r>
+              <a:rPr sz="1400" b="1" i="0">
                 <a:solidFill>
                   <a:srgbClr val="376E37"/>
                 </a:solidFill>
                 <a:latin typeface="Calibri"/>
               </a:rPr>
-              <a:t>CJB — FRONT-RUNNER</a:t>
+              <a:t>Weekly — 1 drum / wk</a:t>
             </a:r>
           </a:p>
           <a:p>
@@ -7692,13 +8561,13 @@
               </a:spcAft>
             </a:pPr>
             <a:r>
-              <a:rPr sz="1200" b="0" i="0">
+              <a:rPr sz="1250" b="0" i="0">
                 <a:solidFill>
                   <a:srgbClr val="595959"/>
                 </a:solidFill>
                 <a:latin typeface="Calibri"/>
               </a:rPr>
-              <a:t>•  Gate CLEARED in interview: 90–95 °C for 45 min–1 hr, jacketed 316L, no fisheyes, cools ≤40 °C, prior HMW-PVA experience</a:t>
+              <a:t>•  Simplest, freshest</a:t>
             </a:r>
           </a:p>
           <a:p>
@@ -7708,13 +8577,13 @@
               </a:spcAft>
             </a:pPr>
             <a:r>
-              <a:rPr sz="1200" b="0" i="0">
+              <a:rPr sz="1250" b="0" i="0">
                 <a:solidFill>
                   <a:srgbClr val="595959"/>
                 </a:solidFill>
                 <a:latin typeface="Calibri"/>
               </a:rPr>
-              <a:t>•  40-gal min / will do a single drum; lab-batch for qual; 3–4 day lead (or overnight)</a:t>
+              <a:t>•  Used well within shelf life</a:t>
             </a:r>
           </a:p>
           <a:p>
@@ -7724,49 +8593,33 @@
               </a:spcAft>
             </a:pPr>
             <a:r>
-              <a:rPr sz="1200" b="0" i="0">
+              <a:rPr sz="1250" b="0" i="0">
                 <a:solidFill>
                   <a:srgbClr val="595959"/>
                 </a:solidFill>
                 <a:latin typeface="Calibri"/>
               </a:rPr>
-              <a:t>•  Bonus: ex-Lonza (Proxel) formulator on staff</a:t>
-            </a:r>
-          </a:p>
-          <a:p>
-            <a:pPr algn="l">
-              <a:spcAft>
-                <a:spcPts val="700"/>
-              </a:spcAft>
-            </a:pPr>
-            <a:r>
-              <a:rPr sz="1200" b="0" i="0">
-                <a:solidFill>
-                  <a:srgbClr val="595959"/>
-                </a:solidFill>
-                <a:latin typeface="Calibri"/>
-              </a:rPr>
-              <a:t>•  Open: NDA on process (McC); firm pricing not yet quoted</a:t>
-            </a:r>
-          </a:p>
-        </p:txBody>
-      </p:sp>
-      <p:sp>
-        <p:nvSpPr>
-          <p:cNvPr id="14" name="Rectangle 13"/>
+              <a:t>•  Small batch for APV → higher $/lb</a:t>
+            </a:r>
+          </a:p>
+        </p:txBody>
+      </p:sp>
+      <p:sp>
+        <p:nvSpPr>
+          <p:cNvPr id="8" name="Rectangle 7"/>
           <p:cNvSpPr/>
           <p:nvPr/>
         </p:nvSpPr>
         <p:spPr>
           <a:xfrm>
-            <a:off x="6172200" y="3108960"/>
-            <a:ext cx="5440680" cy="3291840"/>
+            <a:off x="4297680" y="2788920"/>
+            <a:ext cx="3566160" cy="3154680"/>
           </a:xfrm>
           <a:prstGeom prst="rect">
             <a:avLst/>
           </a:prstGeom>
           <a:solidFill>
-            <a:srgbClr val="EEF3FA"/>
+            <a:srgbClr val="DDEBF7"/>
           </a:solidFill>
           <a:ln>
             <a:noFill/>
@@ -7797,14 +8650,14 @@
       </p:sp>
       <p:sp>
         <p:nvSpPr>
-          <p:cNvPr id="15" name="TextBox 14"/>
+          <p:cNvPr id="9" name="TextBox 8"/>
           <p:cNvSpPr txBox="1"/>
           <p:nvPr/>
         </p:nvSpPr>
         <p:spPr>
           <a:xfrm>
-            <a:off x="6355080" y="3246120"/>
-            <a:ext cx="5120640" cy="3108960"/>
+            <a:off x="4498848" y="2971800"/>
+            <a:ext cx="3200400" cy="2880360"/>
           </a:xfrm>
           <a:prstGeom prst="rect">
             <a:avLst/>
@@ -7819,17 +8672,17 @@
           <a:p>
             <a:pPr algn="l">
               <a:spcAft>
-                <a:spcPts val="500"/>
-              </a:spcAft>
-            </a:pPr>
-            <a:r>
-              <a:rPr sz="1600" b="1" i="0">
+                <a:spcPts val="600"/>
+              </a:spcAft>
+            </a:pPr>
+            <a:r>
+              <a:rPr sz="1400" b="1" i="0">
                 <a:solidFill>
                   <a:srgbClr val="2E75B6"/>
                 </a:solidFill>
                 <a:latin typeface="Calibri"/>
               </a:rPr>
-              <a:t>APV — STRONG SECOND</a:t>
+              <a:t>Biweekly — 2 drums / 2 wks  (RECOMMENDED)</a:t>
             </a:r>
           </a:p>
           <a:p>
@@ -7839,13 +8692,13 @@
               </a:spcAft>
             </a:pPr>
             <a:r>
-              <a:rPr sz="1200" b="0" i="0">
+              <a:rPr sz="1250" b="0" i="0">
                 <a:solidFill>
                   <a:srgbClr val="595959"/>
                 </a:solidFill>
                 <a:latin typeface="Calibri"/>
               </a:rPr>
-              <a:t>•  Engaged &amp; interested; very small batches (from 5 gal)</a:t>
+              <a:t>•  110 gal hits APV's batch sweet spot → better price</a:t>
             </a:r>
           </a:p>
           <a:p>
@@ -7855,13 +8708,13 @@
               </a:spcAft>
             </a:pPr>
             <a:r>
-              <a:rPr sz="1200" b="0" i="0">
+              <a:rPr sz="1250" b="0" i="0">
                 <a:solidFill>
                   <a:srgbClr val="595959"/>
                 </a:solidFill>
                 <a:latin typeface="Calibri"/>
               </a:rPr>
-              <a:t>•  Pigment-dispersion specialty (useful for our colorants); ISO 9001 / EPA</a:t>
+              <a:t>•  2 weeks supply &lt; 18-day shelf life → safe</a:t>
             </a:r>
           </a:p>
           <a:p>
@@ -7871,29 +8724,183 @@
               </a:spcAft>
             </a:pPr>
             <a:r>
-              <a:rPr sz="1200" b="0" i="0">
+              <a:rPr sz="1250" b="0" i="0">
                 <a:solidFill>
                   <a:srgbClr val="595959"/>
                 </a:solidFill>
                 <a:latin typeface="Calibri"/>
               </a:rPr>
-              <a:t>•  Asked for pricing early — sizing the account economics</a:t>
-            </a:r>
-          </a:p>
+              <a:t>•  Best balance of price + freshness</a:t>
+            </a:r>
+          </a:p>
+        </p:txBody>
+      </p:sp>
+      <p:sp>
+        <p:nvSpPr>
+          <p:cNvPr id="10" name="Rectangle 9"/>
+          <p:cNvSpPr/>
+          <p:nvPr/>
+        </p:nvSpPr>
+        <p:spPr>
+          <a:xfrm>
+            <a:off x="8046720" y="2788920"/>
+            <a:ext cx="3566160" cy="3154680"/>
+          </a:xfrm>
+          <a:prstGeom prst="rect">
+            <a:avLst/>
+          </a:prstGeom>
+          <a:solidFill>
+            <a:srgbClr val="FCE4D6"/>
+          </a:solidFill>
+          <a:ln>
+            <a:noFill/>
+          </a:ln>
+          <a:effectLst/>
+        </p:spPr>
+        <p:style>
+          <a:lnRef idx="1">
+            <a:schemeClr val="accent1"/>
+          </a:lnRef>
+          <a:fillRef idx="3">
+            <a:schemeClr val="accent1"/>
+          </a:fillRef>
+          <a:effectRef idx="2">
+            <a:schemeClr val="accent1"/>
+          </a:effectRef>
+          <a:fontRef idx="minor">
+            <a:schemeClr val="lt1"/>
+          </a:fontRef>
+        </p:style>
+        <p:txBody>
+          <a:bodyPr rtlCol="0" anchor="ctr"/>
+          <a:lstStyle/>
+          <a:p>
+            <a:pPr algn="ctr"/>
+          </a:p>
+        </p:txBody>
+      </p:sp>
+      <p:sp>
+        <p:nvSpPr>
+          <p:cNvPr id="11" name="TextBox 10"/>
+          <p:cNvSpPr txBox="1"/>
+          <p:nvPr/>
+        </p:nvSpPr>
+        <p:spPr>
+          <a:xfrm>
+            <a:off x="8247888" y="2971800"/>
+            <a:ext cx="3200400" cy="2880360"/>
+          </a:xfrm>
+          <a:prstGeom prst="rect">
+            <a:avLst/>
+          </a:prstGeom>
+          <a:noFill/>
+        </p:spPr>
+        <p:txBody>
+          <a:bodyPr wrap="square">
+            <a:spAutoFit/>
+          </a:bodyPr>
+          <a:lstStyle/>
           <a:p>
             <a:pPr algn="l">
               <a:spcAft>
+                <a:spcPts val="600"/>
+              </a:spcAft>
+            </a:pPr>
+            <a:r>
+              <a:rPr sz="1400" b="1" i="0">
+                <a:solidFill>
+                  <a:srgbClr val="C00000"/>
+                </a:solidFill>
+                <a:latin typeface="Calibri"/>
+              </a:rPr>
+              <a:t>3+ drums / batch — AVOID</a:t>
+            </a:r>
+          </a:p>
+          <a:p>
+            <a:pPr algn="l">
+              <a:spcAft>
                 <a:spcPts val="700"/>
               </a:spcAft>
             </a:pPr>
             <a:r>
-              <a:rPr sz="1200" b="0" i="0">
+              <a:rPr sz="1250" b="0" i="0">
                 <a:solidFill>
                   <a:srgbClr val="595959"/>
                 </a:solidFill>
                 <a:latin typeface="Calibri"/>
               </a:rPr>
-              <a:t>•  Open: re-confirm 90–95 °C hold; send pricing envelope</a:t>
+              <a:t>•  3+ weeks supply &gt; 18-day shelf life</a:t>
+            </a:r>
+          </a:p>
+          <a:p>
+            <a:pPr algn="l">
+              <a:spcAft>
+                <a:spcPts val="700"/>
+              </a:spcAft>
+            </a:pPr>
+            <a:r>
+              <a:rPr sz="1250" b="0" i="0">
+                <a:solidFill>
+                  <a:srgbClr val="595959"/>
+                </a:solidFill>
+                <a:latin typeface="Calibri"/>
+              </a:rPr>
+              <a:t>•  Oldest drum ages out → waste / risk</a:t>
+            </a:r>
+          </a:p>
+          <a:p>
+            <a:pPr algn="l">
+              <a:spcAft>
+                <a:spcPts val="700"/>
+              </a:spcAft>
+            </a:pPr>
+            <a:r>
+              <a:rPr sz="1250" b="0" i="0">
+                <a:solidFill>
+                  <a:srgbClr val="595959"/>
+                </a:solidFill>
+                <a:latin typeface="Calibri"/>
+              </a:rPr>
+              <a:t>•  Don't let APV batch larger just to cut price</a:t>
+            </a:r>
+          </a:p>
+        </p:txBody>
+      </p:sp>
+      <p:sp>
+        <p:nvSpPr>
+          <p:cNvPr id="12" name="TextBox 11"/>
+          <p:cNvSpPr txBox="1"/>
+          <p:nvPr/>
+        </p:nvSpPr>
+        <p:spPr>
+          <a:xfrm>
+            <a:off x="548640" y="6080760"/>
+            <a:ext cx="11064240" cy="640080"/>
+          </a:xfrm>
+          <a:prstGeom prst="rect">
+            <a:avLst/>
+          </a:prstGeom>
+          <a:noFill/>
+        </p:spPr>
+        <p:txBody>
+          <a:bodyPr wrap="square">
+            <a:spAutoFit/>
+          </a:bodyPr>
+          <a:lstStyle/>
+          <a:p>
+            <a:pPr algn="l">
+              <a:spcAft>
+                <a:spcPts val="400"/>
+              </a:spcAft>
+            </a:pPr>
+            <a:r>
+              <a:rPr sz="1200" b="0" i="1">
+                <a:solidFill>
+                  <a:srgbClr val="595959"/>
+                </a:solidFill>
+                <a:latin typeface="Calibri"/>
+              </a:rPr>
+              <a:t>Rule of thumb: order at least every 2 weeks, max ~2 drums per batch. The biweekly 2-drum cadence gives APV an efficient batch (supports the lower price) while staying inside the 18-day shelf life.</a:t>
             </a:r>
           </a:p>
         </p:txBody>
@@ -7994,7 +9001,7 @@
                 </a:solidFill>
                 <a:latin typeface="Calibri"/>
               </a:rPr>
-              <a:t>Why Keep Both Warm — Low-Volume Leverage</a:t>
+              <a:t>Supplier Screening — US Field to Shortlist</a:t>
             </a:r>
           </a:p>
         </p:txBody>
@@ -8046,8 +9053,8 @@
         </p:nvSpPr>
         <p:spPr>
           <a:xfrm>
-            <a:off x="548640" y="1280160"/>
-            <a:ext cx="11064240" cy="2194560"/>
+            <a:off x="548640" y="1097280"/>
+            <a:ext cx="11064240" cy="457200"/>
           </a:xfrm>
           <a:prstGeom prst="rect">
             <a:avLst/>
@@ -8055,58 +9062,24 @@
           <a:noFill/>
         </p:spPr>
         <p:txBody>
-          <a:bodyPr wrap="square">
+          <a:bodyPr wrap="none">
             <a:spAutoFit/>
           </a:bodyPr>
           <a:lstStyle/>
           <a:p>
             <a:pPr algn="l">
               <a:spcAft>
-                <a:spcPts val="1400"/>
-              </a:spcAft>
-            </a:pPr>
-            <a:r>
-              <a:rPr b="1" sz="1600">
-                <a:solidFill>
-                  <a:srgbClr val="1F4E78"/>
-                </a:solidFill>
-                <a:latin typeface="Calibri"/>
-              </a:rPr>
-              <a:t>• We are a small, low-attractiveness account </a:t>
-            </a:r>
-            <a:r>
-              <a:rPr sz="1600">
+                <a:spcPts val="400"/>
+              </a:spcAft>
+            </a:pPr>
+            <a:r>
+              <a:rPr sz="1400" b="0" i="1">
                 <a:solidFill>
                   <a:srgbClr val="595959"/>
                 </a:solidFill>
                 <a:latin typeface="Calibri"/>
               </a:rPr>
-              <a:t>(Kraljic 'bottleneck'; likely a 'nuisance' account to a blender). Our structural negotiating leverage is weak.</a:t>
-            </a:r>
-          </a:p>
-          <a:p>
-            <a:pPr algn="l">
-              <a:spcAft>
-                <a:spcPts val="1400"/>
-              </a:spcAft>
-            </a:pPr>
-            <a:r>
-              <a:rPr b="1" sz="1600">
-                <a:solidFill>
-                  <a:srgbClr val="1F4E78"/>
-                </a:solidFill>
-                <a:latin typeface="Calibri"/>
-              </a:rPr>
-              <a:t>• Two qualified, interested suppliers is the single best lever </a:t>
-            </a:r>
-            <a:r>
-              <a:rPr sz="1600">
-                <a:solidFill>
-                  <a:srgbClr val="595959"/>
-                </a:solidFill>
-                <a:latin typeface="Calibri"/>
-              </a:rPr>
-              <a:t>we have — it disciplines pricing and protects continuity without overplaying a volume we don't have.</a:t>
+              <a:t>Two filters: (1) can hold the 90–95 °C cook  →  (2) right-sized for ~1 drum/wk under 18-day shelf life</a:t>
             </a:r>
           </a:p>
         </p:txBody>
@@ -8119,14 +9092,14 @@
         </p:nvSpPr>
         <p:spPr>
           <a:xfrm>
-            <a:off x="548640" y="3657600"/>
-            <a:ext cx="11064240" cy="411480"/>
+            <a:off x="548640" y="1783080"/>
+            <a:ext cx="6583680" cy="566928"/>
           </a:xfrm>
           <a:prstGeom prst="rect">
             <a:avLst/>
           </a:prstGeom>
           <a:solidFill>
-            <a:srgbClr val="2E75B6"/>
+            <a:srgbClr val="EEF3FA"/>
           </a:solidFill>
           <a:ln>
             <a:noFill/>
@@ -8163,8 +9136,8 @@
         </p:nvSpPr>
         <p:spPr>
           <a:xfrm>
-            <a:off x="731520" y="3703320"/>
-            <a:ext cx="10789920" cy="365760"/>
+            <a:off x="685800" y="1837943"/>
+            <a:ext cx="6400800" cy="457200"/>
           </a:xfrm>
           <a:prstGeom prst="rect">
             <a:avLst/>
@@ -8172,7 +9145,7 @@
           <a:noFill/>
         </p:spPr>
         <p:txBody>
-          <a:bodyPr wrap="none">
+          <a:bodyPr wrap="none" anchor="ctr">
             <a:spAutoFit/>
           </a:bodyPr>
           <a:lstStyle/>
@@ -8183,27 +9156,1438 @@
               </a:spcAft>
             </a:pPr>
             <a:r>
-              <a:rPr sz="1400" b="1" i="0">
+              <a:rPr sz="1250" b="1" i="0">
+                <a:solidFill>
+                  <a:srgbClr val="1F4E78"/>
+                </a:solidFill>
+                <a:latin typeface="Calibri"/>
+              </a:rPr>
+              <a:t>CJB Applied Technologies — Valdosta, GA</a:t>
+            </a:r>
+          </a:p>
+        </p:txBody>
+      </p:sp>
+      <p:sp>
+        <p:nvSpPr>
+          <p:cNvPr id="8" name="Rectangle 7"/>
+          <p:cNvSpPr/>
+          <p:nvPr/>
+        </p:nvSpPr>
+        <p:spPr>
+          <a:xfrm>
+            <a:off x="7223760" y="1783080"/>
+            <a:ext cx="3291840" cy="566928"/>
+          </a:xfrm>
+          <a:prstGeom prst="rect">
+            <a:avLst/>
+          </a:prstGeom>
+          <a:solidFill>
+            <a:srgbClr val="EEF3FA"/>
+          </a:solidFill>
+          <a:ln>
+            <a:noFill/>
+          </a:ln>
+          <a:effectLst/>
+        </p:spPr>
+        <p:style>
+          <a:lnRef idx="1">
+            <a:schemeClr val="accent1"/>
+          </a:lnRef>
+          <a:fillRef idx="3">
+            <a:schemeClr val="accent1"/>
+          </a:fillRef>
+          <a:effectRef idx="2">
+            <a:schemeClr val="accent1"/>
+          </a:effectRef>
+          <a:fontRef idx="minor">
+            <a:schemeClr val="lt1"/>
+          </a:fontRef>
+        </p:style>
+        <p:txBody>
+          <a:bodyPr rtlCol="0" anchor="ctr"/>
+          <a:lstStyle/>
+          <a:p>
+            <a:pPr algn="ctr"/>
+          </a:p>
+        </p:txBody>
+      </p:sp>
+      <p:sp>
+        <p:nvSpPr>
+          <p:cNvPr id="9" name="TextBox 8"/>
+          <p:cNvSpPr txBox="1"/>
+          <p:nvPr/>
+        </p:nvSpPr>
+        <p:spPr>
+          <a:xfrm>
+            <a:off x="7315200" y="1837943"/>
+            <a:ext cx="3200400" cy="457200"/>
+          </a:xfrm>
+          <a:prstGeom prst="rect">
+            <a:avLst/>
+          </a:prstGeom>
+          <a:noFill/>
+        </p:spPr>
+        <p:txBody>
+          <a:bodyPr wrap="none" anchor="ctr">
+            <a:spAutoFit/>
+          </a:bodyPr>
+          <a:lstStyle/>
+          <a:p>
+            <a:pPr algn="l">
+              <a:spcAft>
+                <a:spcPts val="400"/>
+              </a:spcAft>
+            </a:pPr>
+            <a:r>
+              <a:rPr sz="1100" b="0" i="0">
+                <a:solidFill>
+                  <a:srgbClr val="595959"/>
+                </a:solidFill>
+                <a:latin typeface="Calibri"/>
+              </a:rPr>
+              <a:t>Front-runner (interviewed 06/26)</a:t>
+            </a:r>
+          </a:p>
+        </p:txBody>
+      </p:sp>
+      <p:sp>
+        <p:nvSpPr>
+          <p:cNvPr id="10" name="Rectangle 9"/>
+          <p:cNvSpPr/>
+          <p:nvPr/>
+        </p:nvSpPr>
+        <p:spPr>
+          <a:xfrm>
+            <a:off x="10607040" y="1783080"/>
+            <a:ext cx="1005840" cy="566928"/>
+          </a:xfrm>
+          <a:prstGeom prst="rect">
+            <a:avLst/>
+          </a:prstGeom>
+          <a:solidFill>
+            <a:srgbClr val="376E37"/>
+          </a:solidFill>
+          <a:ln>
+            <a:noFill/>
+          </a:ln>
+          <a:effectLst/>
+        </p:spPr>
+        <p:style>
+          <a:lnRef idx="1">
+            <a:schemeClr val="accent1"/>
+          </a:lnRef>
+          <a:fillRef idx="3">
+            <a:schemeClr val="accent1"/>
+          </a:fillRef>
+          <a:effectRef idx="2">
+            <a:schemeClr val="accent1"/>
+          </a:effectRef>
+          <a:fontRef idx="minor">
+            <a:schemeClr val="lt1"/>
+          </a:fontRef>
+        </p:style>
+        <p:txBody>
+          <a:bodyPr rtlCol="0" anchor="ctr"/>
+          <a:lstStyle/>
+          <a:p>
+            <a:pPr algn="ctr"/>
+          </a:p>
+        </p:txBody>
+      </p:sp>
+      <p:sp>
+        <p:nvSpPr>
+          <p:cNvPr id="11" name="TextBox 10"/>
+          <p:cNvSpPr txBox="1"/>
+          <p:nvPr/>
+        </p:nvSpPr>
+        <p:spPr>
+          <a:xfrm>
+            <a:off x="10607040" y="1837943"/>
+            <a:ext cx="1005840" cy="457200"/>
+          </a:xfrm>
+          <a:prstGeom prst="rect">
+            <a:avLst/>
+          </a:prstGeom>
+          <a:noFill/>
+        </p:spPr>
+        <p:txBody>
+          <a:bodyPr wrap="none" anchor="ctr">
+            <a:spAutoFit/>
+          </a:bodyPr>
+          <a:lstStyle/>
+          <a:p>
+            <a:pPr algn="ctr">
+              <a:spcAft>
+                <a:spcPts val="400"/>
+              </a:spcAft>
+            </a:pPr>
+            <a:r>
+              <a:rPr sz="1100" b="1" i="0">
                 <a:solidFill>
                   <a:srgbClr val="FFFFFF"/>
                 </a:solidFill>
                 <a:latin typeface="Calibri"/>
               </a:rPr>
-              <a:t>How we play it</a:t>
-            </a:r>
-          </a:p>
-        </p:txBody>
-      </p:sp>
-      <p:sp>
-        <p:nvSpPr>
-          <p:cNvPr id="8" name="TextBox 7"/>
+              <a:t>YES</a:t>
+            </a:r>
+          </a:p>
+        </p:txBody>
+      </p:sp>
+      <p:sp>
+        <p:nvSpPr>
+          <p:cNvPr id="12" name="Rectangle 11"/>
+          <p:cNvSpPr/>
+          <p:nvPr/>
+        </p:nvSpPr>
+        <p:spPr>
+          <a:xfrm>
+            <a:off x="548640" y="2441448"/>
+            <a:ext cx="6583680" cy="566928"/>
+          </a:xfrm>
+          <a:prstGeom prst="rect">
+            <a:avLst/>
+          </a:prstGeom>
+          <a:solidFill>
+            <a:srgbClr val="EEF3FA"/>
+          </a:solidFill>
+          <a:ln>
+            <a:noFill/>
+          </a:ln>
+          <a:effectLst/>
+        </p:spPr>
+        <p:style>
+          <a:lnRef idx="1">
+            <a:schemeClr val="accent1"/>
+          </a:lnRef>
+          <a:fillRef idx="3">
+            <a:schemeClr val="accent1"/>
+          </a:fillRef>
+          <a:effectRef idx="2">
+            <a:schemeClr val="accent1"/>
+          </a:effectRef>
+          <a:fontRef idx="minor">
+            <a:schemeClr val="lt1"/>
+          </a:fontRef>
+        </p:style>
+        <p:txBody>
+          <a:bodyPr rtlCol="0" anchor="ctr"/>
+          <a:lstStyle/>
+          <a:p>
+            <a:pPr algn="ctr"/>
+          </a:p>
+        </p:txBody>
+      </p:sp>
+      <p:sp>
+        <p:nvSpPr>
+          <p:cNvPr id="13" name="TextBox 12"/>
           <p:cNvSpPr txBox="1"/>
           <p:nvPr/>
         </p:nvSpPr>
         <p:spPr>
           <a:xfrm>
-            <a:off x="548640" y="4206240"/>
-            <a:ext cx="11064240" cy="2377440"/>
+            <a:off x="685800" y="2496312"/>
+            <a:ext cx="6400800" cy="457200"/>
+          </a:xfrm>
+          <a:prstGeom prst="rect">
+            <a:avLst/>
+          </a:prstGeom>
+          <a:noFill/>
+        </p:spPr>
+        <p:txBody>
+          <a:bodyPr wrap="none" anchor="ctr">
+            <a:spAutoFit/>
+          </a:bodyPr>
+          <a:lstStyle/>
+          <a:p>
+            <a:pPr algn="l">
+              <a:spcAft>
+                <a:spcPts val="400"/>
+              </a:spcAft>
+            </a:pPr>
+            <a:r>
+              <a:rPr sz="1250" b="1" i="0">
+                <a:solidFill>
+                  <a:srgbClr val="1F4E78"/>
+                </a:solidFill>
+                <a:latin typeface="Calibri"/>
+              </a:rPr>
+              <a:t>APV Engineered Coatings — Akron, OH</a:t>
+            </a:r>
+          </a:p>
+        </p:txBody>
+      </p:sp>
+      <p:sp>
+        <p:nvSpPr>
+          <p:cNvPr id="14" name="Rectangle 13"/>
+          <p:cNvSpPr/>
+          <p:nvPr/>
+        </p:nvSpPr>
+        <p:spPr>
+          <a:xfrm>
+            <a:off x="7223760" y="2441448"/>
+            <a:ext cx="3291840" cy="566928"/>
+          </a:xfrm>
+          <a:prstGeom prst="rect">
+            <a:avLst/>
+          </a:prstGeom>
+          <a:solidFill>
+            <a:srgbClr val="EEF3FA"/>
+          </a:solidFill>
+          <a:ln>
+            <a:noFill/>
+          </a:ln>
+          <a:effectLst/>
+        </p:spPr>
+        <p:style>
+          <a:lnRef idx="1">
+            <a:schemeClr val="accent1"/>
+          </a:lnRef>
+          <a:fillRef idx="3">
+            <a:schemeClr val="accent1"/>
+          </a:fillRef>
+          <a:effectRef idx="2">
+            <a:schemeClr val="accent1"/>
+          </a:effectRef>
+          <a:fontRef idx="minor">
+            <a:schemeClr val="lt1"/>
+          </a:fontRef>
+        </p:style>
+        <p:txBody>
+          <a:bodyPr rtlCol="0" anchor="ctr"/>
+          <a:lstStyle/>
+          <a:p>
+            <a:pPr algn="ctr"/>
+          </a:p>
+        </p:txBody>
+      </p:sp>
+      <p:sp>
+        <p:nvSpPr>
+          <p:cNvPr id="15" name="TextBox 14"/>
+          <p:cNvSpPr txBox="1"/>
+          <p:nvPr/>
+        </p:nvSpPr>
+        <p:spPr>
+          <a:xfrm>
+            <a:off x="7315200" y="2496312"/>
+            <a:ext cx="3200400" cy="457200"/>
+          </a:xfrm>
+          <a:prstGeom prst="rect">
+            <a:avLst/>
+          </a:prstGeom>
+          <a:noFill/>
+        </p:spPr>
+        <p:txBody>
+          <a:bodyPr wrap="none" anchor="ctr">
+            <a:spAutoFit/>
+          </a:bodyPr>
+          <a:lstStyle/>
+          <a:p>
+            <a:pPr algn="l">
+              <a:spcAft>
+                <a:spcPts val="400"/>
+              </a:spcAft>
+            </a:pPr>
+            <a:r>
+              <a:rPr sz="1100" b="0" i="0">
+                <a:solidFill>
+                  <a:srgbClr val="595959"/>
+                </a:solidFill>
+                <a:latin typeface="Calibri"/>
+              </a:rPr>
+              <a:t>Engaged — pricing requested</a:t>
+            </a:r>
+          </a:p>
+        </p:txBody>
+      </p:sp>
+      <p:sp>
+        <p:nvSpPr>
+          <p:cNvPr id="16" name="Rectangle 15"/>
+          <p:cNvSpPr/>
+          <p:nvPr/>
+        </p:nvSpPr>
+        <p:spPr>
+          <a:xfrm>
+            <a:off x="10607040" y="2441448"/>
+            <a:ext cx="1005840" cy="566928"/>
+          </a:xfrm>
+          <a:prstGeom prst="rect">
+            <a:avLst/>
+          </a:prstGeom>
+          <a:solidFill>
+            <a:srgbClr val="9C7706"/>
+          </a:solidFill>
+          <a:ln>
+            <a:noFill/>
+          </a:ln>
+          <a:effectLst/>
+        </p:spPr>
+        <p:style>
+          <a:lnRef idx="1">
+            <a:schemeClr val="accent1"/>
+          </a:lnRef>
+          <a:fillRef idx="3">
+            <a:schemeClr val="accent1"/>
+          </a:fillRef>
+          <a:effectRef idx="2">
+            <a:schemeClr val="accent1"/>
+          </a:effectRef>
+          <a:fontRef idx="minor">
+            <a:schemeClr val="lt1"/>
+          </a:fontRef>
+        </p:style>
+        <p:txBody>
+          <a:bodyPr rtlCol="0" anchor="ctr"/>
+          <a:lstStyle/>
+          <a:p>
+            <a:pPr algn="ctr"/>
+          </a:p>
+        </p:txBody>
+      </p:sp>
+      <p:sp>
+        <p:nvSpPr>
+          <p:cNvPr id="17" name="TextBox 16"/>
+          <p:cNvSpPr txBox="1"/>
+          <p:nvPr/>
+        </p:nvSpPr>
+        <p:spPr>
+          <a:xfrm>
+            <a:off x="10607040" y="2496312"/>
+            <a:ext cx="1005840" cy="457200"/>
+          </a:xfrm>
+          <a:prstGeom prst="rect">
+            <a:avLst/>
+          </a:prstGeom>
+          <a:noFill/>
+        </p:spPr>
+        <p:txBody>
+          <a:bodyPr wrap="none" anchor="ctr">
+            <a:spAutoFit/>
+          </a:bodyPr>
+          <a:lstStyle/>
+          <a:p>
+            <a:pPr algn="ctr">
+              <a:spcAft>
+                <a:spcPts val="400"/>
+              </a:spcAft>
+            </a:pPr>
+            <a:r>
+              <a:rPr sz="1100" b="1" i="0">
+                <a:solidFill>
+                  <a:srgbClr val="FFFFFF"/>
+                </a:solidFill>
+                <a:latin typeface="Calibri"/>
+              </a:rPr>
+              <a:t>Re-confirm</a:t>
+            </a:r>
+          </a:p>
+        </p:txBody>
+      </p:sp>
+      <p:sp>
+        <p:nvSpPr>
+          <p:cNvPr id="18" name="Rectangle 17"/>
+          <p:cNvSpPr/>
+          <p:nvPr/>
+        </p:nvSpPr>
+        <p:spPr>
+          <a:xfrm>
+            <a:off x="548640" y="3099815"/>
+            <a:ext cx="6583680" cy="566928"/>
+          </a:xfrm>
+          <a:prstGeom prst="rect">
+            <a:avLst/>
+          </a:prstGeom>
+          <a:solidFill>
+            <a:srgbClr val="EEF3FA"/>
+          </a:solidFill>
+          <a:ln>
+            <a:noFill/>
+          </a:ln>
+          <a:effectLst/>
+        </p:spPr>
+        <p:style>
+          <a:lnRef idx="1">
+            <a:schemeClr val="accent1"/>
+          </a:lnRef>
+          <a:fillRef idx="3">
+            <a:schemeClr val="accent1"/>
+          </a:fillRef>
+          <a:effectRef idx="2">
+            <a:schemeClr val="accent1"/>
+          </a:effectRef>
+          <a:fontRef idx="minor">
+            <a:schemeClr val="lt1"/>
+          </a:fontRef>
+        </p:style>
+        <p:txBody>
+          <a:bodyPr rtlCol="0" anchor="ctr"/>
+          <a:lstStyle/>
+          <a:p>
+            <a:pPr algn="ctr"/>
+          </a:p>
+        </p:txBody>
+      </p:sp>
+      <p:sp>
+        <p:nvSpPr>
+          <p:cNvPr id="19" name="TextBox 18"/>
+          <p:cNvSpPr txBox="1"/>
+          <p:nvPr/>
+        </p:nvSpPr>
+        <p:spPr>
+          <a:xfrm>
+            <a:off x="685800" y="3154679"/>
+            <a:ext cx="6400800" cy="457200"/>
+          </a:xfrm>
+          <a:prstGeom prst="rect">
+            <a:avLst/>
+          </a:prstGeom>
+          <a:noFill/>
+        </p:spPr>
+        <p:txBody>
+          <a:bodyPr wrap="none" anchor="ctr">
+            <a:spAutoFit/>
+          </a:bodyPr>
+          <a:lstStyle/>
+          <a:p>
+            <a:pPr algn="l">
+              <a:spcAft>
+                <a:spcPts val="400"/>
+              </a:spcAft>
+            </a:pPr>
+            <a:r>
+              <a:rPr sz="1250" b="1" i="0">
+                <a:solidFill>
+                  <a:srgbClr val="1F4E78"/>
+                </a:solidFill>
+                <a:latin typeface="Calibri"/>
+              </a:rPr>
+              <a:t>Piedmont Chemical / Columbus (CCI)</a:t>
+            </a:r>
+          </a:p>
+        </p:txBody>
+      </p:sp>
+      <p:sp>
+        <p:nvSpPr>
+          <p:cNvPr id="20" name="Rectangle 19"/>
+          <p:cNvSpPr/>
+          <p:nvPr/>
+        </p:nvSpPr>
+        <p:spPr>
+          <a:xfrm>
+            <a:off x="7223760" y="3099815"/>
+            <a:ext cx="3291840" cy="566928"/>
+          </a:xfrm>
+          <a:prstGeom prst="rect">
+            <a:avLst/>
+          </a:prstGeom>
+          <a:solidFill>
+            <a:srgbClr val="EEF3FA"/>
+          </a:solidFill>
+          <a:ln>
+            <a:noFill/>
+          </a:ln>
+          <a:effectLst/>
+        </p:spPr>
+        <p:style>
+          <a:lnRef idx="1">
+            <a:schemeClr val="accent1"/>
+          </a:lnRef>
+          <a:fillRef idx="3">
+            <a:schemeClr val="accent1"/>
+          </a:fillRef>
+          <a:effectRef idx="2">
+            <a:schemeClr val="accent1"/>
+          </a:effectRef>
+          <a:fontRef idx="minor">
+            <a:schemeClr val="lt1"/>
+          </a:fontRef>
+        </p:style>
+        <p:txBody>
+          <a:bodyPr rtlCol="0" anchor="ctr"/>
+          <a:lstStyle/>
+          <a:p>
+            <a:pPr algn="ctr"/>
+          </a:p>
+        </p:txBody>
+      </p:sp>
+      <p:sp>
+        <p:nvSpPr>
+          <p:cNvPr id="21" name="TextBox 20"/>
+          <p:cNvSpPr txBox="1"/>
+          <p:nvPr/>
+        </p:nvSpPr>
+        <p:spPr>
+          <a:xfrm>
+            <a:off x="7315200" y="3154679"/>
+            <a:ext cx="3200400" cy="457200"/>
+          </a:xfrm>
+          <a:prstGeom prst="rect">
+            <a:avLst/>
+          </a:prstGeom>
+          <a:noFill/>
+        </p:spPr>
+        <p:txBody>
+          <a:bodyPr wrap="none" anchor="ctr">
+            <a:spAutoFit/>
+          </a:bodyPr>
+          <a:lstStyle/>
+          <a:p>
+            <a:pPr algn="l">
+              <a:spcAft>
+                <a:spcPts val="400"/>
+              </a:spcAft>
+            </a:pPr>
+            <a:r>
+              <a:rPr sz="1100" b="0" i="0">
+                <a:solidFill>
+                  <a:srgbClr val="595959"/>
+                </a:solidFill>
+                <a:latin typeface="Calibri"/>
+              </a:rPr>
+              <a:t>Held in reserve</a:t>
+            </a:r>
+          </a:p>
+        </p:txBody>
+      </p:sp>
+      <p:sp>
+        <p:nvSpPr>
+          <p:cNvPr id="22" name="Rectangle 21"/>
+          <p:cNvSpPr/>
+          <p:nvPr/>
+        </p:nvSpPr>
+        <p:spPr>
+          <a:xfrm>
+            <a:off x="10607040" y="3099815"/>
+            <a:ext cx="1005840" cy="566928"/>
+          </a:xfrm>
+          <a:prstGeom prst="rect">
+            <a:avLst/>
+          </a:prstGeom>
+          <a:solidFill>
+            <a:srgbClr val="1F4E78"/>
+          </a:solidFill>
+          <a:ln>
+            <a:noFill/>
+          </a:ln>
+          <a:effectLst/>
+        </p:spPr>
+        <p:style>
+          <a:lnRef idx="1">
+            <a:schemeClr val="accent1"/>
+          </a:lnRef>
+          <a:fillRef idx="3">
+            <a:schemeClr val="accent1"/>
+          </a:fillRef>
+          <a:effectRef idx="2">
+            <a:schemeClr val="accent1"/>
+          </a:effectRef>
+          <a:fontRef idx="minor">
+            <a:schemeClr val="lt1"/>
+          </a:fontRef>
+        </p:style>
+        <p:txBody>
+          <a:bodyPr rtlCol="0" anchor="ctr"/>
+          <a:lstStyle/>
+          <a:p>
+            <a:pPr algn="ctr"/>
+          </a:p>
+        </p:txBody>
+      </p:sp>
+      <p:sp>
+        <p:nvSpPr>
+          <p:cNvPr id="23" name="TextBox 22"/>
+          <p:cNvSpPr txBox="1"/>
+          <p:nvPr/>
+        </p:nvSpPr>
+        <p:spPr>
+          <a:xfrm>
+            <a:off x="10607040" y="3154679"/>
+            <a:ext cx="1005840" cy="457200"/>
+          </a:xfrm>
+          <a:prstGeom prst="rect">
+            <a:avLst/>
+          </a:prstGeom>
+          <a:noFill/>
+        </p:spPr>
+        <p:txBody>
+          <a:bodyPr wrap="none" anchor="ctr">
+            <a:spAutoFit/>
+          </a:bodyPr>
+          <a:lstStyle/>
+          <a:p>
+            <a:pPr algn="ctr">
+              <a:spcAft>
+                <a:spcPts val="400"/>
+              </a:spcAft>
+            </a:pPr>
+            <a:r>
+              <a:rPr sz="1100" b="1" i="0">
+                <a:solidFill>
+                  <a:srgbClr val="FFFFFF"/>
+                </a:solidFill>
+                <a:latin typeface="Calibri"/>
+              </a:rPr>
+              <a:t>Yes / confirm</a:t>
+            </a:r>
+          </a:p>
+        </p:txBody>
+      </p:sp>
+      <p:sp>
+        <p:nvSpPr>
+          <p:cNvPr id="24" name="Rectangle 23"/>
+          <p:cNvSpPr/>
+          <p:nvPr/>
+        </p:nvSpPr>
+        <p:spPr>
+          <a:xfrm>
+            <a:off x="548640" y="3758183"/>
+            <a:ext cx="6583680" cy="566928"/>
+          </a:xfrm>
+          <a:prstGeom prst="rect">
+            <a:avLst/>
+          </a:prstGeom>
+          <a:solidFill>
+            <a:srgbClr val="EEF3FA"/>
+          </a:solidFill>
+          <a:ln>
+            <a:noFill/>
+          </a:ln>
+          <a:effectLst/>
+        </p:spPr>
+        <p:style>
+          <a:lnRef idx="1">
+            <a:schemeClr val="accent1"/>
+          </a:lnRef>
+          <a:fillRef idx="3">
+            <a:schemeClr val="accent1"/>
+          </a:fillRef>
+          <a:effectRef idx="2">
+            <a:schemeClr val="accent1"/>
+          </a:effectRef>
+          <a:fontRef idx="minor">
+            <a:schemeClr val="lt1"/>
+          </a:fontRef>
+        </p:style>
+        <p:txBody>
+          <a:bodyPr rtlCol="0" anchor="ctr"/>
+          <a:lstStyle/>
+          <a:p>
+            <a:pPr algn="ctr"/>
+          </a:p>
+        </p:txBody>
+      </p:sp>
+      <p:sp>
+        <p:nvSpPr>
+          <p:cNvPr id="25" name="TextBox 24"/>
+          <p:cNvSpPr txBox="1"/>
+          <p:nvPr/>
+        </p:nvSpPr>
+        <p:spPr>
+          <a:xfrm>
+            <a:off x="685800" y="3813047"/>
+            <a:ext cx="6400800" cy="457200"/>
+          </a:xfrm>
+          <a:prstGeom prst="rect">
+            <a:avLst/>
+          </a:prstGeom>
+          <a:noFill/>
+        </p:spPr>
+        <p:txBody>
+          <a:bodyPr wrap="none" anchor="ctr">
+            <a:spAutoFit/>
+          </a:bodyPr>
+          <a:lstStyle/>
+          <a:p>
+            <a:pPr algn="l">
+              <a:spcAft>
+                <a:spcPts val="400"/>
+              </a:spcAft>
+            </a:pPr>
+            <a:r>
+              <a:rPr sz="1250" b="1" i="0">
+                <a:solidFill>
+                  <a:srgbClr val="1F4E78"/>
+                </a:solidFill>
+                <a:latin typeface="Calibri"/>
+              </a:rPr>
+              <a:t>CORECHEM — Knoxville, TN</a:t>
+            </a:r>
+          </a:p>
+        </p:txBody>
+      </p:sp>
+      <p:sp>
+        <p:nvSpPr>
+          <p:cNvPr id="26" name="Rectangle 25"/>
+          <p:cNvSpPr/>
+          <p:nvPr/>
+        </p:nvSpPr>
+        <p:spPr>
+          <a:xfrm>
+            <a:off x="7223760" y="3758183"/>
+            <a:ext cx="3291840" cy="566928"/>
+          </a:xfrm>
+          <a:prstGeom prst="rect">
+            <a:avLst/>
+          </a:prstGeom>
+          <a:solidFill>
+            <a:srgbClr val="EEF3FA"/>
+          </a:solidFill>
+          <a:ln>
+            <a:noFill/>
+          </a:ln>
+          <a:effectLst/>
+        </p:spPr>
+        <p:style>
+          <a:lnRef idx="1">
+            <a:schemeClr val="accent1"/>
+          </a:lnRef>
+          <a:fillRef idx="3">
+            <a:schemeClr val="accent1"/>
+          </a:fillRef>
+          <a:effectRef idx="2">
+            <a:schemeClr val="accent1"/>
+          </a:effectRef>
+          <a:fontRef idx="minor">
+            <a:schemeClr val="lt1"/>
+          </a:fontRef>
+        </p:style>
+        <p:txBody>
+          <a:bodyPr rtlCol="0" anchor="ctr"/>
+          <a:lstStyle/>
+          <a:p>
+            <a:pPr algn="ctr"/>
+          </a:p>
+        </p:txBody>
+      </p:sp>
+      <p:sp>
+        <p:nvSpPr>
+          <p:cNvPr id="27" name="TextBox 26"/>
+          <p:cNvSpPr txBox="1"/>
+          <p:nvPr/>
+        </p:nvSpPr>
+        <p:spPr>
+          <a:xfrm>
+            <a:off x="7315200" y="3813047"/>
+            <a:ext cx="3200400" cy="457200"/>
+          </a:xfrm>
+          <a:prstGeom prst="rect">
+            <a:avLst/>
+          </a:prstGeom>
+          <a:noFill/>
+        </p:spPr>
+        <p:txBody>
+          <a:bodyPr wrap="none" anchor="ctr">
+            <a:spAutoFit/>
+          </a:bodyPr>
+          <a:lstStyle/>
+          <a:p>
+            <a:pPr algn="l">
+              <a:spcAft>
+                <a:spcPts val="400"/>
+              </a:spcAft>
+            </a:pPr>
+            <a:r>
+              <a:rPr sz="1100" b="0" i="0">
+                <a:solidFill>
+                  <a:srgbClr val="595959"/>
+                </a:solidFill>
+                <a:latin typeface="Calibri"/>
+              </a:rPr>
+              <a:t>Reserve — 250-gal min vs shelf life</a:t>
+            </a:r>
+          </a:p>
+        </p:txBody>
+      </p:sp>
+      <p:sp>
+        <p:nvSpPr>
+          <p:cNvPr id="28" name="Rectangle 27"/>
+          <p:cNvSpPr/>
+          <p:nvPr/>
+        </p:nvSpPr>
+        <p:spPr>
+          <a:xfrm>
+            <a:off x="10607040" y="3758183"/>
+            <a:ext cx="1005840" cy="566928"/>
+          </a:xfrm>
+          <a:prstGeom prst="rect">
+            <a:avLst/>
+          </a:prstGeom>
+          <a:solidFill>
+            <a:srgbClr val="9C7706"/>
+          </a:solidFill>
+          <a:ln>
+            <a:noFill/>
+          </a:ln>
+          <a:effectLst/>
+        </p:spPr>
+        <p:style>
+          <a:lnRef idx="1">
+            <a:schemeClr val="accent1"/>
+          </a:lnRef>
+          <a:fillRef idx="3">
+            <a:schemeClr val="accent1"/>
+          </a:fillRef>
+          <a:effectRef idx="2">
+            <a:schemeClr val="accent1"/>
+          </a:effectRef>
+          <a:fontRef idx="minor">
+            <a:schemeClr val="lt1"/>
+          </a:fontRef>
+        </p:style>
+        <p:txBody>
+          <a:bodyPr rtlCol="0" anchor="ctr"/>
+          <a:lstStyle/>
+          <a:p>
+            <a:pPr algn="ctr"/>
+          </a:p>
+        </p:txBody>
+      </p:sp>
+      <p:sp>
+        <p:nvSpPr>
+          <p:cNvPr id="29" name="TextBox 28"/>
+          <p:cNvSpPr txBox="1"/>
+          <p:nvPr/>
+        </p:nvSpPr>
+        <p:spPr>
+          <a:xfrm>
+            <a:off x="10607040" y="3813047"/>
+            <a:ext cx="1005840" cy="457200"/>
+          </a:xfrm>
+          <a:prstGeom prst="rect">
+            <a:avLst/>
+          </a:prstGeom>
+          <a:noFill/>
+        </p:spPr>
+        <p:txBody>
+          <a:bodyPr wrap="none" anchor="ctr">
+            <a:spAutoFit/>
+          </a:bodyPr>
+          <a:lstStyle/>
+          <a:p>
+            <a:pPr algn="ctr">
+              <a:spcAft>
+                <a:spcPts val="400"/>
+              </a:spcAft>
+            </a:pPr>
+            <a:r>
+              <a:rPr sz="1100" b="1" i="0">
+                <a:solidFill>
+                  <a:srgbClr val="FFFFFF"/>
+                </a:solidFill>
+                <a:latin typeface="Calibri"/>
+              </a:rPr>
+              <a:t>Confirm</a:t>
+            </a:r>
+          </a:p>
+        </p:txBody>
+      </p:sp>
+      <p:sp>
+        <p:nvSpPr>
+          <p:cNvPr id="30" name="Rectangle 29"/>
+          <p:cNvSpPr/>
+          <p:nvPr/>
+        </p:nvSpPr>
+        <p:spPr>
+          <a:xfrm>
+            <a:off x="548640" y="4416551"/>
+            <a:ext cx="6583680" cy="566928"/>
+          </a:xfrm>
+          <a:prstGeom prst="rect">
+            <a:avLst/>
+          </a:prstGeom>
+          <a:solidFill>
+            <a:srgbClr val="EEF3FA"/>
+          </a:solidFill>
+          <a:ln>
+            <a:noFill/>
+          </a:ln>
+          <a:effectLst/>
+        </p:spPr>
+        <p:style>
+          <a:lnRef idx="1">
+            <a:schemeClr val="accent1"/>
+          </a:lnRef>
+          <a:fillRef idx="3">
+            <a:schemeClr val="accent1"/>
+          </a:fillRef>
+          <a:effectRef idx="2">
+            <a:schemeClr val="accent1"/>
+          </a:effectRef>
+          <a:fontRef idx="minor">
+            <a:schemeClr val="lt1"/>
+          </a:fontRef>
+        </p:style>
+        <p:txBody>
+          <a:bodyPr rtlCol="0" anchor="ctr"/>
+          <a:lstStyle/>
+          <a:p>
+            <a:pPr algn="ctr"/>
+          </a:p>
+        </p:txBody>
+      </p:sp>
+      <p:sp>
+        <p:nvSpPr>
+          <p:cNvPr id="31" name="TextBox 30"/>
+          <p:cNvSpPr txBox="1"/>
+          <p:nvPr/>
+        </p:nvSpPr>
+        <p:spPr>
+          <a:xfrm>
+            <a:off x="685800" y="4471415"/>
+            <a:ext cx="6400800" cy="457200"/>
+          </a:xfrm>
+          <a:prstGeom prst="rect">
+            <a:avLst/>
+          </a:prstGeom>
+          <a:noFill/>
+        </p:spPr>
+        <p:txBody>
+          <a:bodyPr wrap="none" anchor="ctr">
+            <a:spAutoFit/>
+          </a:bodyPr>
+          <a:lstStyle/>
+          <a:p>
+            <a:pPr algn="l">
+              <a:spcAft>
+                <a:spcPts val="400"/>
+              </a:spcAft>
+            </a:pPr>
+            <a:r>
+              <a:rPr sz="1250" b="1" i="0">
+                <a:solidFill>
+                  <a:srgbClr val="1F4E78"/>
+                </a:solidFill>
+                <a:latin typeface="Calibri"/>
+              </a:rPr>
+              <a:t>ArroChem — Mt. Holly, NC</a:t>
+            </a:r>
+          </a:p>
+        </p:txBody>
+      </p:sp>
+      <p:sp>
+        <p:nvSpPr>
+          <p:cNvPr id="32" name="Rectangle 31"/>
+          <p:cNvSpPr/>
+          <p:nvPr/>
+        </p:nvSpPr>
+        <p:spPr>
+          <a:xfrm>
+            <a:off x="7223760" y="4416551"/>
+            <a:ext cx="3291840" cy="566928"/>
+          </a:xfrm>
+          <a:prstGeom prst="rect">
+            <a:avLst/>
+          </a:prstGeom>
+          <a:solidFill>
+            <a:srgbClr val="EEF3FA"/>
+          </a:solidFill>
+          <a:ln>
+            <a:noFill/>
+          </a:ln>
+          <a:effectLst/>
+        </p:spPr>
+        <p:style>
+          <a:lnRef idx="1">
+            <a:schemeClr val="accent1"/>
+          </a:lnRef>
+          <a:fillRef idx="3">
+            <a:schemeClr val="accent1"/>
+          </a:fillRef>
+          <a:effectRef idx="2">
+            <a:schemeClr val="accent1"/>
+          </a:effectRef>
+          <a:fontRef idx="minor">
+            <a:schemeClr val="lt1"/>
+          </a:fontRef>
+        </p:style>
+        <p:txBody>
+          <a:bodyPr rtlCol="0" anchor="ctr"/>
+          <a:lstStyle/>
+          <a:p>
+            <a:pPr algn="ctr"/>
+          </a:p>
+        </p:txBody>
+      </p:sp>
+      <p:sp>
+        <p:nvSpPr>
+          <p:cNvPr id="33" name="TextBox 32"/>
+          <p:cNvSpPr txBox="1"/>
+          <p:nvPr/>
+        </p:nvSpPr>
+        <p:spPr>
+          <a:xfrm>
+            <a:off x="7315200" y="4471415"/>
+            <a:ext cx="3200400" cy="457200"/>
+          </a:xfrm>
+          <a:prstGeom prst="rect">
+            <a:avLst/>
+          </a:prstGeom>
+          <a:noFill/>
+        </p:spPr>
+        <p:txBody>
+          <a:bodyPr wrap="none" anchor="ctr">
+            <a:spAutoFit/>
+          </a:bodyPr>
+          <a:lstStyle/>
+          <a:p>
+            <a:pPr algn="l">
+              <a:spcAft>
+                <a:spcPts val="400"/>
+              </a:spcAft>
+            </a:pPr>
+            <a:r>
+              <a:rPr sz="1100" b="0" i="0">
+                <a:solidFill>
+                  <a:srgbClr val="595959"/>
+                </a:solidFill>
+                <a:latin typeface="Calibri"/>
+              </a:rPr>
+              <a:t>ELIMINATED — 85 °C ceiling</a:t>
+            </a:r>
+          </a:p>
+        </p:txBody>
+      </p:sp>
+      <p:sp>
+        <p:nvSpPr>
+          <p:cNvPr id="34" name="Rectangle 33"/>
+          <p:cNvSpPr/>
+          <p:nvPr/>
+        </p:nvSpPr>
+        <p:spPr>
+          <a:xfrm>
+            <a:off x="10607040" y="4416551"/>
+            <a:ext cx="1005840" cy="566928"/>
+          </a:xfrm>
+          <a:prstGeom prst="rect">
+            <a:avLst/>
+          </a:prstGeom>
+          <a:solidFill>
+            <a:srgbClr val="C00000"/>
+          </a:solidFill>
+          <a:ln>
+            <a:noFill/>
+          </a:ln>
+          <a:effectLst/>
+        </p:spPr>
+        <p:style>
+          <a:lnRef idx="1">
+            <a:schemeClr val="accent1"/>
+          </a:lnRef>
+          <a:fillRef idx="3">
+            <a:schemeClr val="accent1"/>
+          </a:fillRef>
+          <a:effectRef idx="2">
+            <a:schemeClr val="accent1"/>
+          </a:effectRef>
+          <a:fontRef idx="minor">
+            <a:schemeClr val="lt1"/>
+          </a:fontRef>
+        </p:style>
+        <p:txBody>
+          <a:bodyPr rtlCol="0" anchor="ctr"/>
+          <a:lstStyle/>
+          <a:p>
+            <a:pPr algn="ctr"/>
+          </a:p>
+        </p:txBody>
+      </p:sp>
+      <p:sp>
+        <p:nvSpPr>
+          <p:cNvPr id="35" name="TextBox 34"/>
+          <p:cNvSpPr txBox="1"/>
+          <p:nvPr/>
+        </p:nvSpPr>
+        <p:spPr>
+          <a:xfrm>
+            <a:off x="10607040" y="4471415"/>
+            <a:ext cx="1005840" cy="457200"/>
+          </a:xfrm>
+          <a:prstGeom prst="rect">
+            <a:avLst/>
+          </a:prstGeom>
+          <a:noFill/>
+        </p:spPr>
+        <p:txBody>
+          <a:bodyPr wrap="none" anchor="ctr">
+            <a:spAutoFit/>
+          </a:bodyPr>
+          <a:lstStyle/>
+          <a:p>
+            <a:pPr algn="ctr">
+              <a:spcAft>
+                <a:spcPts val="400"/>
+              </a:spcAft>
+            </a:pPr>
+            <a:r>
+              <a:rPr sz="1100" b="1" i="0">
+                <a:solidFill>
+                  <a:srgbClr val="FFFFFF"/>
+                </a:solidFill>
+                <a:latin typeface="Calibri"/>
+              </a:rPr>
+              <a:t>NO</a:t>
+            </a:r>
+          </a:p>
+        </p:txBody>
+      </p:sp>
+      <p:sp>
+        <p:nvSpPr>
+          <p:cNvPr id="36" name="Rectangle 35"/>
+          <p:cNvSpPr/>
+          <p:nvPr/>
+        </p:nvSpPr>
+        <p:spPr>
+          <a:xfrm>
+            <a:off x="548640" y="5074919"/>
+            <a:ext cx="6583680" cy="566928"/>
+          </a:xfrm>
+          <a:prstGeom prst="rect">
+            <a:avLst/>
+          </a:prstGeom>
+          <a:solidFill>
+            <a:srgbClr val="EEF3FA"/>
+          </a:solidFill>
+          <a:ln>
+            <a:noFill/>
+          </a:ln>
+          <a:effectLst/>
+        </p:spPr>
+        <p:style>
+          <a:lnRef idx="1">
+            <a:schemeClr val="accent1"/>
+          </a:lnRef>
+          <a:fillRef idx="3">
+            <a:schemeClr val="accent1"/>
+          </a:fillRef>
+          <a:effectRef idx="2">
+            <a:schemeClr val="accent1"/>
+          </a:effectRef>
+          <a:fontRef idx="minor">
+            <a:schemeClr val="lt1"/>
+          </a:fontRef>
+        </p:style>
+        <p:txBody>
+          <a:bodyPr rtlCol="0" anchor="ctr"/>
+          <a:lstStyle/>
+          <a:p>
+            <a:pPr algn="ctr"/>
+          </a:p>
+        </p:txBody>
+      </p:sp>
+      <p:sp>
+        <p:nvSpPr>
+          <p:cNvPr id="37" name="TextBox 36"/>
+          <p:cNvSpPr txBox="1"/>
+          <p:nvPr/>
+        </p:nvSpPr>
+        <p:spPr>
+          <a:xfrm>
+            <a:off x="685800" y="5129783"/>
+            <a:ext cx="6400800" cy="457200"/>
+          </a:xfrm>
+          <a:prstGeom prst="rect">
+            <a:avLst/>
+          </a:prstGeom>
+          <a:noFill/>
+        </p:spPr>
+        <p:txBody>
+          <a:bodyPr wrap="none" anchor="ctr">
+            <a:spAutoFit/>
+          </a:bodyPr>
+          <a:lstStyle/>
+          <a:p>
+            <a:pPr algn="l">
+              <a:spcAft>
+                <a:spcPts val="400"/>
+              </a:spcAft>
+            </a:pPr>
+            <a:r>
+              <a:rPr sz="1250" b="1" i="0">
+                <a:solidFill>
+                  <a:srgbClr val="1F4E78"/>
+                </a:solidFill>
+                <a:latin typeface="Calibri"/>
+              </a:rPr>
+              <a:t>ILC Dover — Frederica, DE</a:t>
+            </a:r>
+          </a:p>
+        </p:txBody>
+      </p:sp>
+      <p:sp>
+        <p:nvSpPr>
+          <p:cNvPr id="38" name="Rectangle 37"/>
+          <p:cNvSpPr/>
+          <p:nvPr/>
+        </p:nvSpPr>
+        <p:spPr>
+          <a:xfrm>
+            <a:off x="7223760" y="5074919"/>
+            <a:ext cx="3291840" cy="566928"/>
+          </a:xfrm>
+          <a:prstGeom prst="rect">
+            <a:avLst/>
+          </a:prstGeom>
+          <a:solidFill>
+            <a:srgbClr val="EEF3FA"/>
+          </a:solidFill>
+          <a:ln>
+            <a:noFill/>
+          </a:ln>
+          <a:effectLst/>
+        </p:spPr>
+        <p:style>
+          <a:lnRef idx="1">
+            <a:schemeClr val="accent1"/>
+          </a:lnRef>
+          <a:fillRef idx="3">
+            <a:schemeClr val="accent1"/>
+          </a:fillRef>
+          <a:effectRef idx="2">
+            <a:schemeClr val="accent1"/>
+          </a:effectRef>
+          <a:fontRef idx="minor">
+            <a:schemeClr val="lt1"/>
+          </a:fontRef>
+        </p:style>
+        <p:txBody>
+          <a:bodyPr rtlCol="0" anchor="ctr"/>
+          <a:lstStyle/>
+          <a:p>
+            <a:pPr algn="ctr"/>
+          </a:p>
+        </p:txBody>
+      </p:sp>
+      <p:sp>
+        <p:nvSpPr>
+          <p:cNvPr id="39" name="TextBox 38"/>
+          <p:cNvSpPr txBox="1"/>
+          <p:nvPr/>
+        </p:nvSpPr>
+        <p:spPr>
+          <a:xfrm>
+            <a:off x="7315200" y="5129783"/>
+            <a:ext cx="3200400" cy="457200"/>
+          </a:xfrm>
+          <a:prstGeom prst="rect">
+            <a:avLst/>
+          </a:prstGeom>
+          <a:noFill/>
+        </p:spPr>
+        <p:txBody>
+          <a:bodyPr wrap="none" anchor="ctr">
+            <a:spAutoFit/>
+          </a:bodyPr>
+          <a:lstStyle/>
+          <a:p>
+            <a:pPr algn="l">
+              <a:spcAft>
+                <a:spcPts val="400"/>
+              </a:spcAft>
+            </a:pPr>
+            <a:r>
+              <a:rPr sz="1100" b="0" i="0">
+                <a:solidFill>
+                  <a:srgbClr val="595959"/>
+                </a:solidFill>
+                <a:latin typeface="Calibri"/>
+              </a:rPr>
+              <a:t>ELIMINATED — wrong category</a:t>
+            </a:r>
+          </a:p>
+        </p:txBody>
+      </p:sp>
+      <p:sp>
+        <p:nvSpPr>
+          <p:cNvPr id="40" name="Rectangle 39"/>
+          <p:cNvSpPr/>
+          <p:nvPr/>
+        </p:nvSpPr>
+        <p:spPr>
+          <a:xfrm>
+            <a:off x="10607040" y="5074919"/>
+            <a:ext cx="1005840" cy="566928"/>
+          </a:xfrm>
+          <a:prstGeom prst="rect">
+            <a:avLst/>
+          </a:prstGeom>
+          <a:solidFill>
+            <a:srgbClr val="C00000"/>
+          </a:solidFill>
+          <a:ln>
+            <a:noFill/>
+          </a:ln>
+          <a:effectLst/>
+        </p:spPr>
+        <p:style>
+          <a:lnRef idx="1">
+            <a:schemeClr val="accent1"/>
+          </a:lnRef>
+          <a:fillRef idx="3">
+            <a:schemeClr val="accent1"/>
+          </a:fillRef>
+          <a:effectRef idx="2">
+            <a:schemeClr val="accent1"/>
+          </a:effectRef>
+          <a:fontRef idx="minor">
+            <a:schemeClr val="lt1"/>
+          </a:fontRef>
+        </p:style>
+        <p:txBody>
+          <a:bodyPr rtlCol="0" anchor="ctr"/>
+          <a:lstStyle/>
+          <a:p>
+            <a:pPr algn="ctr"/>
+          </a:p>
+        </p:txBody>
+      </p:sp>
+      <p:sp>
+        <p:nvSpPr>
+          <p:cNvPr id="41" name="TextBox 40"/>
+          <p:cNvSpPr txBox="1"/>
+          <p:nvPr/>
+        </p:nvSpPr>
+        <p:spPr>
+          <a:xfrm>
+            <a:off x="10607040" y="5129783"/>
+            <a:ext cx="1005840" cy="457200"/>
+          </a:xfrm>
+          <a:prstGeom prst="rect">
+            <a:avLst/>
+          </a:prstGeom>
+          <a:noFill/>
+        </p:spPr>
+        <p:txBody>
+          <a:bodyPr wrap="none" anchor="ctr">
+            <a:spAutoFit/>
+          </a:bodyPr>
+          <a:lstStyle/>
+          <a:p>
+            <a:pPr algn="ctr">
+              <a:spcAft>
+                <a:spcPts val="400"/>
+              </a:spcAft>
+            </a:pPr>
+            <a:r>
+              <a:rPr sz="1100" b="1" i="0">
+                <a:solidFill>
+                  <a:srgbClr val="FFFFFF"/>
+                </a:solidFill>
+                <a:latin typeface="Calibri"/>
+              </a:rPr>
+              <a:t>NO</a:t>
+            </a:r>
+          </a:p>
+        </p:txBody>
+      </p:sp>
+      <p:sp>
+        <p:nvSpPr>
+          <p:cNvPr id="42" name="TextBox 41"/>
+          <p:cNvSpPr txBox="1"/>
+          <p:nvPr/>
+        </p:nvSpPr>
+        <p:spPr>
+          <a:xfrm>
+            <a:off x="548640" y="5943600"/>
+            <a:ext cx="11064240" cy="731520"/>
           </a:xfrm>
           <a:prstGeom prst="rect">
             <a:avLst/>
@@ -8218,101 +10602,17 @@
           <a:p>
             <a:pPr algn="l">
               <a:spcAft>
-                <a:spcPts val="900"/>
-              </a:spcAft>
-            </a:pPr>
-            <a:r>
-              <a:rPr b="1" sz="1400">
-                <a:solidFill>
-                  <a:srgbClr val="1F4E78"/>
-                </a:solidFill>
-                <a:latin typeface="Calibri"/>
-              </a:rPr>
-              <a:t>• Sell the relationship, not the volume </a:t>
-            </a:r>
-            <a:r>
-              <a:rPr sz="1400">
+                <a:spcPts val="400"/>
+              </a:spcAft>
+            </a:pPr>
+            <a:r>
+              <a:rPr sz="1100" b="0" i="1">
                 <a:solidFill>
                   <a:srgbClr val="595959"/>
                 </a:solidFill>
                 <a:latin typeface="Calibri"/>
               </a:rPr>
-              <a:t>— qualified, recurring, blue-chip, low-touch, room to grow.</a:t>
-            </a:r>
-          </a:p>
-          <a:p>
-            <a:pPr algn="l">
-              <a:spcAft>
-                <a:spcPts val="900"/>
-              </a:spcAft>
-            </a:pPr>
-            <a:r>
-              <a:rPr b="1" sz="1400">
-                <a:solidFill>
-                  <a:srgbClr val="1F4E78"/>
-                </a:solidFill>
-                <a:latin typeface="Calibri"/>
-              </a:rPr>
-              <a:t>• Quote per drum as a recurring rotation </a:t>
-            </a:r>
-            <a:r>
-              <a:rPr sz="1400">
-                <a:solidFill>
-                  <a:srgbClr val="595959"/>
-                </a:solidFill>
-                <a:latin typeface="Calibri"/>
-              </a:rPr>
-              <a:t>— avoid the small-annual-number anchor that triggers nuisance pricing.</a:t>
-            </a:r>
-          </a:p>
-          <a:p>
-            <a:pPr algn="l">
-              <a:spcAft>
-                <a:spcPts val="900"/>
-              </a:spcAft>
-            </a:pPr>
-            <a:r>
-              <a:rPr b="1" sz="1400">
-                <a:solidFill>
-                  <a:srgbClr val="1F4E78"/>
-                </a:solidFill>
-                <a:latin typeface="Calibri"/>
-              </a:rPr>
-              <a:t>• Use the Intuitive name for credibility </a:t>
-            </a:r>
-            <a:r>
-              <a:rPr sz="1400">
-                <a:solidFill>
-                  <a:srgbClr val="595959"/>
-                </a:solidFill>
-                <a:latin typeface="Calibri"/>
-              </a:rPr>
-              <a:t>— but set volume expectations at the division level so quotes stay realistic.</a:t>
-            </a:r>
-          </a:p>
-          <a:p>
-            <a:pPr algn="l">
-              <a:spcAft>
-                <a:spcPts val="900"/>
-              </a:spcAft>
-            </a:pPr>
-            <a:r>
-              <a:rPr b="1" sz="1400">
-                <a:solidFill>
-                  <a:srgbClr val="1F4E78"/>
-                </a:solidFill>
-                <a:latin typeface="Calibri"/>
-              </a:rPr>
-              <a:t>• Advance CJB as front-runner; keep APV in genuine competition </a:t>
-            </a:r>
-            <a:r>
-              <a:rPr sz="1400">
-                <a:solidFill>
-                  <a:srgbClr val="595959"/>
-                </a:solidFill>
-                <a:latin typeface="Calibri"/>
-              </a:rPr>
-              <a:t>— not as a courtesy.</a:t>
+              <a:t>Dropped (too large / MOQ): Goulston, 3V Sigma, Royal (220-gal MOQ), Columbia. Resin producers (Sekisui/Kuraray) won't sell direct at this volume.</a:t>
             </a:r>
           </a:p>
         </p:txBody>
@@ -8413,7 +10713,7 @@
                 </a:solidFill>
                 <a:latin typeface="Calibri"/>
               </a:rPr>
-              <a:t>Quality &amp; Regulatory Framework</a:t>
+              <a:t>Why We Are Advancing APV and CJB</a:t>
             </a:r>
           </a:p>
         </p:txBody>
@@ -8465,8 +10765,8 @@
         </p:nvSpPr>
         <p:spPr>
           <a:xfrm>
-            <a:off x="548640" y="1280160"/>
-            <a:ext cx="11064240" cy="2926080"/>
+            <a:off x="548640" y="1051560"/>
+            <a:ext cx="11064240" cy="548640"/>
           </a:xfrm>
           <a:prstGeom prst="rect">
             <a:avLst/>
@@ -8481,101 +10781,608 @@
           <a:p>
             <a:pPr algn="l">
               <a:spcAft>
-                <a:spcPts val="1200"/>
-              </a:spcAft>
-            </a:pPr>
-            <a:r>
-              <a:rPr b="1" sz="1500">
+                <a:spcPts val="400"/>
+              </a:spcAft>
+            </a:pPr>
+            <a:r>
+              <a:rPr sz="1500" b="1" i="0">
                 <a:solidFill>
                   <a:srgbClr val="1F4E78"/>
                 </a:solidFill>
                 <a:latin typeface="Calibri"/>
               </a:rPr>
-              <a:t>• FDA QMSR in force (2026-02-02) </a:t>
-            </a:r>
-            <a:r>
-              <a:rPr sz="1500">
+              <a:t>They are the only two that clear ALL three conditions that matter for this account:</a:t>
+            </a:r>
+          </a:p>
+        </p:txBody>
+      </p:sp>
+      <p:sp>
+        <p:nvSpPr>
+          <p:cNvPr id="6" name="Rectangle 5"/>
+          <p:cNvSpPr/>
+          <p:nvPr/>
+        </p:nvSpPr>
+        <p:spPr>
+          <a:xfrm>
+            <a:off x="548640" y="1691640"/>
+            <a:ext cx="3566160" cy="1143000"/>
+          </a:xfrm>
+          <a:prstGeom prst="rect">
+            <a:avLst/>
+          </a:prstGeom>
+          <a:solidFill>
+            <a:srgbClr val="EEF3FA"/>
+          </a:solidFill>
+          <a:ln>
+            <a:noFill/>
+          </a:ln>
+          <a:effectLst/>
+        </p:spPr>
+        <p:style>
+          <a:lnRef idx="1">
+            <a:schemeClr val="accent1"/>
+          </a:lnRef>
+          <a:fillRef idx="3">
+            <a:schemeClr val="accent1"/>
+          </a:fillRef>
+          <a:effectRef idx="2">
+            <a:schemeClr val="accent1"/>
+          </a:effectRef>
+          <a:fontRef idx="minor">
+            <a:schemeClr val="lt1"/>
+          </a:fontRef>
+        </p:style>
+        <p:txBody>
+          <a:bodyPr rtlCol="0" anchor="ctr"/>
+          <a:lstStyle/>
+          <a:p>
+            <a:pPr algn="ctr"/>
+          </a:p>
+        </p:txBody>
+      </p:sp>
+      <p:sp>
+        <p:nvSpPr>
+          <p:cNvPr id="7" name="TextBox 6"/>
+          <p:cNvSpPr txBox="1"/>
+          <p:nvPr/>
+        </p:nvSpPr>
+        <p:spPr>
+          <a:xfrm>
+            <a:off x="640080" y="1828800"/>
+            <a:ext cx="3383279" cy="868680"/>
+          </a:xfrm>
+          <a:prstGeom prst="rect">
+            <a:avLst/>
+          </a:prstGeom>
+          <a:noFill/>
+        </p:spPr>
+        <p:txBody>
+          <a:bodyPr wrap="square" anchor="ctr">
+            <a:spAutoFit/>
+          </a:bodyPr>
+          <a:lstStyle/>
+          <a:p>
+            <a:pPr algn="ctr">
+              <a:spcAft>
+                <a:spcPts val="200"/>
+              </a:spcAft>
+            </a:pPr>
+            <a:r>
+              <a:rPr sz="2400" b="1" i="0">
+                <a:solidFill>
+                  <a:srgbClr val="1F4E78"/>
+                </a:solidFill>
+                <a:latin typeface="Calibri"/>
+              </a:rPr>
+              <a:t>Capability</a:t>
+            </a:r>
+          </a:p>
+          <a:p>
+            <a:pPr algn="ctr">
+              <a:spcAft>
+                <a:spcPts val="400"/>
+              </a:spcAft>
+            </a:pPr>
+            <a:r>
+              <a:rPr sz="1100" b="0" i="0">
                 <a:solidFill>
                   <a:srgbClr val="595959"/>
                 </a:solidFill>
                 <a:latin typeface="Calibri"/>
               </a:rPr>
-              <a:t>— incorporates ISO 13485:2016 by reference. Supplier controls follow ISO 13485 §7.4 (Purchasing), not the legacy 21 CFR 820.50.</a:t>
-            </a:r>
-          </a:p>
+              <a:t>Can hold the 90–95 °C cook (the disqualifier for others)</a:t>
+            </a:r>
+          </a:p>
+        </p:txBody>
+      </p:sp>
+      <p:sp>
+        <p:nvSpPr>
+          <p:cNvPr id="8" name="Rectangle 7"/>
+          <p:cNvSpPr/>
+          <p:nvPr/>
+        </p:nvSpPr>
+        <p:spPr>
+          <a:xfrm>
+            <a:off x="4297680" y="1691640"/>
+            <a:ext cx="3566160" cy="1143000"/>
+          </a:xfrm>
+          <a:prstGeom prst="rect">
+            <a:avLst/>
+          </a:prstGeom>
+          <a:solidFill>
+            <a:srgbClr val="EEF3FA"/>
+          </a:solidFill>
+          <a:ln>
+            <a:noFill/>
+          </a:ln>
+          <a:effectLst/>
+        </p:spPr>
+        <p:style>
+          <a:lnRef idx="1">
+            <a:schemeClr val="accent1"/>
+          </a:lnRef>
+          <a:fillRef idx="3">
+            <a:schemeClr val="accent1"/>
+          </a:fillRef>
+          <a:effectRef idx="2">
+            <a:schemeClr val="accent1"/>
+          </a:effectRef>
+          <a:fontRef idx="minor">
+            <a:schemeClr val="lt1"/>
+          </a:fontRef>
+        </p:style>
+        <p:txBody>
+          <a:bodyPr rtlCol="0" anchor="ctr"/>
+          <a:lstStyle/>
+          <a:p>
+            <a:pPr algn="ctr"/>
+          </a:p>
+        </p:txBody>
+      </p:sp>
+      <p:sp>
+        <p:nvSpPr>
+          <p:cNvPr id="9" name="TextBox 8"/>
+          <p:cNvSpPr txBox="1"/>
+          <p:nvPr/>
+        </p:nvSpPr>
+        <p:spPr>
+          <a:xfrm>
+            <a:off x="4389120" y="1828800"/>
+            <a:ext cx="3383279" cy="868680"/>
+          </a:xfrm>
+          <a:prstGeom prst="rect">
+            <a:avLst/>
+          </a:prstGeom>
+          <a:noFill/>
+        </p:spPr>
+        <p:txBody>
+          <a:bodyPr wrap="square" anchor="ctr">
+            <a:spAutoFit/>
+          </a:bodyPr>
+          <a:lstStyle/>
+          <a:p>
+            <a:pPr algn="ctr">
+              <a:spcAft>
+                <a:spcPts val="200"/>
+              </a:spcAft>
+            </a:pPr>
+            <a:r>
+              <a:rPr sz="2400" b="1" i="0">
+                <a:solidFill>
+                  <a:srgbClr val="1F4E78"/>
+                </a:solidFill>
+                <a:latin typeface="Calibri"/>
+              </a:rPr>
+              <a:t>Batch fit</a:t>
+            </a:r>
+          </a:p>
+          <a:p>
+            <a:pPr algn="ctr">
+              <a:spcAft>
+                <a:spcPts val="400"/>
+              </a:spcAft>
+            </a:pPr>
+            <a:r>
+              <a:rPr sz="1100" b="0" i="0">
+                <a:solidFill>
+                  <a:srgbClr val="595959"/>
+                </a:solidFill>
+                <a:latin typeface="Calibri"/>
+              </a:rPr>
+              <a:t>Small batches — right-sized for ~1 drum/wk</a:t>
+            </a:r>
+          </a:p>
+        </p:txBody>
+      </p:sp>
+      <p:sp>
+        <p:nvSpPr>
+          <p:cNvPr id="10" name="Rectangle 9"/>
+          <p:cNvSpPr/>
+          <p:nvPr/>
+        </p:nvSpPr>
+        <p:spPr>
+          <a:xfrm>
+            <a:off x="8046720" y="1691640"/>
+            <a:ext cx="3566160" cy="1143000"/>
+          </a:xfrm>
+          <a:prstGeom prst="rect">
+            <a:avLst/>
+          </a:prstGeom>
+          <a:solidFill>
+            <a:srgbClr val="EEF3FA"/>
+          </a:solidFill>
+          <a:ln>
+            <a:noFill/>
+          </a:ln>
+          <a:effectLst/>
+        </p:spPr>
+        <p:style>
+          <a:lnRef idx="1">
+            <a:schemeClr val="accent1"/>
+          </a:lnRef>
+          <a:fillRef idx="3">
+            <a:schemeClr val="accent1"/>
+          </a:fillRef>
+          <a:effectRef idx="2">
+            <a:schemeClr val="accent1"/>
+          </a:effectRef>
+          <a:fontRef idx="minor">
+            <a:schemeClr val="lt1"/>
+          </a:fontRef>
+        </p:style>
+        <p:txBody>
+          <a:bodyPr rtlCol="0" anchor="ctr"/>
+          <a:lstStyle/>
+          <a:p>
+            <a:pPr algn="ctr"/>
+          </a:p>
+        </p:txBody>
+      </p:sp>
+      <p:sp>
+        <p:nvSpPr>
+          <p:cNvPr id="11" name="TextBox 10"/>
+          <p:cNvSpPr txBox="1"/>
+          <p:nvPr/>
+        </p:nvSpPr>
+        <p:spPr>
+          <a:xfrm>
+            <a:off x="8138160" y="1828800"/>
+            <a:ext cx="3383279" cy="868680"/>
+          </a:xfrm>
+          <a:prstGeom prst="rect">
+            <a:avLst/>
+          </a:prstGeom>
+          <a:noFill/>
+        </p:spPr>
+        <p:txBody>
+          <a:bodyPr wrap="square" anchor="ctr">
+            <a:spAutoFit/>
+          </a:bodyPr>
+          <a:lstStyle/>
+          <a:p>
+            <a:pPr algn="ctr">
+              <a:spcAft>
+                <a:spcPts val="200"/>
+              </a:spcAft>
+            </a:pPr>
+            <a:r>
+              <a:rPr sz="2400" b="1" i="0">
+                <a:solidFill>
+                  <a:srgbClr val="1F4E78"/>
+                </a:solidFill>
+                <a:latin typeface="Calibri"/>
+              </a:rPr>
+              <a:t>Willingness</a:t>
+            </a:r>
+          </a:p>
+          <a:p>
+            <a:pPr algn="ctr">
+              <a:spcAft>
+                <a:spcPts val="400"/>
+              </a:spcAft>
+            </a:pPr>
+            <a:r>
+              <a:rPr sz="1100" b="0" i="0">
+                <a:solidFill>
+                  <a:srgbClr val="595959"/>
+                </a:solidFill>
+                <a:latin typeface="Calibri"/>
+              </a:rPr>
+              <a:t>Genuinely want a low-volume account others decline</a:t>
+            </a:r>
+          </a:p>
+        </p:txBody>
+      </p:sp>
+      <p:sp>
+        <p:nvSpPr>
+          <p:cNvPr id="12" name="Rectangle 11"/>
+          <p:cNvSpPr/>
+          <p:nvPr/>
+        </p:nvSpPr>
+        <p:spPr>
+          <a:xfrm>
+            <a:off x="548640" y="3108960"/>
+            <a:ext cx="5440680" cy="3291840"/>
+          </a:xfrm>
+          <a:prstGeom prst="rect">
+            <a:avLst/>
+          </a:prstGeom>
+          <a:solidFill>
+            <a:srgbClr val="E2EFDA"/>
+          </a:solidFill>
+          <a:ln>
+            <a:noFill/>
+          </a:ln>
+          <a:effectLst/>
+        </p:spPr>
+        <p:style>
+          <a:lnRef idx="1">
+            <a:schemeClr val="accent1"/>
+          </a:lnRef>
+          <a:fillRef idx="3">
+            <a:schemeClr val="accent1"/>
+          </a:fillRef>
+          <a:effectRef idx="2">
+            <a:schemeClr val="accent1"/>
+          </a:effectRef>
+          <a:fontRef idx="minor">
+            <a:schemeClr val="lt1"/>
+          </a:fontRef>
+        </p:style>
+        <p:txBody>
+          <a:bodyPr rtlCol="0" anchor="ctr"/>
+          <a:lstStyle/>
+          <a:p>
+            <a:pPr algn="ctr"/>
+          </a:p>
+        </p:txBody>
+      </p:sp>
+      <p:sp>
+        <p:nvSpPr>
+          <p:cNvPr id="13" name="TextBox 12"/>
+          <p:cNvSpPr txBox="1"/>
+          <p:nvPr/>
+        </p:nvSpPr>
+        <p:spPr>
+          <a:xfrm>
+            <a:off x="731520" y="3246120"/>
+            <a:ext cx="5120640" cy="3108960"/>
+          </a:xfrm>
+          <a:prstGeom prst="rect">
+            <a:avLst/>
+          </a:prstGeom>
+          <a:noFill/>
+        </p:spPr>
+        <p:txBody>
+          <a:bodyPr wrap="square">
+            <a:spAutoFit/>
+          </a:bodyPr>
+          <a:lstStyle/>
           <a:p>
             <a:pPr algn="l">
               <a:spcAft>
-                <a:spcPts val="1200"/>
-              </a:spcAft>
-            </a:pPr>
-            <a:r>
-              <a:rPr b="1" sz="1500">
-                <a:solidFill>
-                  <a:srgbClr val="1F4E78"/>
-                </a:solidFill>
-                <a:latin typeface="Calibri"/>
-              </a:rPr>
-              <a:t>• Qualification </a:t>
-            </a:r>
-            <a:r>
-              <a:rPr sz="1500">
+                <a:spcPts val="500"/>
+              </a:spcAft>
+            </a:pPr>
+            <a:r>
+              <a:rPr sz="1600" b="1" i="0">
+                <a:solidFill>
+                  <a:srgbClr val="376E37"/>
+                </a:solidFill>
+                <a:latin typeface="Calibri"/>
+              </a:rPr>
+              <a:t>CJB — FRONT-RUNNER</a:t>
+            </a:r>
+          </a:p>
+          <a:p>
+            <a:pPr algn="l">
+              <a:spcAft>
+                <a:spcPts val="700"/>
+              </a:spcAft>
+            </a:pPr>
+            <a:r>
+              <a:rPr sz="1200" b="0" i="0">
                 <a:solidFill>
                   <a:srgbClr val="595959"/>
                 </a:solidFill>
                 <a:latin typeface="Calibri"/>
               </a:rPr>
-              <a:t>— risk-proportionate supplier evaluation, monitoring, re-evaluation (§7.4.1); build on GHTF/SG3/N17 methodology with a Carter's 10 Cs scorecard.</a:t>
+              <a:t>•  Gate CLEARED in interview: 90–95 °C for 45 min–1 hr, jacketed 316L, no fisheyes, cools ≤40 °C, prior HMW-PVA experience</a:t>
             </a:r>
           </a:p>
           <a:p>
             <a:pPr algn="l">
               <a:spcAft>
-                <a:spcPts val="1200"/>
-              </a:spcAft>
-            </a:pPr>
-            <a:r>
-              <a:rPr b="1" sz="1500">
-                <a:solidFill>
-                  <a:srgbClr val="1F4E78"/>
-                </a:solidFill>
-                <a:latin typeface="Calibri"/>
-              </a:rPr>
-              <a:t>• Supplier Quality Agreement </a:t>
-            </a:r>
-            <a:r>
-              <a:rPr sz="1500">
+                <a:spcPts val="700"/>
+              </a:spcAft>
+            </a:pPr>
+            <a:r>
+              <a:rPr sz="1200" b="0" i="0">
                 <a:solidFill>
                   <a:srgbClr val="595959"/>
                 </a:solidFill>
                 <a:latin typeface="Calibri"/>
               </a:rPr>
-              <a:t>— specs/acceptance, advance change-notification, right-to-audit. Connects to CJB's NDA-on-process step.</a:t>
+              <a:t>•  40-gal min / will do a single drum; lab-batch for qual; 3–4 day lead (or overnight)</a:t>
             </a:r>
           </a:p>
           <a:p>
             <a:pPr algn="l">
               <a:spcAft>
-                <a:spcPts val="1200"/>
-              </a:spcAft>
-            </a:pPr>
-            <a:r>
-              <a:rPr b="1" sz="1500">
-                <a:solidFill>
-                  <a:srgbClr val="1F4E78"/>
-                </a:solidFill>
-                <a:latin typeface="Calibri"/>
-              </a:rPr>
-              <a:t>• Classification </a:t>
-            </a:r>
-            <a:r>
-              <a:rPr sz="1500">
+                <a:spcPts val="700"/>
+              </a:spcAft>
+            </a:pPr>
+            <a:r>
+              <a:rPr sz="1200" b="0" i="0">
                 <a:solidFill>
                   <a:srgbClr val="595959"/>
                 </a:solidFill>
                 <a:latin typeface="Calibri"/>
               </a:rPr>
-              <a:t>— confirm before invoking ICH Q7 (applies only if API / drug-GMP).</a:t>
+              <a:t>•  Bonus: ex-Lonza (Proxel) formulator on staff</a:t>
+            </a:r>
+          </a:p>
+          <a:p>
+            <a:pPr algn="l">
+              <a:spcAft>
+                <a:spcPts val="700"/>
+              </a:spcAft>
+            </a:pPr>
+            <a:r>
+              <a:rPr sz="1200" b="0" i="0">
+                <a:solidFill>
+                  <a:srgbClr val="595959"/>
+                </a:solidFill>
+                <a:latin typeface="Calibri"/>
+              </a:rPr>
+              <a:t>•  Open: NDA on process (McC); firm pricing not yet quoted</a:t>
+            </a:r>
+          </a:p>
+        </p:txBody>
+      </p:sp>
+      <p:sp>
+        <p:nvSpPr>
+          <p:cNvPr id="14" name="Rectangle 13"/>
+          <p:cNvSpPr/>
+          <p:nvPr/>
+        </p:nvSpPr>
+        <p:spPr>
+          <a:xfrm>
+            <a:off x="6172200" y="3108960"/>
+            <a:ext cx="5440680" cy="3291840"/>
+          </a:xfrm>
+          <a:prstGeom prst="rect">
+            <a:avLst/>
+          </a:prstGeom>
+          <a:solidFill>
+            <a:srgbClr val="EEF3FA"/>
+          </a:solidFill>
+          <a:ln>
+            <a:noFill/>
+          </a:ln>
+          <a:effectLst/>
+        </p:spPr>
+        <p:style>
+          <a:lnRef idx="1">
+            <a:schemeClr val="accent1"/>
+          </a:lnRef>
+          <a:fillRef idx="3">
+            <a:schemeClr val="accent1"/>
+          </a:fillRef>
+          <a:effectRef idx="2">
+            <a:schemeClr val="accent1"/>
+          </a:effectRef>
+          <a:fontRef idx="minor">
+            <a:schemeClr val="lt1"/>
+          </a:fontRef>
+        </p:style>
+        <p:txBody>
+          <a:bodyPr rtlCol="0" anchor="ctr"/>
+          <a:lstStyle/>
+          <a:p>
+            <a:pPr algn="ctr"/>
+          </a:p>
+        </p:txBody>
+      </p:sp>
+      <p:sp>
+        <p:nvSpPr>
+          <p:cNvPr id="15" name="TextBox 14"/>
+          <p:cNvSpPr txBox="1"/>
+          <p:nvPr/>
+        </p:nvSpPr>
+        <p:spPr>
+          <a:xfrm>
+            <a:off x="6355080" y="3246120"/>
+            <a:ext cx="5120640" cy="3108960"/>
+          </a:xfrm>
+          <a:prstGeom prst="rect">
+            <a:avLst/>
+          </a:prstGeom>
+          <a:noFill/>
+        </p:spPr>
+        <p:txBody>
+          <a:bodyPr wrap="square">
+            <a:spAutoFit/>
+          </a:bodyPr>
+          <a:lstStyle/>
+          <a:p>
+            <a:pPr algn="l">
+              <a:spcAft>
+                <a:spcPts val="500"/>
+              </a:spcAft>
+            </a:pPr>
+            <a:r>
+              <a:rPr sz="1600" b="1" i="0">
+                <a:solidFill>
+                  <a:srgbClr val="2E75B6"/>
+                </a:solidFill>
+                <a:latin typeface="Calibri"/>
+              </a:rPr>
+              <a:t>APV — STRONG SECOND</a:t>
+            </a:r>
+          </a:p>
+          <a:p>
+            <a:pPr algn="l">
+              <a:spcAft>
+                <a:spcPts val="700"/>
+              </a:spcAft>
+            </a:pPr>
+            <a:r>
+              <a:rPr sz="1200" b="0" i="0">
+                <a:solidFill>
+                  <a:srgbClr val="595959"/>
+                </a:solidFill>
+                <a:latin typeface="Calibri"/>
+              </a:rPr>
+              <a:t>•  Engaged &amp; interested; very small batches (from 5 gal)</a:t>
+            </a:r>
+          </a:p>
+          <a:p>
+            <a:pPr algn="l">
+              <a:spcAft>
+                <a:spcPts val="700"/>
+              </a:spcAft>
+            </a:pPr>
+            <a:r>
+              <a:rPr sz="1200" b="0" i="0">
+                <a:solidFill>
+                  <a:srgbClr val="595959"/>
+                </a:solidFill>
+                <a:latin typeface="Calibri"/>
+              </a:rPr>
+              <a:t>•  Pigment-dispersion specialty (useful for our colorants); ISO 9001 / EPA</a:t>
+            </a:r>
+          </a:p>
+          <a:p>
+            <a:pPr algn="l">
+              <a:spcAft>
+                <a:spcPts val="700"/>
+              </a:spcAft>
+            </a:pPr>
+            <a:r>
+              <a:rPr sz="1200" b="0" i="0">
+                <a:solidFill>
+                  <a:srgbClr val="595959"/>
+                </a:solidFill>
+                <a:latin typeface="Calibri"/>
+              </a:rPr>
+              <a:t>•  Asked for pricing early — sizing the account economics</a:t>
+            </a:r>
+          </a:p>
+          <a:p>
+            <a:pPr algn="l">
+              <a:spcAft>
+                <a:spcPts val="700"/>
+              </a:spcAft>
+            </a:pPr>
+            <a:r>
+              <a:rPr sz="1200" b="0" i="0">
+                <a:solidFill>
+                  <a:srgbClr val="595959"/>
+                </a:solidFill>
+                <a:latin typeface="Calibri"/>
+              </a:rPr>
+              <a:t>•  Open: re-confirm 90–95 °C hold; send pricing envelope</a:t>
             </a:r>
           </a:p>
         </p:txBody>
@@ -8676,7 +11483,7 @@
                 </a:solidFill>
                 <a:latin typeface="Calibri"/>
               </a:rPr>
-              <a:t>Open Items &amp; Next Steps</a:t>
+              <a:t>Why Keep Both Warm — Low-Volume Leverage</a:t>
             </a:r>
           </a:p>
         </p:txBody>
@@ -8722,20 +11529,93 @@
       </p:sp>
       <p:sp>
         <p:nvSpPr>
-          <p:cNvPr id="5" name="Rectangle 4"/>
+          <p:cNvPr id="5" name="TextBox 4"/>
+          <p:cNvSpPr txBox="1"/>
+          <p:nvPr/>
+        </p:nvSpPr>
+        <p:spPr>
+          <a:xfrm>
+            <a:off x="548640" y="1280160"/>
+            <a:ext cx="11064240" cy="2194560"/>
+          </a:xfrm>
+          <a:prstGeom prst="rect">
+            <a:avLst/>
+          </a:prstGeom>
+          <a:noFill/>
+        </p:spPr>
+        <p:txBody>
+          <a:bodyPr wrap="square">
+            <a:spAutoFit/>
+          </a:bodyPr>
+          <a:lstStyle/>
+          <a:p>
+            <a:pPr algn="l">
+              <a:spcAft>
+                <a:spcPts val="1400"/>
+              </a:spcAft>
+            </a:pPr>
+            <a:r>
+              <a:rPr b="1" sz="1600">
+                <a:solidFill>
+                  <a:srgbClr val="1F4E78"/>
+                </a:solidFill>
+                <a:latin typeface="Calibri"/>
+              </a:rPr>
+              <a:t>• We are a small, low-attractiveness account </a:t>
+            </a:r>
+            <a:r>
+              <a:rPr sz="1600">
+                <a:solidFill>
+                  <a:srgbClr val="595959"/>
+                </a:solidFill>
+                <a:latin typeface="Calibri"/>
+              </a:rPr>
+              <a:t>(Kraljic 'bottleneck'; likely a 'nuisance' account to a blender). Our structural negotiating leverage is weak.</a:t>
+            </a:r>
+          </a:p>
+          <a:p>
+            <a:pPr algn="l">
+              <a:spcAft>
+                <a:spcPts val="1400"/>
+              </a:spcAft>
+            </a:pPr>
+            <a:r>
+              <a:rPr b="1" sz="1600">
+                <a:solidFill>
+                  <a:srgbClr val="1F4E78"/>
+                </a:solidFill>
+                <a:latin typeface="Calibri"/>
+              </a:rPr>
+              <a:t>• Two qualified, interested suppliers is the single best lever </a:t>
+            </a:r>
+            <a:r>
+              <a:rPr sz="1600">
+                <a:solidFill>
+                  <a:srgbClr val="595959"/>
+                </a:solidFill>
+                <a:latin typeface="Calibri"/>
+              </a:rPr>
+              <a:t>we have — it disciplines pricing and protects continuity without overplaying a volume we don't have.</a:t>
+            </a:r>
+          </a:p>
+        </p:txBody>
+      </p:sp>
+      <p:sp>
+        <p:nvSpPr>
+          <p:cNvPr id="6" name="Rectangle 5"/>
           <p:cNvSpPr/>
           <p:nvPr/>
         </p:nvSpPr>
         <p:spPr>
           <a:xfrm>
-            <a:off x="548640" y="1371600"/>
-            <a:ext cx="640080" cy="640080"/>
+            <a:off x="548640" y="3657600"/>
+            <a:ext cx="11064240" cy="411480"/>
           </a:xfrm>
           <a:prstGeom prst="rect">
             <a:avLst/>
           </a:prstGeom>
           <a:solidFill>
-            <a:srgbClr val="1F4E78"/>
+            <a:srgbClr val="2E75B6"/>
           </a:solidFill>
           <a:ln>
             <a:noFill/>
@@ -8766,14 +11646,14 @@
       </p:sp>
       <p:sp>
         <p:nvSpPr>
-          <p:cNvPr id="6" name="TextBox 5"/>
+          <p:cNvPr id="7" name="TextBox 6"/>
           <p:cNvSpPr txBox="1"/>
           <p:nvPr/>
         </p:nvSpPr>
         <p:spPr>
           <a:xfrm>
-            <a:off x="548640" y="1481328"/>
-            <a:ext cx="640080" cy="457200"/>
+            <a:off x="731520" y="3703320"/>
+            <a:ext cx="10789920" cy="365760"/>
           </a:xfrm>
           <a:prstGeom prst="rect">
             <a:avLst/>
@@ -8786,64 +11666,20 @@
           </a:bodyPr>
           <a:lstStyle/>
           <a:p>
-            <a:pPr algn="ctr">
+            <a:pPr algn="l">
               <a:spcAft>
                 <a:spcPts val="400"/>
               </a:spcAft>
             </a:pPr>
             <a:r>
-              <a:rPr sz="1800" b="1" i="0">
+              <a:rPr sz="1400" b="1" i="0">
                 <a:solidFill>
                   <a:srgbClr val="FFFFFF"/>
                 </a:solidFill>
                 <a:latin typeface="Calibri"/>
               </a:rPr>
-              <a:t>1</a:t>
-            </a:r>
-          </a:p>
-        </p:txBody>
-      </p:sp>
-      <p:sp>
-        <p:nvSpPr>
-          <p:cNvPr id="7" name="Rectangle 6"/>
-          <p:cNvSpPr/>
-          <p:nvPr/>
-        </p:nvSpPr>
-        <p:spPr>
-          <a:xfrm>
-            <a:off x="1280160" y="1371600"/>
-            <a:ext cx="6949440" cy="640080"/>
-          </a:xfrm>
-          <a:prstGeom prst="rect">
-            <a:avLst/>
-          </a:prstGeom>
-          <a:solidFill>
-            <a:srgbClr val="EEF3FA"/>
-          </a:solidFill>
-          <a:ln>
-            <a:noFill/>
-          </a:ln>
-          <a:effectLst/>
-        </p:spPr>
-        <p:style>
-          <a:lnRef idx="1">
-            <a:schemeClr val="accent1"/>
-          </a:lnRef>
-          <a:fillRef idx="3">
-            <a:schemeClr val="accent1"/>
-          </a:fillRef>
-          <a:effectRef idx="2">
-            <a:schemeClr val="accent1"/>
-          </a:effectRef>
-          <a:fontRef idx="minor">
-            <a:schemeClr val="lt1"/>
-          </a:fontRef>
-        </p:style>
-        <p:txBody>
-          <a:bodyPr rtlCol="0" anchor="ctr"/>
-          <a:lstStyle/>
-          <a:p>
-            <a:pPr algn="ctr"/>
+              <a:t>How we play it</a:t>
+            </a:r>
           </a:p>
         </p:txBody>
       </p:sp>
@@ -8855,8 +11691,8 @@
         </p:nvSpPr>
         <p:spPr>
           <a:xfrm>
-            <a:off x="1417320" y="1435608"/>
-            <a:ext cx="6766560" cy="548640"/>
+            <a:off x="548640" y="4206240"/>
+            <a:ext cx="11064240" cy="2377440"/>
           </a:xfrm>
           <a:prstGeom prst="rect">
             <a:avLst/>
@@ -8864,1391 +11700,108 @@
           <a:noFill/>
         </p:spPr>
         <p:txBody>
-          <a:bodyPr wrap="none" anchor="ctr">
+          <a:bodyPr wrap="square">
             <a:spAutoFit/>
           </a:bodyPr>
           <a:lstStyle/>
           <a:p>
             <a:pPr algn="l">
               <a:spcAft>
-                <a:spcPts val="400"/>
-              </a:spcAft>
-            </a:pPr>
-            <a:r>
-              <a:rPr sz="1350" b="1" i="0">
+                <a:spcPts val="900"/>
+              </a:spcAft>
+            </a:pPr>
+            <a:r>
+              <a:rPr b="1" sz="1400">
                 <a:solidFill>
                   <a:srgbClr val="1F4E78"/>
                 </a:solidFill>
                 <a:latin typeface="Calibri"/>
               </a:rPr>
-              <a:t>Pull SNP CoA history → finalize viscosity &amp; pH targets</a:t>
-            </a:r>
-          </a:p>
-        </p:txBody>
-      </p:sp>
-      <p:sp>
-        <p:nvSpPr>
-          <p:cNvPr id="9" name="Rectangle 8"/>
-          <p:cNvSpPr/>
-          <p:nvPr/>
-        </p:nvSpPr>
-        <p:spPr>
-          <a:xfrm>
-            <a:off x="8321040" y="1371600"/>
-            <a:ext cx="3291840" cy="640080"/>
-          </a:xfrm>
-          <a:prstGeom prst="rect">
-            <a:avLst/>
-          </a:prstGeom>
-          <a:solidFill>
-            <a:srgbClr val="DDEBF7"/>
-          </a:solidFill>
-          <a:ln>
-            <a:noFill/>
-          </a:ln>
-          <a:effectLst/>
-        </p:spPr>
-        <p:style>
-          <a:lnRef idx="1">
-            <a:schemeClr val="accent1"/>
-          </a:lnRef>
-          <a:fillRef idx="3">
-            <a:schemeClr val="accent1"/>
-          </a:fillRef>
-          <a:effectRef idx="2">
-            <a:schemeClr val="accent1"/>
-          </a:effectRef>
-          <a:fontRef idx="minor">
-            <a:schemeClr val="lt1"/>
-          </a:fontRef>
-        </p:style>
-        <p:txBody>
-          <a:bodyPr rtlCol="0" anchor="ctr"/>
-          <a:lstStyle/>
-          <a:p>
-            <a:pPr algn="ctr"/>
-          </a:p>
-        </p:txBody>
-      </p:sp>
-      <p:sp>
-        <p:nvSpPr>
-          <p:cNvPr id="10" name="TextBox 9"/>
-          <p:cNvSpPr txBox="1"/>
-          <p:nvPr/>
-        </p:nvSpPr>
-        <p:spPr>
-          <a:xfrm>
-            <a:off x="8412480" y="1435608"/>
-            <a:ext cx="3200400" cy="548640"/>
-          </a:xfrm>
-          <a:prstGeom prst="rect">
-            <a:avLst/>
-          </a:prstGeom>
-          <a:noFill/>
-        </p:spPr>
-        <p:txBody>
-          <a:bodyPr wrap="none" anchor="ctr">
-            <a:spAutoFit/>
-          </a:bodyPr>
-          <a:lstStyle/>
+              <a:t>• Sell the relationship, not the volume </a:t>
+            </a:r>
+            <a:r>
+              <a:rPr sz="1400">
+                <a:solidFill>
+                  <a:srgbClr val="595959"/>
+                </a:solidFill>
+                <a:latin typeface="Calibri"/>
+              </a:rPr>
+              <a:t>— qualified, recurring, blue-chip, low-touch, room to grow.</a:t>
+            </a:r>
+          </a:p>
           <a:p>
             <a:pPr algn="l">
               <a:spcAft>
-                <a:spcPts val="400"/>
-              </a:spcAft>
-            </a:pPr>
-            <a:r>
-              <a:rPr sz="1150" b="0" i="0">
+                <a:spcPts val="900"/>
+              </a:spcAft>
+            </a:pPr>
+            <a:r>
+              <a:rPr b="1" sz="1400">
+                <a:solidFill>
+                  <a:srgbClr val="1F4E78"/>
+                </a:solidFill>
+                <a:latin typeface="Calibri"/>
+              </a:rPr>
+              <a:t>• Quote per drum as a recurring rotation </a:t>
+            </a:r>
+            <a:r>
+              <a:rPr sz="1400">
                 <a:solidFill>
                   <a:srgbClr val="595959"/>
                 </a:solidFill>
                 <a:latin typeface="Calibri"/>
               </a:rPr>
-              <a:t>Highest leverage — gates any firm quote</a:t>
-            </a:r>
-          </a:p>
-        </p:txBody>
-      </p:sp>
-      <p:sp>
-        <p:nvSpPr>
-          <p:cNvPr id="11" name="Rectangle 10"/>
-          <p:cNvSpPr/>
-          <p:nvPr/>
-        </p:nvSpPr>
-        <p:spPr>
-          <a:xfrm>
-            <a:off x="548640" y="2121408"/>
-            <a:ext cx="640080" cy="640080"/>
-          </a:xfrm>
-          <a:prstGeom prst="rect">
-            <a:avLst/>
-          </a:prstGeom>
-          <a:solidFill>
-            <a:srgbClr val="1F4E78"/>
-          </a:solidFill>
-          <a:ln>
-            <a:noFill/>
-          </a:ln>
-          <a:effectLst/>
-        </p:spPr>
-        <p:style>
-          <a:lnRef idx="1">
-            <a:schemeClr val="accent1"/>
-          </a:lnRef>
-          <a:fillRef idx="3">
-            <a:schemeClr val="accent1"/>
-          </a:fillRef>
-          <a:effectRef idx="2">
-            <a:schemeClr val="accent1"/>
-          </a:effectRef>
-          <a:fontRef idx="minor">
-            <a:schemeClr val="lt1"/>
-          </a:fontRef>
-        </p:style>
-        <p:txBody>
-          <a:bodyPr rtlCol="0" anchor="ctr"/>
-          <a:lstStyle/>
-          <a:p>
-            <a:pPr algn="ctr"/>
-          </a:p>
-        </p:txBody>
-      </p:sp>
-      <p:sp>
-        <p:nvSpPr>
-          <p:cNvPr id="12" name="TextBox 11"/>
-          <p:cNvSpPr txBox="1"/>
-          <p:nvPr/>
-        </p:nvSpPr>
-        <p:spPr>
-          <a:xfrm>
-            <a:off x="548640" y="2231136"/>
-            <a:ext cx="640080" cy="457200"/>
-          </a:xfrm>
-          <a:prstGeom prst="rect">
-            <a:avLst/>
-          </a:prstGeom>
-          <a:noFill/>
-        </p:spPr>
-        <p:txBody>
-          <a:bodyPr wrap="none">
-            <a:spAutoFit/>
-          </a:bodyPr>
-          <a:lstStyle/>
-          <a:p>
-            <a:pPr algn="ctr">
-              <a:spcAft>
-                <a:spcPts val="400"/>
-              </a:spcAft>
-            </a:pPr>
-            <a:r>
-              <a:rPr sz="1800" b="1" i="0">
-                <a:solidFill>
-                  <a:srgbClr val="FFFFFF"/>
-                </a:solidFill>
-                <a:latin typeface="Calibri"/>
-              </a:rPr>
-              <a:t>2</a:t>
-            </a:r>
-          </a:p>
-        </p:txBody>
-      </p:sp>
-      <p:sp>
-        <p:nvSpPr>
-          <p:cNvPr id="13" name="Rectangle 12"/>
-          <p:cNvSpPr/>
-          <p:nvPr/>
-        </p:nvSpPr>
-        <p:spPr>
-          <a:xfrm>
-            <a:off x="1280160" y="2121408"/>
-            <a:ext cx="6949440" cy="640080"/>
-          </a:xfrm>
-          <a:prstGeom prst="rect">
-            <a:avLst/>
-          </a:prstGeom>
-          <a:solidFill>
-            <a:srgbClr val="EEF3FA"/>
-          </a:solidFill>
-          <a:ln>
-            <a:noFill/>
-          </a:ln>
-          <a:effectLst/>
-        </p:spPr>
-        <p:style>
-          <a:lnRef idx="1">
-            <a:schemeClr val="accent1"/>
-          </a:lnRef>
-          <a:fillRef idx="3">
-            <a:schemeClr val="accent1"/>
-          </a:fillRef>
-          <a:effectRef idx="2">
-            <a:schemeClr val="accent1"/>
-          </a:effectRef>
-          <a:fontRef idx="minor">
-            <a:schemeClr val="lt1"/>
-          </a:fontRef>
-        </p:style>
-        <p:txBody>
-          <a:bodyPr rtlCol="0" anchor="ctr"/>
-          <a:lstStyle/>
-          <a:p>
-            <a:pPr algn="ctr"/>
-          </a:p>
-        </p:txBody>
-      </p:sp>
-      <p:sp>
-        <p:nvSpPr>
-          <p:cNvPr id="14" name="TextBox 13"/>
-          <p:cNvSpPr txBox="1"/>
-          <p:nvPr/>
-        </p:nvSpPr>
-        <p:spPr>
-          <a:xfrm>
-            <a:off x="1417320" y="2185415"/>
-            <a:ext cx="6766560" cy="548640"/>
-          </a:xfrm>
-          <a:prstGeom prst="rect">
-            <a:avLst/>
-          </a:prstGeom>
-          <a:noFill/>
-        </p:spPr>
-        <p:txBody>
-          <a:bodyPr wrap="none" anchor="ctr">
-            <a:spAutoFit/>
-          </a:bodyPr>
-          <a:lstStyle/>
+              <a:t>— avoid the small-annual-number anchor that triggers nuisance pricing.</a:t>
+            </a:r>
+          </a:p>
           <a:p>
             <a:pPr algn="l">
               <a:spcAft>
-                <a:spcPts val="400"/>
-              </a:spcAft>
-            </a:pPr>
-            <a:r>
-              <a:rPr sz="1350" b="1" i="0">
+                <a:spcPts val="900"/>
+              </a:spcAft>
+            </a:pPr>
+            <a:r>
+              <a:rPr b="1" sz="1400">
                 <a:solidFill>
                   <a:srgbClr val="1F4E78"/>
                 </a:solidFill>
                 <a:latin typeface="Calibri"/>
               </a:rPr>
-              <a:t>CJB NDA on process</a:t>
-            </a:r>
-          </a:p>
-        </p:txBody>
-      </p:sp>
-      <p:sp>
-        <p:nvSpPr>
-          <p:cNvPr id="15" name="Rectangle 14"/>
-          <p:cNvSpPr/>
-          <p:nvPr/>
-        </p:nvSpPr>
-        <p:spPr>
-          <a:xfrm>
-            <a:off x="8321040" y="2121408"/>
-            <a:ext cx="3291840" cy="640080"/>
-          </a:xfrm>
-          <a:prstGeom prst="rect">
-            <a:avLst/>
-          </a:prstGeom>
-          <a:solidFill>
-            <a:srgbClr val="DDEBF7"/>
-          </a:solidFill>
-          <a:ln>
-            <a:noFill/>
-          </a:ln>
-          <a:effectLst/>
-        </p:spPr>
-        <p:style>
-          <a:lnRef idx="1">
-            <a:schemeClr val="accent1"/>
-          </a:lnRef>
-          <a:fillRef idx="3">
-            <a:schemeClr val="accent1"/>
-          </a:fillRef>
-          <a:effectRef idx="2">
-            <a:schemeClr val="accent1"/>
-          </a:effectRef>
-          <a:fontRef idx="minor">
-            <a:schemeClr val="lt1"/>
-          </a:fontRef>
-        </p:style>
-        <p:txBody>
-          <a:bodyPr rtlCol="0" anchor="ctr"/>
-          <a:lstStyle/>
-          <a:p>
-            <a:pPr algn="ctr"/>
-          </a:p>
-        </p:txBody>
-      </p:sp>
-      <p:sp>
-        <p:nvSpPr>
-          <p:cNvPr id="16" name="TextBox 15"/>
-          <p:cNvSpPr txBox="1"/>
-          <p:nvPr/>
-        </p:nvSpPr>
-        <p:spPr>
-          <a:xfrm>
-            <a:off x="8412480" y="2185415"/>
-            <a:ext cx="3200400" cy="548640"/>
-          </a:xfrm>
-          <a:prstGeom prst="rect">
-            <a:avLst/>
-          </a:prstGeom>
-          <a:noFill/>
-        </p:spPr>
-        <p:txBody>
-          <a:bodyPr wrap="none" anchor="ctr">
-            <a:spAutoFit/>
-          </a:bodyPr>
-          <a:lstStyle/>
+              <a:t>• Use the Intuitive name for credibility </a:t>
+            </a:r>
+            <a:r>
+              <a:rPr sz="1400">
+                <a:solidFill>
+                  <a:srgbClr val="595959"/>
+                </a:solidFill>
+                <a:latin typeface="Calibri"/>
+              </a:rPr>
+              <a:t>— but set volume expectations at the division level so quotes stay realistic.</a:t>
+            </a:r>
+          </a:p>
           <a:p>
             <a:pPr algn="l">
               <a:spcAft>
-                <a:spcPts val="400"/>
-              </a:spcAft>
-            </a:pPr>
-            <a:r>
-              <a:rPr sz="1150" b="0" i="0">
+                <a:spcPts val="900"/>
+              </a:spcAft>
+            </a:pPr>
+            <a:r>
+              <a:rPr b="1" sz="1400">
+                <a:solidFill>
+                  <a:srgbClr val="1F4E78"/>
+                </a:solidFill>
+                <a:latin typeface="Calibri"/>
+              </a:rPr>
+              <a:t>• Advance CJB as front-runner; keep APV in genuine competition </a:t>
+            </a:r>
+            <a:r>
+              <a:rPr sz="1400">
                 <a:solidFill>
                   <a:srgbClr val="595959"/>
                 </a:solidFill>
                 <a:latin typeface="Calibri"/>
               </a:rPr>
-              <a:t>In work — McC</a:t>
-            </a:r>
-          </a:p>
-        </p:txBody>
-      </p:sp>
-      <p:sp>
-        <p:nvSpPr>
-          <p:cNvPr id="17" name="Rectangle 16"/>
-          <p:cNvSpPr/>
-          <p:nvPr/>
-        </p:nvSpPr>
-        <p:spPr>
-          <a:xfrm>
-            <a:off x="548640" y="2871215"/>
-            <a:ext cx="640080" cy="640080"/>
-          </a:xfrm>
-          <a:prstGeom prst="rect">
-            <a:avLst/>
-          </a:prstGeom>
-          <a:solidFill>
-            <a:srgbClr val="1F4E78"/>
-          </a:solidFill>
-          <a:ln>
-            <a:noFill/>
-          </a:ln>
-          <a:effectLst/>
-        </p:spPr>
-        <p:style>
-          <a:lnRef idx="1">
-            <a:schemeClr val="accent1"/>
-          </a:lnRef>
-          <a:fillRef idx="3">
-            <a:schemeClr val="accent1"/>
-          </a:fillRef>
-          <a:effectRef idx="2">
-            <a:schemeClr val="accent1"/>
-          </a:effectRef>
-          <a:fontRef idx="minor">
-            <a:schemeClr val="lt1"/>
-          </a:fontRef>
-        </p:style>
-        <p:txBody>
-          <a:bodyPr rtlCol="0" anchor="ctr"/>
-          <a:lstStyle/>
-          <a:p>
-            <a:pPr algn="ctr"/>
-          </a:p>
-        </p:txBody>
-      </p:sp>
-      <p:sp>
-        <p:nvSpPr>
-          <p:cNvPr id="18" name="TextBox 17"/>
-          <p:cNvSpPr txBox="1"/>
-          <p:nvPr/>
-        </p:nvSpPr>
-        <p:spPr>
-          <a:xfrm>
-            <a:off x="548640" y="2980944"/>
-            <a:ext cx="640080" cy="457200"/>
-          </a:xfrm>
-          <a:prstGeom prst="rect">
-            <a:avLst/>
-          </a:prstGeom>
-          <a:noFill/>
-        </p:spPr>
-        <p:txBody>
-          <a:bodyPr wrap="none">
-            <a:spAutoFit/>
-          </a:bodyPr>
-          <a:lstStyle/>
-          <a:p>
-            <a:pPr algn="ctr">
-              <a:spcAft>
-                <a:spcPts val="400"/>
-              </a:spcAft>
-            </a:pPr>
-            <a:r>
-              <a:rPr sz="1800" b="1" i="0">
-                <a:solidFill>
-                  <a:srgbClr val="FFFFFF"/>
-                </a:solidFill>
-                <a:latin typeface="Calibri"/>
-              </a:rPr>
-              <a:t>3</a:t>
-            </a:r>
-          </a:p>
-        </p:txBody>
-      </p:sp>
-      <p:sp>
-        <p:nvSpPr>
-          <p:cNvPr id="19" name="Rectangle 18"/>
-          <p:cNvSpPr/>
-          <p:nvPr/>
-        </p:nvSpPr>
-        <p:spPr>
-          <a:xfrm>
-            <a:off x="1280160" y="2871215"/>
-            <a:ext cx="6949440" cy="640080"/>
-          </a:xfrm>
-          <a:prstGeom prst="rect">
-            <a:avLst/>
-          </a:prstGeom>
-          <a:solidFill>
-            <a:srgbClr val="EEF3FA"/>
-          </a:solidFill>
-          <a:ln>
-            <a:noFill/>
-          </a:ln>
-          <a:effectLst/>
-        </p:spPr>
-        <p:style>
-          <a:lnRef idx="1">
-            <a:schemeClr val="accent1"/>
-          </a:lnRef>
-          <a:fillRef idx="3">
-            <a:schemeClr val="accent1"/>
-          </a:fillRef>
-          <a:effectRef idx="2">
-            <a:schemeClr val="accent1"/>
-          </a:effectRef>
-          <a:fontRef idx="minor">
-            <a:schemeClr val="lt1"/>
-          </a:fontRef>
-        </p:style>
-        <p:txBody>
-          <a:bodyPr rtlCol="0" anchor="ctr"/>
-          <a:lstStyle/>
-          <a:p>
-            <a:pPr algn="ctr"/>
-          </a:p>
-        </p:txBody>
-      </p:sp>
-      <p:sp>
-        <p:nvSpPr>
-          <p:cNvPr id="20" name="TextBox 19"/>
-          <p:cNvSpPr txBox="1"/>
-          <p:nvPr/>
-        </p:nvSpPr>
-        <p:spPr>
-          <a:xfrm>
-            <a:off x="1417320" y="2935223"/>
-            <a:ext cx="6766560" cy="548640"/>
-          </a:xfrm>
-          <a:prstGeom prst="rect">
-            <a:avLst/>
-          </a:prstGeom>
-          <a:noFill/>
-        </p:spPr>
-        <p:txBody>
-          <a:bodyPr wrap="none" anchor="ctr">
-            <a:spAutoFit/>
-          </a:bodyPr>
-          <a:lstStyle/>
-          <a:p>
-            <a:pPr algn="l">
-              <a:spcAft>
-                <a:spcPts val="400"/>
-              </a:spcAft>
-            </a:pPr>
-            <a:r>
-              <a:rPr sz="1350" b="1" i="0">
-                <a:solidFill>
-                  <a:srgbClr val="1F4E78"/>
-                </a:solidFill>
-                <a:latin typeface="Calibri"/>
-              </a:rPr>
-              <a:t>Send CJB full spec + RFQ (Option A &amp; B, per-drum)</a:t>
-            </a:r>
-          </a:p>
-        </p:txBody>
-      </p:sp>
-      <p:sp>
-        <p:nvSpPr>
-          <p:cNvPr id="21" name="Rectangle 20"/>
-          <p:cNvSpPr/>
-          <p:nvPr/>
-        </p:nvSpPr>
-        <p:spPr>
-          <a:xfrm>
-            <a:off x="8321040" y="2871215"/>
-            <a:ext cx="3291840" cy="640080"/>
-          </a:xfrm>
-          <a:prstGeom prst="rect">
-            <a:avLst/>
-          </a:prstGeom>
-          <a:solidFill>
-            <a:srgbClr val="DDEBF7"/>
-          </a:solidFill>
-          <a:ln>
-            <a:noFill/>
-          </a:ln>
-          <a:effectLst/>
-        </p:spPr>
-        <p:style>
-          <a:lnRef idx="1">
-            <a:schemeClr val="accent1"/>
-          </a:lnRef>
-          <a:fillRef idx="3">
-            <a:schemeClr val="accent1"/>
-          </a:fillRef>
-          <a:effectRef idx="2">
-            <a:schemeClr val="accent1"/>
-          </a:effectRef>
-          <a:fontRef idx="minor">
-            <a:schemeClr val="lt1"/>
-          </a:fontRef>
-        </p:style>
-        <p:txBody>
-          <a:bodyPr rtlCol="0" anchor="ctr"/>
-          <a:lstStyle/>
-          <a:p>
-            <a:pPr algn="ctr"/>
-          </a:p>
-        </p:txBody>
-      </p:sp>
-      <p:sp>
-        <p:nvSpPr>
-          <p:cNvPr id="22" name="TextBox 21"/>
-          <p:cNvSpPr txBox="1"/>
-          <p:nvPr/>
-        </p:nvSpPr>
-        <p:spPr>
-          <a:xfrm>
-            <a:off x="8412480" y="2935223"/>
-            <a:ext cx="3200400" cy="548640"/>
-          </a:xfrm>
-          <a:prstGeom prst="rect">
-            <a:avLst/>
-          </a:prstGeom>
-          <a:noFill/>
-        </p:spPr>
-        <p:txBody>
-          <a:bodyPr wrap="none" anchor="ctr">
-            <a:spAutoFit/>
-          </a:bodyPr>
-          <a:lstStyle/>
-          <a:p>
-            <a:pPr algn="l">
-              <a:spcAft>
-                <a:spcPts val="400"/>
-              </a:spcAft>
-            </a:pPr>
-            <a:r>
-              <a:rPr sz="1150" b="0" i="0">
-                <a:solidFill>
-                  <a:srgbClr val="595959"/>
-                </a:solidFill>
-                <a:latin typeface="Calibri"/>
-              </a:rPr>
-              <a:t>After NDA</a:t>
-            </a:r>
-          </a:p>
-        </p:txBody>
-      </p:sp>
-      <p:sp>
-        <p:nvSpPr>
-          <p:cNvPr id="23" name="Rectangle 22"/>
-          <p:cNvSpPr/>
-          <p:nvPr/>
-        </p:nvSpPr>
-        <p:spPr>
-          <a:xfrm>
-            <a:off x="548640" y="3621023"/>
-            <a:ext cx="640080" cy="640080"/>
-          </a:xfrm>
-          <a:prstGeom prst="rect">
-            <a:avLst/>
-          </a:prstGeom>
-          <a:solidFill>
-            <a:srgbClr val="1F4E78"/>
-          </a:solidFill>
-          <a:ln>
-            <a:noFill/>
-          </a:ln>
-          <a:effectLst/>
-        </p:spPr>
-        <p:style>
-          <a:lnRef idx="1">
-            <a:schemeClr val="accent1"/>
-          </a:lnRef>
-          <a:fillRef idx="3">
-            <a:schemeClr val="accent1"/>
-          </a:fillRef>
-          <a:effectRef idx="2">
-            <a:schemeClr val="accent1"/>
-          </a:effectRef>
-          <a:fontRef idx="minor">
-            <a:schemeClr val="lt1"/>
-          </a:fontRef>
-        </p:style>
-        <p:txBody>
-          <a:bodyPr rtlCol="0" anchor="ctr"/>
-          <a:lstStyle/>
-          <a:p>
-            <a:pPr algn="ctr"/>
-          </a:p>
-        </p:txBody>
-      </p:sp>
-      <p:sp>
-        <p:nvSpPr>
-          <p:cNvPr id="24" name="TextBox 23"/>
-          <p:cNvSpPr txBox="1"/>
-          <p:nvPr/>
-        </p:nvSpPr>
-        <p:spPr>
-          <a:xfrm>
-            <a:off x="548640" y="3730751"/>
-            <a:ext cx="640080" cy="457200"/>
-          </a:xfrm>
-          <a:prstGeom prst="rect">
-            <a:avLst/>
-          </a:prstGeom>
-          <a:noFill/>
-        </p:spPr>
-        <p:txBody>
-          <a:bodyPr wrap="none">
-            <a:spAutoFit/>
-          </a:bodyPr>
-          <a:lstStyle/>
-          <a:p>
-            <a:pPr algn="ctr">
-              <a:spcAft>
-                <a:spcPts val="400"/>
-              </a:spcAft>
-            </a:pPr>
-            <a:r>
-              <a:rPr sz="1800" b="1" i="0">
-                <a:solidFill>
-                  <a:srgbClr val="FFFFFF"/>
-                </a:solidFill>
-                <a:latin typeface="Calibri"/>
-              </a:rPr>
-              <a:t>4</a:t>
-            </a:r>
-          </a:p>
-        </p:txBody>
-      </p:sp>
-      <p:sp>
-        <p:nvSpPr>
-          <p:cNvPr id="25" name="Rectangle 24"/>
-          <p:cNvSpPr/>
-          <p:nvPr/>
-        </p:nvSpPr>
-        <p:spPr>
-          <a:xfrm>
-            <a:off x="1280160" y="3621023"/>
-            <a:ext cx="6949440" cy="640080"/>
-          </a:xfrm>
-          <a:prstGeom prst="rect">
-            <a:avLst/>
-          </a:prstGeom>
-          <a:solidFill>
-            <a:srgbClr val="EEF3FA"/>
-          </a:solidFill>
-          <a:ln>
-            <a:noFill/>
-          </a:ln>
-          <a:effectLst/>
-        </p:spPr>
-        <p:style>
-          <a:lnRef idx="1">
-            <a:schemeClr val="accent1"/>
-          </a:lnRef>
-          <a:fillRef idx="3">
-            <a:schemeClr val="accent1"/>
-          </a:fillRef>
-          <a:effectRef idx="2">
-            <a:schemeClr val="accent1"/>
-          </a:effectRef>
-          <a:fontRef idx="minor">
-            <a:schemeClr val="lt1"/>
-          </a:fontRef>
-        </p:style>
-        <p:txBody>
-          <a:bodyPr rtlCol="0" anchor="ctr"/>
-          <a:lstStyle/>
-          <a:p>
-            <a:pPr algn="ctr"/>
-          </a:p>
-        </p:txBody>
-      </p:sp>
-      <p:sp>
-        <p:nvSpPr>
-          <p:cNvPr id="26" name="TextBox 25"/>
-          <p:cNvSpPr txBox="1"/>
-          <p:nvPr/>
-        </p:nvSpPr>
-        <p:spPr>
-          <a:xfrm>
-            <a:off x="1417320" y="3685031"/>
-            <a:ext cx="6766560" cy="548640"/>
-          </a:xfrm>
-          <a:prstGeom prst="rect">
-            <a:avLst/>
-          </a:prstGeom>
-          <a:noFill/>
-        </p:spPr>
-        <p:txBody>
-          <a:bodyPr wrap="none" anchor="ctr">
-            <a:spAutoFit/>
-          </a:bodyPr>
-          <a:lstStyle/>
-          <a:p>
-            <a:pPr algn="l">
-              <a:spcAft>
-                <a:spcPts val="400"/>
-              </a:spcAft>
-            </a:pPr>
-            <a:r>
-              <a:rPr sz="1350" b="1" i="0">
-                <a:solidFill>
-                  <a:srgbClr val="1F4E78"/>
-                </a:solidFill>
-                <a:latin typeface="Calibri"/>
-              </a:rPr>
-              <a:t>Re-confirm APV 90–95 °C; send pricing benchmark</a:t>
-            </a:r>
-          </a:p>
-        </p:txBody>
-      </p:sp>
-      <p:sp>
-        <p:nvSpPr>
-          <p:cNvPr id="27" name="Rectangle 26"/>
-          <p:cNvSpPr/>
-          <p:nvPr/>
-        </p:nvSpPr>
-        <p:spPr>
-          <a:xfrm>
-            <a:off x="8321040" y="3621023"/>
-            <a:ext cx="3291840" cy="640080"/>
-          </a:xfrm>
-          <a:prstGeom prst="rect">
-            <a:avLst/>
-          </a:prstGeom>
-          <a:solidFill>
-            <a:srgbClr val="DDEBF7"/>
-          </a:solidFill>
-          <a:ln>
-            <a:noFill/>
-          </a:ln>
-          <a:effectLst/>
-        </p:spPr>
-        <p:style>
-          <a:lnRef idx="1">
-            <a:schemeClr val="accent1"/>
-          </a:lnRef>
-          <a:fillRef idx="3">
-            <a:schemeClr val="accent1"/>
-          </a:fillRef>
-          <a:effectRef idx="2">
-            <a:schemeClr val="accent1"/>
-          </a:effectRef>
-          <a:fontRef idx="minor">
-            <a:schemeClr val="lt1"/>
-          </a:fontRef>
-        </p:style>
-        <p:txBody>
-          <a:bodyPr rtlCol="0" anchor="ctr"/>
-          <a:lstStyle/>
-          <a:p>
-            <a:pPr algn="ctr"/>
-          </a:p>
-        </p:txBody>
-      </p:sp>
-      <p:sp>
-        <p:nvSpPr>
-          <p:cNvPr id="28" name="TextBox 27"/>
-          <p:cNvSpPr txBox="1"/>
-          <p:nvPr/>
-        </p:nvSpPr>
-        <p:spPr>
-          <a:xfrm>
-            <a:off x="8412480" y="3685031"/>
-            <a:ext cx="3200400" cy="548640"/>
-          </a:xfrm>
-          <a:prstGeom prst="rect">
-            <a:avLst/>
-          </a:prstGeom>
-          <a:noFill/>
-        </p:spPr>
-        <p:txBody>
-          <a:bodyPr wrap="none" anchor="ctr">
-            <a:spAutoFit/>
-          </a:bodyPr>
-          <a:lstStyle/>
-          <a:p>
-            <a:pPr algn="l">
-              <a:spcAft>
-                <a:spcPts val="400"/>
-              </a:spcAft>
-            </a:pPr>
-            <a:r>
-              <a:rPr sz="1150" b="0" i="0">
-                <a:solidFill>
-                  <a:srgbClr val="595959"/>
-                </a:solidFill>
-                <a:latin typeface="Calibri"/>
-              </a:rPr>
-              <a:t>Open</a:t>
-            </a:r>
-          </a:p>
-        </p:txBody>
-      </p:sp>
-      <p:sp>
-        <p:nvSpPr>
-          <p:cNvPr id="29" name="Rectangle 28"/>
-          <p:cNvSpPr/>
-          <p:nvPr/>
-        </p:nvSpPr>
-        <p:spPr>
-          <a:xfrm>
-            <a:off x="548640" y="4370831"/>
-            <a:ext cx="640080" cy="640080"/>
-          </a:xfrm>
-          <a:prstGeom prst="rect">
-            <a:avLst/>
-          </a:prstGeom>
-          <a:solidFill>
-            <a:srgbClr val="1F4E78"/>
-          </a:solidFill>
-          <a:ln>
-            <a:noFill/>
-          </a:ln>
-          <a:effectLst/>
-        </p:spPr>
-        <p:style>
-          <a:lnRef idx="1">
-            <a:schemeClr val="accent1"/>
-          </a:lnRef>
-          <a:fillRef idx="3">
-            <a:schemeClr val="accent1"/>
-          </a:fillRef>
-          <a:effectRef idx="2">
-            <a:schemeClr val="accent1"/>
-          </a:effectRef>
-          <a:fontRef idx="minor">
-            <a:schemeClr val="lt1"/>
-          </a:fontRef>
-        </p:style>
-        <p:txBody>
-          <a:bodyPr rtlCol="0" anchor="ctr"/>
-          <a:lstStyle/>
-          <a:p>
-            <a:pPr algn="ctr"/>
-          </a:p>
-        </p:txBody>
-      </p:sp>
-      <p:sp>
-        <p:nvSpPr>
-          <p:cNvPr id="30" name="TextBox 29"/>
-          <p:cNvSpPr txBox="1"/>
-          <p:nvPr/>
-        </p:nvSpPr>
-        <p:spPr>
-          <a:xfrm>
-            <a:off x="548640" y="4480559"/>
-            <a:ext cx="640080" cy="457200"/>
-          </a:xfrm>
-          <a:prstGeom prst="rect">
-            <a:avLst/>
-          </a:prstGeom>
-          <a:noFill/>
-        </p:spPr>
-        <p:txBody>
-          <a:bodyPr wrap="none">
-            <a:spAutoFit/>
-          </a:bodyPr>
-          <a:lstStyle/>
-          <a:p>
-            <a:pPr algn="ctr">
-              <a:spcAft>
-                <a:spcPts val="400"/>
-              </a:spcAft>
-            </a:pPr>
-            <a:r>
-              <a:rPr sz="1800" b="1" i="0">
-                <a:solidFill>
-                  <a:srgbClr val="FFFFFF"/>
-                </a:solidFill>
-                <a:latin typeface="Calibri"/>
-              </a:rPr>
-              <a:t>5</a:t>
-            </a:r>
-          </a:p>
-        </p:txBody>
-      </p:sp>
-      <p:sp>
-        <p:nvSpPr>
-          <p:cNvPr id="31" name="Rectangle 30"/>
-          <p:cNvSpPr/>
-          <p:nvPr/>
-        </p:nvSpPr>
-        <p:spPr>
-          <a:xfrm>
-            <a:off x="1280160" y="4370831"/>
-            <a:ext cx="6949440" cy="640080"/>
-          </a:xfrm>
-          <a:prstGeom prst="rect">
-            <a:avLst/>
-          </a:prstGeom>
-          <a:solidFill>
-            <a:srgbClr val="EEF3FA"/>
-          </a:solidFill>
-          <a:ln>
-            <a:noFill/>
-          </a:ln>
-          <a:effectLst/>
-        </p:spPr>
-        <p:style>
-          <a:lnRef idx="1">
-            <a:schemeClr val="accent1"/>
-          </a:lnRef>
-          <a:fillRef idx="3">
-            <a:schemeClr val="accent1"/>
-          </a:fillRef>
-          <a:effectRef idx="2">
-            <a:schemeClr val="accent1"/>
-          </a:effectRef>
-          <a:fontRef idx="minor">
-            <a:schemeClr val="lt1"/>
-          </a:fontRef>
-        </p:style>
-        <p:txBody>
-          <a:bodyPr rtlCol="0" anchor="ctr"/>
-          <a:lstStyle/>
-          <a:p>
-            <a:pPr algn="ctr"/>
-          </a:p>
-        </p:txBody>
-      </p:sp>
-      <p:sp>
-        <p:nvSpPr>
-          <p:cNvPr id="32" name="TextBox 31"/>
-          <p:cNvSpPr txBox="1"/>
-          <p:nvPr/>
-        </p:nvSpPr>
-        <p:spPr>
-          <a:xfrm>
-            <a:off x="1417320" y="4434840"/>
-            <a:ext cx="6766560" cy="548640"/>
-          </a:xfrm>
-          <a:prstGeom prst="rect">
-            <a:avLst/>
-          </a:prstGeom>
-          <a:noFill/>
-        </p:spPr>
-        <p:txBody>
-          <a:bodyPr wrap="none" anchor="ctr">
-            <a:spAutoFit/>
-          </a:bodyPr>
-          <a:lstStyle/>
-          <a:p>
-            <a:pPr algn="l">
-              <a:spcAft>
-                <a:spcPts val="400"/>
-              </a:spcAft>
-            </a:pPr>
-            <a:r>
-              <a:rPr sz="1350" b="1" i="0">
-                <a:solidFill>
-                  <a:srgbClr val="1F4E78"/>
-                </a:solidFill>
-                <a:latin typeface="Calibri"/>
-              </a:rPr>
-              <a:t>Execute Supplier Quality Agreement with selected source</a:t>
-            </a:r>
-          </a:p>
-        </p:txBody>
-      </p:sp>
-      <p:sp>
-        <p:nvSpPr>
-          <p:cNvPr id="33" name="Rectangle 32"/>
-          <p:cNvSpPr/>
-          <p:nvPr/>
-        </p:nvSpPr>
-        <p:spPr>
-          <a:xfrm>
-            <a:off x="8321040" y="4370831"/>
-            <a:ext cx="3291840" cy="640080"/>
-          </a:xfrm>
-          <a:prstGeom prst="rect">
-            <a:avLst/>
-          </a:prstGeom>
-          <a:solidFill>
-            <a:srgbClr val="DDEBF7"/>
-          </a:solidFill>
-          <a:ln>
-            <a:noFill/>
-          </a:ln>
-          <a:effectLst/>
-        </p:spPr>
-        <p:style>
-          <a:lnRef idx="1">
-            <a:schemeClr val="accent1"/>
-          </a:lnRef>
-          <a:fillRef idx="3">
-            <a:schemeClr val="accent1"/>
-          </a:fillRef>
-          <a:effectRef idx="2">
-            <a:schemeClr val="accent1"/>
-          </a:effectRef>
-          <a:fontRef idx="minor">
-            <a:schemeClr val="lt1"/>
-          </a:fontRef>
-        </p:style>
-        <p:txBody>
-          <a:bodyPr rtlCol="0" anchor="ctr"/>
-          <a:lstStyle/>
-          <a:p>
-            <a:pPr algn="ctr"/>
-          </a:p>
-        </p:txBody>
-      </p:sp>
-      <p:sp>
-        <p:nvSpPr>
-          <p:cNvPr id="34" name="TextBox 33"/>
-          <p:cNvSpPr txBox="1"/>
-          <p:nvPr/>
-        </p:nvSpPr>
-        <p:spPr>
-          <a:xfrm>
-            <a:off x="8412480" y="4434840"/>
-            <a:ext cx="3200400" cy="548640"/>
-          </a:xfrm>
-          <a:prstGeom prst="rect">
-            <a:avLst/>
-          </a:prstGeom>
-          <a:noFill/>
-        </p:spPr>
-        <p:txBody>
-          <a:bodyPr wrap="none" anchor="ctr">
-            <a:spAutoFit/>
-          </a:bodyPr>
-          <a:lstStyle/>
-          <a:p>
-            <a:pPr algn="l">
-              <a:spcAft>
-                <a:spcPts val="400"/>
-              </a:spcAft>
-            </a:pPr>
-            <a:r>
-              <a:rPr sz="1150" b="0" i="0">
-                <a:solidFill>
-                  <a:srgbClr val="595959"/>
-                </a:solidFill>
-                <a:latin typeface="Calibri"/>
-              </a:rPr>
-              <a:t>After award</a:t>
-            </a:r>
-          </a:p>
-        </p:txBody>
-      </p:sp>
-      <p:sp>
-        <p:nvSpPr>
-          <p:cNvPr id="35" name="Rectangle 34"/>
-          <p:cNvSpPr/>
-          <p:nvPr/>
-        </p:nvSpPr>
-        <p:spPr>
-          <a:xfrm>
-            <a:off x="548640" y="5120640"/>
-            <a:ext cx="640080" cy="640080"/>
-          </a:xfrm>
-          <a:prstGeom prst="rect">
-            <a:avLst/>
-          </a:prstGeom>
-          <a:solidFill>
-            <a:srgbClr val="1F4E78"/>
-          </a:solidFill>
-          <a:ln>
-            <a:noFill/>
-          </a:ln>
-          <a:effectLst/>
-        </p:spPr>
-        <p:style>
-          <a:lnRef idx="1">
-            <a:schemeClr val="accent1"/>
-          </a:lnRef>
-          <a:fillRef idx="3">
-            <a:schemeClr val="accent1"/>
-          </a:fillRef>
-          <a:effectRef idx="2">
-            <a:schemeClr val="accent1"/>
-          </a:effectRef>
-          <a:fontRef idx="minor">
-            <a:schemeClr val="lt1"/>
-          </a:fontRef>
-        </p:style>
-        <p:txBody>
-          <a:bodyPr rtlCol="0" anchor="ctr"/>
-          <a:lstStyle/>
-          <a:p>
-            <a:pPr algn="ctr"/>
-          </a:p>
-        </p:txBody>
-      </p:sp>
-      <p:sp>
-        <p:nvSpPr>
-          <p:cNvPr id="36" name="TextBox 35"/>
-          <p:cNvSpPr txBox="1"/>
-          <p:nvPr/>
-        </p:nvSpPr>
-        <p:spPr>
-          <a:xfrm>
-            <a:off x="548640" y="5230368"/>
-            <a:ext cx="640080" cy="457200"/>
-          </a:xfrm>
-          <a:prstGeom prst="rect">
-            <a:avLst/>
-          </a:prstGeom>
-          <a:noFill/>
-        </p:spPr>
-        <p:txBody>
-          <a:bodyPr wrap="none">
-            <a:spAutoFit/>
-          </a:bodyPr>
-          <a:lstStyle/>
-          <a:p>
-            <a:pPr algn="ctr">
-              <a:spcAft>
-                <a:spcPts val="400"/>
-              </a:spcAft>
-            </a:pPr>
-            <a:r>
-              <a:rPr sz="1800" b="1" i="0">
-                <a:solidFill>
-                  <a:srgbClr val="FFFFFF"/>
-                </a:solidFill>
-                <a:latin typeface="Calibri"/>
-              </a:rPr>
-              <a:t>6</a:t>
-            </a:r>
-          </a:p>
-        </p:txBody>
-      </p:sp>
-      <p:sp>
-        <p:nvSpPr>
-          <p:cNvPr id="37" name="Rectangle 36"/>
-          <p:cNvSpPr/>
-          <p:nvPr/>
-        </p:nvSpPr>
-        <p:spPr>
-          <a:xfrm>
-            <a:off x="1280160" y="5120640"/>
-            <a:ext cx="6949440" cy="640080"/>
-          </a:xfrm>
-          <a:prstGeom prst="rect">
-            <a:avLst/>
-          </a:prstGeom>
-          <a:solidFill>
-            <a:srgbClr val="EEF3FA"/>
-          </a:solidFill>
-          <a:ln>
-            <a:noFill/>
-          </a:ln>
-          <a:effectLst/>
-        </p:spPr>
-        <p:style>
-          <a:lnRef idx="1">
-            <a:schemeClr val="accent1"/>
-          </a:lnRef>
-          <a:fillRef idx="3">
-            <a:schemeClr val="accent1"/>
-          </a:fillRef>
-          <a:effectRef idx="2">
-            <a:schemeClr val="accent1"/>
-          </a:effectRef>
-          <a:fontRef idx="minor">
-            <a:schemeClr val="lt1"/>
-          </a:fontRef>
-        </p:style>
-        <p:txBody>
-          <a:bodyPr rtlCol="0" anchor="ctr"/>
-          <a:lstStyle/>
-          <a:p>
-            <a:pPr algn="ctr"/>
-          </a:p>
-        </p:txBody>
-      </p:sp>
-      <p:sp>
-        <p:nvSpPr>
-          <p:cNvPr id="38" name="TextBox 37"/>
-          <p:cNvSpPr txBox="1"/>
-          <p:nvPr/>
-        </p:nvSpPr>
-        <p:spPr>
-          <a:xfrm>
-            <a:off x="1417320" y="5184648"/>
-            <a:ext cx="6766560" cy="548640"/>
-          </a:xfrm>
-          <a:prstGeom prst="rect">
-            <a:avLst/>
-          </a:prstGeom>
-          <a:noFill/>
-        </p:spPr>
-        <p:txBody>
-          <a:bodyPr wrap="none" anchor="ctr">
-            <a:spAutoFit/>
-          </a:bodyPr>
-          <a:lstStyle/>
-          <a:p>
-            <a:pPr algn="l">
-              <a:spcAft>
-                <a:spcPts val="400"/>
-              </a:spcAft>
-            </a:pPr>
-            <a:r>
-              <a:rPr sz="1350" b="1" i="0">
-                <a:solidFill>
-                  <a:srgbClr val="1F4E78"/>
-                </a:solidFill>
-                <a:latin typeface="Calibri"/>
-              </a:rPr>
-              <a:t>Keep Piedmont / Columbus in reserve</a:t>
-            </a:r>
-          </a:p>
-        </p:txBody>
-      </p:sp>
-      <p:sp>
-        <p:nvSpPr>
-          <p:cNvPr id="39" name="Rectangle 38"/>
-          <p:cNvSpPr/>
-          <p:nvPr/>
-        </p:nvSpPr>
-        <p:spPr>
-          <a:xfrm>
-            <a:off x="8321040" y="5120640"/>
-            <a:ext cx="3291840" cy="640080"/>
-          </a:xfrm>
-          <a:prstGeom prst="rect">
-            <a:avLst/>
-          </a:prstGeom>
-          <a:solidFill>
-            <a:srgbClr val="DDEBF7"/>
-          </a:solidFill>
-          <a:ln>
-            <a:noFill/>
-          </a:ln>
-          <a:effectLst/>
-        </p:spPr>
-        <p:style>
-          <a:lnRef idx="1">
-            <a:schemeClr val="accent1"/>
-          </a:lnRef>
-          <a:fillRef idx="3">
-            <a:schemeClr val="accent1"/>
-          </a:fillRef>
-          <a:effectRef idx="2">
-            <a:schemeClr val="accent1"/>
-          </a:effectRef>
-          <a:fontRef idx="minor">
-            <a:schemeClr val="lt1"/>
-          </a:fontRef>
-        </p:style>
-        <p:txBody>
-          <a:bodyPr rtlCol="0" anchor="ctr"/>
-          <a:lstStyle/>
-          <a:p>
-            <a:pPr algn="ctr"/>
-          </a:p>
-        </p:txBody>
-      </p:sp>
-      <p:sp>
-        <p:nvSpPr>
-          <p:cNvPr id="40" name="TextBox 39"/>
-          <p:cNvSpPr txBox="1"/>
-          <p:nvPr/>
-        </p:nvSpPr>
-        <p:spPr>
-          <a:xfrm>
-            <a:off x="8412480" y="5184648"/>
-            <a:ext cx="3200400" cy="548640"/>
-          </a:xfrm>
-          <a:prstGeom prst="rect">
-            <a:avLst/>
-          </a:prstGeom>
-          <a:noFill/>
-        </p:spPr>
-        <p:txBody>
-          <a:bodyPr wrap="none" anchor="ctr">
-            <a:spAutoFit/>
-          </a:bodyPr>
-          <a:lstStyle/>
-          <a:p>
-            <a:pPr algn="l">
-              <a:spcAft>
-                <a:spcPts val="400"/>
-              </a:spcAft>
-            </a:pPr>
-            <a:r>
-              <a:rPr sz="1150" b="0" i="0">
-                <a:solidFill>
-                  <a:srgbClr val="595959"/>
-                </a:solidFill>
-                <a:latin typeface="Calibri"/>
-              </a:rPr>
-              <a:t>Standby</a:t>
-            </a:r>
-          </a:p>
-        </p:txBody>
-      </p:sp>
-      <p:sp>
-        <p:nvSpPr>
-          <p:cNvPr id="41" name="TextBox 40"/>
-          <p:cNvSpPr txBox="1"/>
-          <p:nvPr/>
-        </p:nvSpPr>
-        <p:spPr>
-          <a:xfrm>
-            <a:off x="548640" y="6355080"/>
-            <a:ext cx="10972800" cy="365760"/>
-          </a:xfrm>
-          <a:prstGeom prst="rect">
-            <a:avLst/>
-          </a:prstGeom>
-          <a:noFill/>
-        </p:spPr>
-        <p:txBody>
-          <a:bodyPr wrap="none">
-            <a:spAutoFit/>
-          </a:bodyPr>
-          <a:lstStyle/>
-          <a:p>
-            <a:pPr algn="l">
-              <a:spcAft>
-                <a:spcPts val="400"/>
-              </a:spcAft>
-            </a:pPr>
-            <a:r>
-              <a:rPr sz="1100" b="0" i="1">
-                <a:solidFill>
-                  <a:srgbClr val="595959"/>
-                </a:solidFill>
-                <a:latin typeface="Calibri"/>
-              </a:rPr>
-              <a:t>Detail in PVA_Second_Source_Report.docx and PVA_Second_Source_Pricing_Model.xlsx</a:t>
+              <a:t>— not as a courtesy.</a:t>
             </a:r>
           </a:p>
         </p:txBody>

--- a/PVA second supplier initiative/PVA_Second_Source_Slides.pptx
+++ b/PVA second supplier initiative/PVA_Second_Source_Slides.pptx
@@ -5412,7 +5412,7 @@
                 </a:solidFill>
                 <a:latin typeface="Calibri"/>
               </a:rPr>
-              <a:t>•  If SNP holds price: redundancy is modest — ~$5–13k/yr depending on split &amp; 2nd-source premium (≈$0 at parity).</a:t>
+              <a:t>•  Capped at 1 drum/week (~35%): if SNP holds price, redundancy ≈ $6–12k/yr at the proposed $1.00–1.25/lb band (≈$0 at parity).</a:t>
             </a:r>
           </a:p>
           <a:p>
@@ -5428,7 +5428,7 @@
                 </a:solidFill>
                 <a:latin typeface="Calibri"/>
               </a:rPr>
-              <a:t>•  If SNP raises price on the reduced volume: cost can roughly double — that surcharge, on the larger retained volume, is often the bigger driver.</a:t>
+              <a:t>•  If SNP raises price on the reduced volume: that surcharge — on the larger retained volume — is often the bigger driver.</a:t>
             </a:r>
           </a:p>
           <a:p>
@@ -5444,7 +5444,7 @@
                 </a:solidFill>
                 <a:latin typeface="Calibri"/>
               </a:rPr>
-              <a:t>•  Range across plausible scenarios: ~$2.5k to ~$30k/yr.</a:t>
+              <a:t>•  Range at the cap: ~$0 to ~$24k/yr (worst case = top price + SNP also raising).</a:t>
             </a:r>
           </a:p>
           <a:p>
@@ -6921,7 +6921,7 @@
         </p:nvGraphicFramePr>
         <p:xfrm>
           <a:off x="548640" y="3108960"/>
-          <a:ext cx="11064240" cy="1965960"/>
+          <a:ext cx="11064240" cy="1554480"/>
         </p:xfrm>
         <a:graphic>
           <a:graphicData uri="http://schemas.openxmlformats.org/drawingml/2006/table">
@@ -6935,7 +6935,7 @@
                 <a:gridCol w="2560320"/>
                 <a:gridCol w="2560320"/>
               </a:tblGrid>
-              <a:tr h="491490">
+              <a:tr h="518160">
                 <a:tc>
                   <a:txBody>
                     <a:bodyPr/>
@@ -7029,7 +7029,7 @@
                   </a:tcPr>
                 </a:tc>
               </a:tr>
-              <a:tr h="491490">
+              <a:tr h="518160">
                 <a:tc>
                   <a:txBody>
                     <a:bodyPr/>
@@ -7123,7 +7123,7 @@
                   </a:tcPr>
                 </a:tc>
               </a:tr>
-              <a:tr h="491490">
+              <a:tr h="518160">
                 <a:tc>
                   <a:txBody>
                     <a:bodyPr/>
@@ -7137,7 +7137,7 @@
                           </a:solidFill>
                           <a:latin typeface="Calibri"/>
                         </a:rPr>
-                        <a:t>35%  (~1 drum/wk)</a:t>
+                        <a:t>35%  (~1 drum/wk — CAP)</a:t>
                       </a:r>
                     </a:p>
                   </a:txBody>
@@ -7217,100 +7217,6 @@
                   </a:tcPr>
                 </a:tc>
               </a:tr>
-              <a:tr h="491490">
-                <a:tc>
-                  <a:txBody>
-                    <a:bodyPr/>
-                    <a:lstStyle/>
-                    <a:p>
-                      <a:pPr algn="l"/>
-                      <a:r>
-                        <a:rPr sz="1300" b="1">
-                          <a:solidFill>
-                            <a:srgbClr val="1F4E78"/>
-                          </a:solidFill>
-                          <a:latin typeface="Calibri"/>
-                        </a:rPr>
-                        <a:t>50%  (~1.4 drum/wk)</a:t>
-                      </a:r>
-                    </a:p>
-                  </a:txBody>
-                  <a:tcPr>
-                    <a:solidFill>
-                      <a:srgbClr val="FFFFFF"/>
-                    </a:solidFill>
-                  </a:tcPr>
-                </a:tc>
-                <a:tc>
-                  <a:txBody>
-                    <a:bodyPr/>
-                    <a:lstStyle/>
-                    <a:p>
-                      <a:pPr algn="ctr"/>
-                      <a:r>
-                        <a:rPr sz="1300">
-                          <a:solidFill>
-                            <a:srgbClr val="1F4E78"/>
-                          </a:solidFill>
-                          <a:latin typeface="Calibri"/>
-                        </a:rPr>
-                        <a:t>$12,675</a:t>
-                      </a:r>
-                    </a:p>
-                  </a:txBody>
-                  <a:tcPr>
-                    <a:solidFill>
-                      <a:srgbClr val="E2EFDA"/>
-                    </a:solidFill>
-                  </a:tcPr>
-                </a:tc>
-                <a:tc>
-                  <a:txBody>
-                    <a:bodyPr/>
-                    <a:lstStyle/>
-                    <a:p>
-                      <a:pPr algn="ctr"/>
-                      <a:r>
-                        <a:rPr sz="1300">
-                          <a:solidFill>
-                            <a:srgbClr val="1F4E78"/>
-                          </a:solidFill>
-                          <a:latin typeface="Calibri"/>
-                        </a:rPr>
-                        <a:t>$15,210</a:t>
-                      </a:r>
-                    </a:p>
-                  </a:txBody>
-                  <a:tcPr>
-                    <a:solidFill>
-                      <a:srgbClr val="FFF2CC"/>
-                    </a:solidFill>
-                  </a:tcPr>
-                </a:tc>
-                <a:tc>
-                  <a:txBody>
-                    <a:bodyPr/>
-                    <a:lstStyle/>
-                    <a:p>
-                      <a:pPr algn="ctr"/>
-                      <a:r>
-                        <a:rPr sz="1300">
-                          <a:solidFill>
-                            <a:srgbClr val="1F4E78"/>
-                          </a:solidFill>
-                          <a:latin typeface="Calibri"/>
-                        </a:rPr>
-                        <a:t>$30,420</a:t>
-                      </a:r>
-                    </a:p>
-                  </a:txBody>
-                  <a:tcPr>
-                    <a:solidFill>
-                      <a:srgbClr val="FCE4D6"/>
-                    </a:solidFill>
-                  </a:tcPr>
-                </a:tc>
-              </a:tr>
             </a:tbl>
           </a:graphicData>
         </a:graphic>
@@ -7349,7 +7255,7 @@
                 </a:solidFill>
                 <a:latin typeface="Calibri"/>
               </a:rPr>
-              <a:t>At price parity with SNP holding, the cost is ~$0 (ideal, unlikely). KEY: an SNP price increase hits the LARGER retained volume — it can cost more than the 2nd-source premium itself. Range across scenarios ~$2.5k–$30k/yr. Nothing decided; full interactive matrix in the model.</a:t>
+              <a:t>Capped at 1 drum/week (~35%). At parity with SNP holding, cost ≈ $0 (ideal, unlikely). KEY: an SNP price increase hits the LARGER retained volume — it can cost more than the 2nd-source premium itself. Range at the cap ≈ $0–$24k/yr. Nothing decided; full matrix in the model.</a:t>
             </a:r>
           </a:p>
         </p:txBody>
@@ -7522,7 +7428,7 @@
               </a:spcAft>
             </a:pPr>
             <a:r>
-              <a:rPr b="1" sz="1300">
+              <a:rPr b="1" sz="1250">
                 <a:solidFill>
                   <a:srgbClr val="1F4E78"/>
                 </a:solidFill>
@@ -7531,7 +7437,7 @@
               <a:t>• Benchmark </a:t>
             </a:r>
             <a:r>
-              <a:rPr sz="1300">
+              <a:rPr sz="1250">
                 <a:solidFill>
                   <a:srgbClr val="595959"/>
                 </a:solidFill>
@@ -7547,7 +7453,7 @@
               </a:spcAft>
             </a:pPr>
             <a:r>
-              <a:rPr b="1" sz="1300">
+              <a:rPr b="1" sz="1250">
                 <a:solidFill>
                   <a:srgbClr val="1F4E78"/>
                 </a:solidFill>
@@ -7556,13 +7462,13 @@
               <a:t>• A premium is fair </a:t>
             </a:r>
             <a:r>
-              <a:rPr sz="1300">
+              <a:rPr sz="1250">
                 <a:solidFill>
                   <a:srgbClr val="595959"/>
                 </a:solidFill>
                 <a:latin typeface="Calibri"/>
               </a:rPr>
-              <a:t>— APV is a mid-size coatings house; a single 55-gal drum is a small batch. Their cost floor alone is ~$0.80–1.15/lb.</a:t>
+              <a:t>— capped at 1 drum/wk, APV runs single 55-gal batches. They do small batches (from 5 gal), so it's workable — but small batches carry a premium; cost floor ~$0.80–1.15/lb.</a:t>
             </a:r>
           </a:p>
           <a:p>
@@ -7572,7 +7478,7 @@
               </a:spcAft>
             </a:pPr>
             <a:r>
-              <a:rPr b="1" sz="1300">
+              <a:rPr b="1" sz="1250">
                 <a:solidFill>
                   <a:srgbClr val="1F4E78"/>
                 </a:solidFill>
@@ -7581,7 +7487,7 @@
               <a:t>• Don't expect parity </a:t>
             </a:r>
             <a:r>
-              <a:rPr sz="1300">
+              <a:rPr sz="1250">
                 <a:solidFill>
                   <a:srgbClr val="595959"/>
                 </a:solidFill>
@@ -7718,7 +7624,7 @@
                 </a:solidFill>
                 <a:latin typeface="Calibri"/>
               </a:rPr>
-              <a:t>•  Lever: batch 2 drums/run (110 gal) = their batch sweet spot → holds price down</a:t>
+              <a:t>•  Lever: steady, predictable weekly PO — easy to plan; worth more to a small shop than volume</a:t>
             </a:r>
           </a:p>
         </p:txBody>
@@ -8356,7 +8262,7 @@
                 </a:solidFill>
                 <a:latin typeface="Calibri"/>
               </a:rPr>
-              <a:t>Order Cadence — Driven by the 18-Day Shelf Life</a:t>
+              <a:t>Order Cadence — 1 Drum/Week Within the 18-Day Shelf Life</a:t>
             </a:r>
           </a:p>
         </p:txBody>
@@ -8434,7 +8340,7 @@
                 </a:solidFill>
                 <a:latin typeface="Calibri"/>
               </a:rPr>
-              <a:t>• Made fresh, no stockpiling </a:t>
+              <a:t>• Hard cap </a:t>
             </a:r>
             <a:r>
               <a:rPr sz="1500">
@@ -8443,7 +8349,7 @@
                 </a:solidFill>
                 <a:latin typeface="Calibri"/>
               </a:rPr>
-              <a:t>— 18-day shelf life (~2.5 weeks). You can hold at most ~2 drums of 2nd-source supply before the oldest ages out.</a:t>
+              <a:t>— no more than 1 drum/week to this supplier (~35% of total). Made fresh; the 18-day shelf life (~2.5 wks) easily covers a weekly drum.</a:t>
             </a:r>
           </a:p>
           <a:p>
@@ -8459,7 +8365,7 @@
                 </a:solidFill>
                 <a:latin typeface="Calibri"/>
               </a:rPr>
-              <a:t>• Same split </a:t>
+              <a:t>• APV does small batches (from 5 gal) </a:t>
             </a:r>
             <a:r>
               <a:rPr sz="1500">
@@ -8468,7 +8374,7 @@
                 </a:solidFill>
                 <a:latin typeface="Calibri"/>
               </a:rPr>
-              <a:t>— ~1 drum/week to the 2nd source (~35% of total), unchanged.</a:t>
+              <a:t>— so a single 55-gal weekly batch is workable.</a:t>
             </a:r>
           </a:p>
         </p:txBody>
@@ -8551,7 +8457,7 @@
                 </a:solidFill>
                 <a:latin typeface="Calibri"/>
               </a:rPr>
-              <a:t>Weekly — 1 drum / wk</a:t>
+              <a:t>Weekly — 1 drum/wk  (RECOMMENDED)</a:t>
             </a:r>
           </a:p>
           <a:p>
@@ -8567,7 +8473,7 @@
                 </a:solidFill>
                 <a:latin typeface="Calibri"/>
               </a:rPr>
-              <a:t>•  Simplest, freshest</a:t>
+              <a:t>•  Matches the 1-drum/wk cap</a:t>
             </a:r>
           </a:p>
           <a:p>
@@ -8583,7 +8489,7 @@
                 </a:solidFill>
                 <a:latin typeface="Calibri"/>
               </a:rPr>
-              <a:t>•  Used well within shelf life</a:t>
+              <a:t>•  Freshest; well within shelf life</a:t>
             </a:r>
           </a:p>
           <a:p>
@@ -8599,7 +8505,7 @@
                 </a:solidFill>
                 <a:latin typeface="Calibri"/>
               </a:rPr>
-              <a:t>•  Small batch for APV → higher $/lb</a:t>
+              <a:t>•  APV does small batches → single drum OK</a:t>
             </a:r>
           </a:p>
         </p:txBody>
@@ -8682,7 +8588,7 @@
                 </a:solidFill>
                 <a:latin typeface="Calibri"/>
               </a:rPr>
-              <a:t>Biweekly — 2 drums / 2 wks  (RECOMMENDED)</a:t>
+              <a:t>Biweekly — 2 drums/2 wks  (optional)</a:t>
             </a:r>
           </a:p>
           <a:p>
@@ -8698,7 +8604,7 @@
                 </a:solidFill>
                 <a:latin typeface="Calibri"/>
               </a:rPr>
-              <a:t>•  110 gal hits APV's batch sweet spot → better price</a:t>
+              <a:t>•  Still ~1/wk average &amp; within shelf life</a:t>
             </a:r>
           </a:p>
           <a:p>
@@ -8714,7 +8620,7 @@
                 </a:solidFill>
                 <a:latin typeface="Calibri"/>
               </a:rPr>
-              <a:t>•  2 weeks supply &lt; 18-day shelf life → safe</a:t>
+              <a:t>•  Means holding 2 drums at once</a:t>
             </a:r>
           </a:p>
           <a:p>
@@ -8730,7 +8636,7 @@
                 </a:solidFill>
                 <a:latin typeface="Calibri"/>
               </a:rPr>
-              <a:t>•  Best balance of price + freshness</a:t>
+              <a:t>•  Marginally fewer setups — minor price help</a:t>
             </a:r>
           </a:p>
         </p:txBody>
@@ -8813,7 +8719,7 @@
                 </a:solidFill>
                 <a:latin typeface="Calibri"/>
               </a:rPr>
-              <a:t>3+ drums / batch — AVOID</a:t>
+              <a:t>3+ drums/batch — AVOID</a:t>
             </a:r>
           </a:p>
           <a:p>
@@ -8829,7 +8735,7 @@
                 </a:solidFill>
                 <a:latin typeface="Calibri"/>
               </a:rPr>
-              <a:t>•  3+ weeks supply &gt; 18-day shelf life</a:t>
+              <a:t>•  Exceeds the 1-drum/wk cap</a:t>
             </a:r>
           </a:p>
           <a:p>
@@ -8845,23 +8751,23 @@
                 </a:solidFill>
                 <a:latin typeface="Calibri"/>
               </a:rPr>
+              <a:t>•  3+ wks supply &gt; 18-day shelf life</a:t>
+            </a:r>
+          </a:p>
+          <a:p>
+            <a:pPr algn="l">
+              <a:spcAft>
+                <a:spcPts val="700"/>
+              </a:spcAft>
+            </a:pPr>
+            <a:r>
+              <a:rPr sz="1250" b="0" i="0">
+                <a:solidFill>
+                  <a:srgbClr val="595959"/>
+                </a:solidFill>
+                <a:latin typeface="Calibri"/>
+              </a:rPr>
               <a:t>•  Oldest drum ages out → waste / risk</a:t>
-            </a:r>
-          </a:p>
-          <a:p>
-            <a:pPr algn="l">
-              <a:spcAft>
-                <a:spcPts val="700"/>
-              </a:spcAft>
-            </a:pPr>
-            <a:r>
-              <a:rPr sz="1250" b="0" i="0">
-                <a:solidFill>
-                  <a:srgbClr val="595959"/>
-                </a:solidFill>
-                <a:latin typeface="Calibri"/>
-              </a:rPr>
-              <a:t>•  Don't let APV batch larger just to cut price</a:t>
             </a:r>
           </a:p>
         </p:txBody>
@@ -8900,7 +8806,7 @@
                 </a:solidFill>
                 <a:latin typeface="Calibri"/>
               </a:rPr>
-              <a:t>Rule of thumb: order at least every 2 weeks, max ~2 drums per batch. The biweekly 2-drum cadence gives APV an efficient batch (supports the lower price) while staying inside the 18-day shelf life.</a:t>
+              <a:t>Operating model: weekly single-drum delivery. The 1-drum/week cap rules out larger batches; APV's small-batch capability (from 5 gal) makes weekly drums workable, and the 18-day shelf life comfortably covers them.</a:t>
             </a:r>
           </a:p>
         </p:txBody>
